--- a/docs/PPT/TERRAGRID _ AI Builder Cup.pptx
+++ b/docs/PPT/TERRAGRID _ AI Builder Cup.pptx
@@ -7624,6 +7624,269 @@
           </a:p>
         </p:txBody>
       </p:sp>
+      <p:sp>
+        <p:nvSpPr>
+          <p:cNvPr id="120" name="TextBox 119"/>
+          <p:cNvSpPr txBox="1"/>
+          <p:nvPr/>
+        </p:nvSpPr>
+        <p:spPr>
+          <a:xfrm>
+            <a:off x="265350" y="1180000"/>
+            <a:ext cx="8613300" cy="3860000"/>
+          </a:xfrm>
+          <a:prstGeom prst="rect">
+            <a:avLst/>
+          </a:prstGeom>
+          <a:noFill/>
+        </p:spPr>
+        <p:txBody>
+          <a:bodyPr wrap="square">
+            <a:spAutoFit/>
+          </a:bodyPr>
+          <a:lstStyle/>
+          <a:p>
+            <a:pPr>
+              <a:spcBef>
+                <a:spcPts val="150"/>
+              </a:spcBef>
+              <a:spcAft>
+                <a:spcPts val="150"/>
+              </a:spcAft>
+            </a:pPr>
+            <a:r>
+              <a:rPr sz="900" b="1" i="0">
+                <a:solidFill>
+                  <a:srgbClr val="1A1A1A"/>
+                </a:solidFill>
+                <a:latin typeface="Google Sans Flex"/>
+              </a:rPr>
+              <a:t>Languages:  </a:t>
+            </a:r>
+            <a:r>
+              <a:rPr sz="900" b="0" i="0">
+                <a:solidFill>
+                  <a:srgbClr val="1A1A1A"/>
+                </a:solidFill>
+                <a:latin typeface="Google Sans Flex"/>
+              </a:rPr>
+              <a:t>Python 3.13, TypeScript / JavaScript</a:t>
+            </a:r>
+          </a:p>
+          <a:p>
+            <a:pPr>
+              <a:spcBef>
+                <a:spcPts val="150"/>
+              </a:spcBef>
+              <a:spcAft>
+                <a:spcPts val="150"/>
+              </a:spcAft>
+            </a:pPr>
+            <a:r>
+              <a:rPr sz="900" b="1" i="0">
+                <a:solidFill>
+                  <a:srgbClr val="1A1A1A"/>
+                </a:solidFill>
+                <a:latin typeface="Google Sans Flex"/>
+              </a:rPr>
+              <a:t>Backend:  </a:t>
+            </a:r>
+            <a:r>
+              <a:rPr sz="900" b="0" i="0">
+                <a:solidFill>
+                  <a:srgbClr val="1A1A1A"/>
+                </a:solidFill>
+                <a:latin typeface="Google Sans Flex"/>
+              </a:rPr>
+              <a:t>FastAPI, Pydantic, SQLAlchemy + Alembic, APScheduler, websockets</a:t>
+            </a:r>
+          </a:p>
+          <a:p>
+            <a:pPr>
+              <a:spcBef>
+                <a:spcPts val="150"/>
+              </a:spcBef>
+              <a:spcAft>
+                <a:spcPts val="150"/>
+              </a:spcAft>
+            </a:pPr>
+            <a:r>
+              <a:rPr sz="900" b="1" i="0">
+                <a:solidFill>
+                  <a:srgbClr val="1A1A1A"/>
+                </a:solidFill>
+                <a:latin typeface="Google Sans Flex"/>
+              </a:rPr>
+              <a:t>Database:  </a:t>
+            </a:r>
+            <a:r>
+              <a:rPr sz="900" b="0" i="0">
+                <a:solidFill>
+                  <a:srgbClr val="1A1A1A"/>
+                </a:solidFill>
+                <a:latin typeface="Google Sans Flex"/>
+              </a:rPr>
+              <a:t>PostgreSQL (psycopg2)</a:t>
+            </a:r>
+          </a:p>
+          <a:p>
+            <a:pPr>
+              <a:spcBef>
+                <a:spcPts val="150"/>
+              </a:spcBef>
+              <a:spcAft>
+                <a:spcPts val="150"/>
+              </a:spcAft>
+            </a:pPr>
+            <a:r>
+              <a:rPr sz="900" b="1" i="0">
+                <a:solidFill>
+                  <a:srgbClr val="1A1A1A"/>
+                </a:solidFill>
+                <a:latin typeface="Google Sans Flex"/>
+              </a:rPr>
+              <a:t>Frontend:  </a:t>
+            </a:r>
+            <a:r>
+              <a:rPr sz="900" b="0" i="0">
+                <a:solidFill>
+                  <a:srgbClr val="1A1A1A"/>
+                </a:solidFill>
+                <a:latin typeface="Google Sans Flex"/>
+              </a:rPr>
+              <a:t>Vue 3, Vite, Pinia, Vue Router, vue-i18n, Mapbox GL JS, Axios, Tailwind CSS</a:t>
+            </a:r>
+          </a:p>
+          <a:p>
+            <a:pPr>
+              <a:spcBef>
+                <a:spcPts val="150"/>
+              </a:spcBef>
+              <a:spcAft>
+                <a:spcPts val="150"/>
+              </a:spcAft>
+            </a:pPr>
+            <a:r>
+              <a:rPr sz="900" b="1" i="0">
+                <a:solidFill>
+                  <a:srgbClr val="1A1A1A"/>
+                </a:solidFill>
+                <a:latin typeface="Google Sans Flex"/>
+              </a:rPr>
+              <a:t>Google Cloud / AI:  </a:t>
+            </a:r>
+            <a:r>
+              <a:rPr sz="900" b="0" i="0">
+                <a:solidFill>
+                  <a:srgbClr val="1A1A1A"/>
+                </a:solidFill>
+                <a:latin typeface="Google Sans Flex"/>
+              </a:rPr>
+              <a:t>Vertex AI (Gemini 2.5 Flash), Google Earth Engine, Cloud Storage, Secret Manager</a:t>
+            </a:r>
+          </a:p>
+          <a:p>
+            <a:pPr>
+              <a:spcBef>
+                <a:spcPts val="150"/>
+              </a:spcBef>
+              <a:spcAft>
+                <a:spcPts val="150"/>
+              </a:spcAft>
+            </a:pPr>
+            <a:r>
+              <a:rPr sz="900" b="1" i="0">
+                <a:solidFill>
+                  <a:srgbClr val="1A1A1A"/>
+                </a:solidFill>
+                <a:latin typeface="Google Sans Flex"/>
+              </a:rPr>
+              <a:t>External data APIs:  </a:t>
+            </a:r>
+            <a:r>
+              <a:rPr sz="900" b="0" i="0">
+                <a:solidFill>
+                  <a:srgbClr val="1A1A1A"/>
+                </a:solidFill>
+                <a:latin typeface="Google Sans Flex"/>
+              </a:rPr>
+              <a:t>NASA EONET, USGS Earthquake, NOAA, GDACS, OpenWeatherMap, OpenStreetMap / Overpass, OSRM</a:t>
+            </a:r>
+          </a:p>
+          <a:p>
+            <a:pPr>
+              <a:spcBef>
+                <a:spcPts val="150"/>
+              </a:spcBef>
+              <a:spcAft>
+                <a:spcPts val="150"/>
+              </a:spcAft>
+            </a:pPr>
+            <a:r>
+              <a:rPr sz="900" b="1" i="0">
+                <a:solidFill>
+                  <a:srgbClr val="1A1A1A"/>
+                </a:solidFill>
+                <a:latin typeface="Google Sans Flex"/>
+              </a:rPr>
+              <a:t>Alerting:  </a:t>
+            </a:r>
+            <a:r>
+              <a:rPr sz="900" b="0" i="0">
+                <a:solidFill>
+                  <a:srgbClr val="1A1A1A"/>
+                </a:solidFill>
+                <a:latin typeface="Google Sans Flex"/>
+              </a:rPr>
+              <a:t>WAHA (WhatsApp), Resend (email)</a:t>
+            </a:r>
+          </a:p>
+          <a:p>
+            <a:pPr>
+              <a:spcBef>
+                <a:spcPts val="150"/>
+              </a:spcBef>
+              <a:spcAft>
+                <a:spcPts val="150"/>
+              </a:spcAft>
+            </a:pPr>
+            <a:r>
+              <a:rPr sz="900" b="1" i="0">
+                <a:solidFill>
+                  <a:srgbClr val="1A1A1A"/>
+                </a:solidFill>
+                <a:latin typeface="Google Sans Flex"/>
+              </a:rPr>
+              <a:t>DevOps:  </a:t>
+            </a:r>
+            <a:r>
+              <a:rPr sz="900" b="0" i="0">
+                <a:solidFill>
+                  <a:srgbClr val="1A1A1A"/>
+                </a:solidFill>
+                <a:latin typeface="Google Sans Flex"/>
+              </a:rPr>
+              <a:t>Docker, Docker Compose, GitHub Actions CI, pytest</a:t>
+            </a:r>
+          </a:p>
+          <a:p>
+            <a:pPr>
+              <a:spcBef>
+                <a:spcPts val="800"/>
+              </a:spcBef>
+            </a:pPr>
+            <a:r>
+              <a:rPr sz="850" b="0" i="1">
+                <a:solidFill>
+                  <a:srgbClr val="5F5F5F"/>
+                </a:solidFill>
+                <a:latin typeface="Google Sans Flex"/>
+              </a:rPr>
+              <a:t>Note: Redis and Google Cloud Pub/Sub are present in the codebase but not actively wired into the running prototype at submission time — listed here for transparency, not counted as shipped features.</a:t>
+            </a:r>
+          </a:p>
+        </p:txBody>
+      </p:sp>
     </p:spTree>
   </p:cSld>
   <p:clrMapOvr>
@@ -11523,6 +11786,409 @@
           </a:p>
         </p:txBody>
       </p:sp>
+      <p:sp>
+        <p:nvSpPr>
+          <p:cNvPr id="88" name="TextBox 87"/>
+          <p:cNvSpPr txBox="1"/>
+          <p:nvPr/>
+        </p:nvSpPr>
+        <p:spPr>
+          <a:xfrm>
+            <a:off x="265350" y="1180000"/>
+            <a:ext cx="8613300" cy="3860000"/>
+          </a:xfrm>
+          <a:prstGeom prst="rect">
+            <a:avLst/>
+          </a:prstGeom>
+          <a:noFill/>
+        </p:spPr>
+        <p:txBody>
+          <a:bodyPr wrap="square">
+            <a:spAutoFit/>
+          </a:bodyPr>
+          <a:lstStyle/>
+          <a:p>
+            <a:pPr>
+              <a:spcBef>
+                <a:spcPts val="400"/>
+              </a:spcBef>
+              <a:spcAft>
+                <a:spcPts val="100"/>
+              </a:spcAft>
+            </a:pPr>
+            <a:r>
+              <a:rPr sz="1100" b="1" i="0">
+                <a:solidFill>
+                  <a:srgbClr val="1E8E3E"/>
+                </a:solidFill>
+                <a:latin typeface="Google Sans Flex Medium"/>
+              </a:rPr>
+              <a:t>LIVE IN PROTOTYPE — RESPONSE phase (92% shipped)</a:t>
+            </a:r>
+          </a:p>
+          <a:p>
+            <a:pPr>
+              <a:spcBef>
+                <a:spcPts val="0"/>
+              </a:spcBef>
+              <a:spcAft>
+                <a:spcPts val="0"/>
+              </a:spcAft>
+            </a:pPr>
+            <a:r>
+              <a:rPr sz="900" b="0" i="0">
+                <a:solidFill>
+                  <a:srgbClr val="1A1A1A"/>
+                </a:solidFill>
+                <a:latin typeface="Google Sans Flex"/>
+              </a:rPr>
+              <a:t>•  Live multi-hazard incident dashboard (earthquake, volcano, wildfire, storm, flood) with threat scoring</a:t>
+            </a:r>
+          </a:p>
+          <a:p>
+            <a:pPr>
+              <a:spcBef>
+                <a:spcPts val="0"/>
+              </a:spcBef>
+              <a:spcAft>
+                <a:spcPts val="0"/>
+              </a:spcAft>
+            </a:pPr>
+            <a:r>
+              <a:rPr sz="900" b="0" i="0">
+                <a:solidFill>
+                  <a:srgbClr val="1A1A1A"/>
+                </a:solidFill>
+                <a:latin typeface="Google Sans Flex"/>
+              </a:rPr>
+              <a:t>•  AI Decision Support (Gemini 2.5 Flash): response plans, preparedness actions, agency alert drafts, deep dossiers</a:t>
+            </a:r>
+          </a:p>
+          <a:p>
+            <a:pPr>
+              <a:spcBef>
+                <a:spcPts val="0"/>
+              </a:spcBef>
+              <a:spcAft>
+                <a:spcPts val="0"/>
+              </a:spcAft>
+            </a:pPr>
+            <a:r>
+              <a:rPr sz="900" b="0" i="0">
+                <a:solidFill>
+                  <a:srgbClr val="1A1A1A"/>
+                </a:solidFill>
+                <a:latin typeface="Google Sans Flex"/>
+              </a:rPr>
+              <a:t>•  Evacuation route pre-calculation (OSRM road-network routing, geodesic fallback on failure)</a:t>
+            </a:r>
+          </a:p>
+          <a:p>
+            <a:pPr>
+              <a:spcBef>
+                <a:spcPts val="0"/>
+              </a:spcBef>
+              <a:spcAft>
+                <a:spcPts val="0"/>
+              </a:spcAft>
+            </a:pPr>
+            <a:r>
+              <a:rPr sz="900" b="0" i="0">
+                <a:solidFill>
+                  <a:srgbClr val="1A1A1A"/>
+                </a:solidFill>
+                <a:latin typeface="Google Sans Flex"/>
+              </a:rPr>
+              <a:t>•  Live infrastructure mapping — hospitals, fire stations, schools, power, bridges (OpenStreetMap/Overpass)</a:t>
+            </a:r>
+          </a:p>
+          <a:p>
+            <a:pPr>
+              <a:spcBef>
+                <a:spcPts val="0"/>
+              </a:spcBef>
+              <a:spcAft>
+                <a:spcPts val="0"/>
+              </a:spcAft>
+            </a:pPr>
+            <a:r>
+              <a:rPr sz="900" b="0" i="0">
+                <a:solidFill>
+                  <a:srgbClr val="1A1A1A"/>
+                </a:solidFill>
+                <a:latin typeface="Google Sans Flex"/>
+              </a:rPr>
+              <a:t>•  Satellite cross-validation + Sentinel-1 SAR flood detection (Google Earth Engine)</a:t>
+            </a:r>
+          </a:p>
+          <a:p>
+            <a:pPr>
+              <a:spcBef>
+                <a:spcPts val="0"/>
+              </a:spcBef>
+              <a:spcAft>
+                <a:spcPts val="0"/>
+              </a:spcAft>
+            </a:pPr>
+            <a:r>
+              <a:rPr sz="900" b="0" i="0">
+                <a:solidFill>
+                  <a:srgbClr val="1A1A1A"/>
+                </a:solidFill>
+                <a:latin typeface="Google Sans Flex"/>
+              </a:rPr>
+              <a:t>•  Multi-channel alerting — WhatsApp (WAHA) and email (Resend), per-audience templates</a:t>
+            </a:r>
+          </a:p>
+          <a:p>
+            <a:pPr>
+              <a:spcBef>
+                <a:spcPts val="0"/>
+              </a:spcBef>
+              <a:spcAft>
+                <a:spcPts val="0"/>
+              </a:spcAft>
+            </a:pPr>
+            <a:r>
+              <a:rPr sz="900" b="0" i="0">
+                <a:solidFill>
+                  <a:srgbClr val="1A1A1A"/>
+                </a:solidFill>
+                <a:latin typeface="Google Sans Flex"/>
+              </a:rPr>
+              <a:t>•  Decision lineage / audit trail and real-time WebSocket dashboard updates</a:t>
+            </a:r>
+          </a:p>
+          <a:p>
+            <a:pPr>
+              <a:spcBef>
+                <a:spcPts val="400"/>
+              </a:spcBef>
+              <a:spcAft>
+                <a:spcPts val="100"/>
+              </a:spcAft>
+            </a:pPr>
+            <a:r>
+              <a:rPr sz="1100" b="1" i="0">
+                <a:solidFill>
+                  <a:srgbClr val="1E8E3E"/>
+                </a:solidFill>
+                <a:latin typeface="Google Sans Flex Medium"/>
+              </a:rPr>
+              <a:t>LIVE IN PROTOTYPE — PREPARE phase (89% shipped)</a:t>
+            </a:r>
+          </a:p>
+          <a:p>
+            <a:pPr>
+              <a:spcBef>
+                <a:spcPts val="0"/>
+              </a:spcBef>
+              <a:spcAft>
+                <a:spcPts val="0"/>
+              </a:spcAft>
+            </a:pPr>
+            <a:r>
+              <a:rPr sz="900" b="0" i="0">
+                <a:solidFill>
+                  <a:srgbClr val="1A1A1A"/>
+                </a:solidFill>
+                <a:latin typeface="Google Sans Flex"/>
+              </a:rPr>
+              <a:t>•  7-day risk escalation forecast across 8 monitored cities (OpenWeatherMap)</a:t>
+            </a:r>
+          </a:p>
+          <a:p>
+            <a:pPr>
+              <a:spcBef>
+                <a:spcPts val="0"/>
+              </a:spcBef>
+              <a:spcAft>
+                <a:spcPts val="0"/>
+              </a:spcAft>
+            </a:pPr>
+            <a:r>
+              <a:rPr sz="900" b="0" i="0">
+                <a:solidFill>
+                  <a:srgbClr val="1A1A1A"/>
+                </a:solidFill>
+                <a:latin typeface="Google Sans Flex"/>
+              </a:rPr>
+              <a:t>•  Risk Escalation Timeline — day-by-day confidence %, per city</a:t>
+            </a:r>
+          </a:p>
+          <a:p>
+            <a:pPr>
+              <a:spcBef>
+                <a:spcPts val="0"/>
+              </a:spcBef>
+              <a:spcAft>
+                <a:spcPts val="0"/>
+              </a:spcAft>
+            </a:pPr>
+            <a:r>
+              <a:rPr sz="900" b="0" i="0">
+                <a:solidFill>
+                  <a:srgbClr val="1A1A1A"/>
+                </a:solidFill>
+                <a:latin typeface="Google Sans Flex"/>
+              </a:rPr>
+              <a:t>•  AI-generated Preparedness Checklist with per-agency task assignment</a:t>
+            </a:r>
+          </a:p>
+          <a:p>
+            <a:pPr>
+              <a:spcBef>
+                <a:spcPts val="0"/>
+              </a:spcBef>
+              <a:spcAft>
+                <a:spcPts val="0"/>
+              </a:spcAft>
+            </a:pPr>
+            <a:r>
+              <a:rPr sz="900" b="0" i="0">
+                <a:solidFill>
+                  <a:srgbClr val="1A1A1A"/>
+                </a:solidFill>
+                <a:latin typeface="Google Sans Flex"/>
+              </a:rPr>
+              <a:t>•  Agency Alert Templates — tone adapted per audience (farmers, hospitals, NGOs, municipal corps)</a:t>
+            </a:r>
+          </a:p>
+          <a:p>
+            <a:pPr>
+              <a:spcBef>
+                <a:spcPts val="0"/>
+              </a:spcBef>
+              <a:spcAft>
+                <a:spcPts val="0"/>
+              </a:spcAft>
+            </a:pPr>
+            <a:r>
+              <a:rPr sz="900" b="0" i="0">
+                <a:solidFill>
+                  <a:srgbClr val="1A1A1A"/>
+                </a:solidFill>
+                <a:latin typeface="Google Sans Flex"/>
+              </a:rPr>
+              <a:t>•  Source of Truth indicator — flags degraded/stale data instead of hiding it</a:t>
+            </a:r>
+          </a:p>
+          <a:p>
+            <a:pPr>
+              <a:spcBef>
+                <a:spcPts val="400"/>
+              </a:spcBef>
+              <a:spcAft>
+                <a:spcPts val="100"/>
+              </a:spcAft>
+            </a:pPr>
+            <a:r>
+              <a:rPr sz="1100" b="1" i="0">
+                <a:solidFill>
+                  <a:srgbClr val="1857B8"/>
+                </a:solidFill>
+                <a:latin typeface="Google Sans Flex Medium"/>
+              </a:rPr>
+              <a:t>PLATFORM-WIDE</a:t>
+            </a:r>
+          </a:p>
+          <a:p>
+            <a:pPr>
+              <a:spcBef>
+                <a:spcPts val="0"/>
+              </a:spcBef>
+              <a:spcAft>
+                <a:spcPts val="0"/>
+              </a:spcAft>
+            </a:pPr>
+            <a:r>
+              <a:rPr sz="900" b="0" i="0">
+                <a:solidFill>
+                  <a:srgbClr val="1A1A1A"/>
+                </a:solidFill>
+                <a:latin typeface="Google Sans Flex"/>
+              </a:rPr>
+              <a:t>•  Raw data cross-check logging — every external API + Gemini response saved to disk, folder-wise, for audit</a:t>
+            </a:r>
+          </a:p>
+          <a:p>
+            <a:pPr>
+              <a:spcBef>
+                <a:spcPts val="0"/>
+              </a:spcBef>
+              <a:spcAft>
+                <a:spcPts val="0"/>
+              </a:spcAft>
+            </a:pPr>
+            <a:r>
+              <a:rPr sz="900" b="0" i="0">
+                <a:solidFill>
+                  <a:srgbClr val="1A1A1A"/>
+                </a:solidFill>
+                <a:latin typeface="Google Sans Flex"/>
+              </a:rPr>
+              <a:t>•  Resilient data fetch — automatic retry + backoff and graceful fallback on source failure</a:t>
+            </a:r>
+          </a:p>
+          <a:p>
+            <a:pPr>
+              <a:spcBef>
+                <a:spcPts val="400"/>
+              </a:spcBef>
+              <a:spcAft>
+                <a:spcPts val="100"/>
+              </a:spcAft>
+            </a:pPr>
+            <a:r>
+              <a:rPr sz="1100" b="1" i="0">
+                <a:solidFill>
+                  <a:srgbClr val="B86E00"/>
+                </a:solidFill>
+                <a:latin typeface="Google Sans Flex Medium"/>
+              </a:rPr>
+              <a:t>ROADMAP — not yet built (shown honestly, not demoed)</a:t>
+            </a:r>
+          </a:p>
+          <a:p>
+            <a:pPr>
+              <a:spcBef>
+                <a:spcPts val="0"/>
+              </a:spcBef>
+              <a:spcAft>
+                <a:spcPts val="0"/>
+              </a:spcAft>
+            </a:pPr>
+            <a:r>
+              <a:rPr sz="900" b="0" i="0">
+                <a:solidFill>
+                  <a:srgbClr val="1A1A1A"/>
+                </a:solidFill>
+                <a:latin typeface="Google Sans Flex"/>
+              </a:rPr>
+              <a:t>•  PREDICT phase (0/8 features) — ENSO monitoring, seasonal rainfall outlook, climate signal dashboard</a:t>
+            </a:r>
+          </a:p>
+          <a:p>
+            <a:pPr>
+              <a:spcBef>
+                <a:spcPts val="0"/>
+              </a:spcBef>
+              <a:spcAft>
+                <a:spcPts val="0"/>
+              </a:spcAft>
+            </a:pPr>
+            <a:r>
+              <a:rPr sz="900" b="0" i="0">
+                <a:solidFill>
+                  <a:srgbClr val="1A1A1A"/>
+                </a:solidFill>
+                <a:latin typeface="Google Sans Flex"/>
+              </a:rPr>
+              <a:t>•  RECOVER phase (0/11 features) — before/after damage assessment, recovery milestone tracking</a:t>
+            </a:r>
+          </a:p>
+        </p:txBody>
+      </p:sp>
     </p:spTree>
   </p:cSld>
   <p:clrMapOvr>
@@ -11692,6 +12358,102 @@
               <a:cs typeface="Google Sans Flex Medium"/>
               <a:sym typeface="Google Sans Flex Medium"/>
             </a:endParaRPr>
+          </a:p>
+        </p:txBody>
+      </p:sp>
+      <p:sp>
+        <p:nvSpPr>
+          <p:cNvPr id="96" name="TextBox 95"/>
+          <p:cNvSpPr txBox="1"/>
+          <p:nvPr/>
+        </p:nvSpPr>
+        <p:spPr>
+          <a:xfrm>
+            <a:off x="265350" y="1150000"/>
+            <a:ext cx="8613300" cy="3920000"/>
+          </a:xfrm>
+          <a:prstGeom prst="rect">
+            <a:avLst/>
+          </a:prstGeom>
+          <a:noFill/>
+        </p:spPr>
+        <p:txBody>
+          <a:bodyPr wrap="square">
+            <a:spAutoFit/>
+          </a:bodyPr>
+          <a:lstStyle/>
+          <a:p>
+            <a:pPr>
+              <a:spcBef>
+                <a:spcPts val="200"/>
+              </a:spcBef>
+              <a:spcAft>
+                <a:spcPts val="300"/>
+              </a:spcAft>
+            </a:pPr>
+            <a:r>
+              <a:rPr sz="1100" b="1" i="0">
+                <a:solidFill>
+                  <a:srgbClr val="1A1A1A"/>
+                </a:solidFill>
+                <a:latin typeface="Google Sans Flex Medium"/>
+              </a:rPr>
+              <a:t>How an incident moves through TerraGrid today</a:t>
+            </a:r>
+          </a:p>
+          <a:p>
+            <a:pPr>
+              <a:lnSpc>
+                <a:spcPct val="88000"/>
+              </a:lnSpc>
+              <a:spcBef>
+                <a:spcPts val="100"/>
+              </a:spcBef>
+            </a:pPr>
+            <a:r>
+              <a:rPr sz="680" b="0" i="0">
+                <a:solidFill>
+                  <a:srgbClr val="1A1A1A"/>
+                </a:solidFill>
+                <a:latin typeface="Courier New"/>
+              </a:rPr>
+              <a:t>┌────────────────────────┐   ┌───────────────────────────────┐   ┌──────────────────────────┐
+│ EXTERNAL SOURCES         │─▶│ 1. DATA INGESTION                │─▶│ Incident record (PostgreSQL)│
+│ NASA EONET·USGS·NOAA·    │  │ Async poll + OSM infra lookup    │  └──────────────────────────┘
+│ GDACS·OpenWeatherMap     │  └───────────────────────────────┘
+└────────────────────────┘
+┌───────────────────────────────┐   Risk Escalation Timeline, Preparedness
+│ 2. PREPARE PHASE                 │─▶ Checklist, Agency Alert drafts
+│ 7-day forecast + AI Decision     │
+│ Support (Gemini 2.5 Flash)       │
+└───────────────────────────────┘
+┌───────────────────────────────┐   Dispatch recommendation, evac route
+│ 3. RESPONSE PHASE                 │─▶ (OSRM), WhatsApp / Email alert sent
+│ Live dashboard + evac routing     │
+│ + satellite cross-validation      │
+└───────────────────────────────┘
+┌───────────────────────────────┐   Raw API + Gemini response saved to
+│ 4. AUDIT TRAIL (every step)       │─▶ logs/ as a JSON envelope, folder
+│ data_logger.py cross-check        │   per source
+└───────────────────────────────┘
+</a:t>
+            </a:r>
+          </a:p>
+          <a:p>
+            <a:pPr>
+              <a:spcBef>
+                <a:spcPts val="800"/>
+              </a:spcBef>
+            </a:pPr>
+            <a:r>
+              <a:rPr sz="900" b="0" i="1">
+                <a:solidFill>
+                  <a:srgbClr val="B86E00"/>
+                </a:solidFill>
+                <a:latin typeface="Google Sans Flex"/>
+              </a:rPr>
+              <a:t>PREDICT (6-month early warning) and RECOVER (post-event damage assessment) are the next two phases on the roadmap — not part of this flow yet.</a:t>
+            </a:r>
           </a:p>
         </p:txBody>
       </p:sp>
@@ -12036,6 +12798,98 @@
               <a:cs typeface="Google Sans Flex Medium"/>
               <a:sym typeface="Google Sans Flex Medium"/>
             </a:endParaRPr>
+          </a:p>
+        </p:txBody>
+      </p:sp>
+      <p:sp>
+        <p:nvSpPr>
+          <p:cNvPr id="112" name="TextBox 111"/>
+          <p:cNvSpPr txBox="1"/>
+          <p:nvPr/>
+        </p:nvSpPr>
+        <p:spPr>
+          <a:xfrm>
+            <a:off x="265350" y="1180000"/>
+            <a:ext cx="8613300" cy="3860000"/>
+          </a:xfrm>
+          <a:prstGeom prst="rect">
+            <a:avLst/>
+          </a:prstGeom>
+          <a:noFill/>
+        </p:spPr>
+        <p:txBody>
+          <a:bodyPr wrap="square">
+            <a:spAutoFit/>
+          </a:bodyPr>
+          <a:lstStyle/>
+          <a:p>
+            <a:pPr>
+              <a:spcBef>
+                <a:spcPts val="200"/>
+              </a:spcBef>
+              <a:spcAft>
+                <a:spcPts val="400"/>
+              </a:spcAft>
+            </a:pPr>
+            <a:r>
+              <a:rPr sz="1100" b="1" i="0">
+                <a:solidFill>
+                  <a:srgbClr val="1A1A1A"/>
+                </a:solidFill>
+                <a:latin typeface="Google Sans Flex Medium"/>
+              </a:rPr>
+              <a:t>System Architecture (verified against the running codebase)</a:t>
+            </a:r>
+          </a:p>
+          <a:p>
+            <a:pPr>
+              <a:lnSpc>
+                <a:spcPct val="92000"/>
+              </a:lnSpc>
+              <a:spcBef>
+                <a:spcPts val="400"/>
+              </a:spcBef>
+            </a:pPr>
+            <a:r>
+              <a:rPr sz="700" b="0" i="0">
+                <a:solidFill>
+                  <a:srgbClr val="1A1A1A"/>
+                </a:solidFill>
+                <a:latin typeface="Courier New"/>
+              </a:rPr>
+              <a:t>┌───────────────────────┐   ┌─────────────────────────────┐   ┌───────────────────────────┐
+│   DATA SOURCES          │   │  BACKEND — FastAPI, Python 3.13 │   │ FRONTEND — Vue 3 + Vite     │
+│   NASA EONET · USGS     │──▶│  PostgreSQL (SQLAlchemy+Alembic)│──▶│ Pinia · Vue Router          │
+│   NOAA · GDACS           │   │  APScheduler background polling │   │ Mapbox GL live map          │
+│   OpenWeatherMap         │   │  WebSocket server (/ws/dashboard)│   │ WebSocket live updates      │
+│   OpenStreetMap/Overpass │   └───────────────┬──────────────────┘   │ i18n · mobile-responsive    │
+│   OSRM routing           │                   ▼                      └───────────────────────────┘
+└───────────────────────┘   ┌─────────────────────────────┐
+                              │  AI LAYER                      │   ┌───────────────────────────┐
+                              │  Vertex AI — Gemini 2.5 Flash  │──▶│  ALERTING                   │
+                              │  Google Earth Engine(Sentinel-1)│   │  WhatsApp (WAHA)            │
+                              │  Decision lineage / audit trail │   │  Email (Resend)              │
+                              └─────────────────────────────┘   └───────────────────────────┘
+TRACEABILITY: every external API call and every Gemini response is written to
+logs/data/&lt;source&gt;/ as a timestamped JSON envelope — a cross-check trail, not just a log line.
+</a:t>
+            </a:r>
+          </a:p>
+          <a:p>
+            <a:pPr>
+              <a:spcBef>
+                <a:spcPts val="600"/>
+              </a:spcBef>
+            </a:pPr>
+            <a:r>
+              <a:rPr sz="900" b="0" i="1">
+                <a:solidFill>
+                  <a:srgbClr val="5F5F5F"/>
+                </a:solidFill>
+                <a:latin typeface="Google Sans Flex"/>
+              </a:rPr>
+              <a:t>Deployment target: Google Cloud Run (backend) with Docker + GitHub Actions CI. Not yet deployed to production at submission time.</a:t>
+            </a:r>
           </a:p>
         </p:txBody>
       </p:sp>

--- a/docs/PPT/TERRAGRID _ AI Builder Cup.pptx
+++ b/docs/PPT/TERRAGRID _ AI Builder Cup.pptx
@@ -9289,124 +9289,249 @@
           </a:bodyPr>
           <a:lstStyle/>
           <a:p>
+            <a:pPr>
+              <a:spcBef>
+                <a:spcPts val="0"/>
+              </a:spcBef>
+              <a:spcAft>
+                <a:spcPts val="400"/>
+              </a:spcAft>
+              <a:buNone/>
+            </a:pPr>
             <a:r>
-              <a:rPr lang="en-IN" sz="1000" b="1" dirty="0"/>
+              <a:rPr sz="1150" b="1" i="0">
+                <a:solidFill>
+                  <a:srgbClr val="1A1A1A"/>
+                </a:solidFill>
+                <a:latin typeface="Google Sans Flex Medium"/>
+              </a:rPr>
               <a:t>The Problem</a:t>
             </a:r>
             <a:endParaRPr lang="en-IN" sz="1000" dirty="0"/>
           </a:p>
           <a:p>
-            <a:br>
-              <a:rPr lang="en-IN" sz="1000" dirty="0"/>
-            </a:br>
+            <a:pPr>
+              <a:spcBef>
+                <a:spcPts val="200"/>
+              </a:spcBef>
+              <a:spcAft>
+                <a:spcPts val="600"/>
+              </a:spcAft>
+            </a:pPr>
             <a:r>
-              <a:rPr lang="en-IN" sz="1000" dirty="0"/>
+              <a:rPr sz="1000" b="0" i="0">
+                <a:solidFill>
+                  <a:srgbClr val="1A1A1A"/>
+                </a:solidFill>
+                <a:latin typeface="Google Sans Flex"/>
+              </a:rPr>
               <a:t>Natural disasters in APAC kill thousands yearly. The core issue isn't detection—satellites handle that. The issue is speed and coordination. Disaster response today is siloed: meteorologists forecast, planners allocate resources days later, responders in the field lack real-time intel, and lessons learned never feed back to prevention. Decision-to-action takes hours. By then, preventable lives are lost.</a:t>
             </a:r>
           </a:p>
           <a:p>
-            <a:endParaRPr lang="en-IN" sz="1000" dirty="0"/>
-          </a:p>
-          <a:p>
+            <a:pPr>
+              <a:spcBef>
+                <a:spcPts val="400"/>
+              </a:spcBef>
+              <a:spcAft>
+                <a:spcPts val="400"/>
+              </a:spcAft>
+            </a:pPr>
             <a:r>
-              <a:rPr lang="en-IN" sz="1000" b="1" dirty="0"/>
+              <a:rPr sz="1150" b="1" i="0">
+                <a:solidFill>
+                  <a:srgbClr val="1A1A1A"/>
+                </a:solidFill>
+                <a:latin typeface="Google Sans Flex Medium"/>
+              </a:rPr>
               <a:t>The Solution</a:t>
             </a:r>
-            <a:endParaRPr lang="en-IN" sz="1000" dirty="0"/>
-          </a:p>
-          <a:p>
-            <a:br>
-              <a:rPr lang="en-IN" sz="1000" dirty="0"/>
-            </a:br>
+          </a:p>
+          <a:p>
+            <a:pPr>
+              <a:spcBef>
+                <a:spcPts val="200"/>
+              </a:spcBef>
+              <a:spcAft>
+                <a:spcPts val="200"/>
+              </a:spcAft>
+            </a:pPr>
             <a:r>
-              <a:rPr lang="en-IN" sz="1000" dirty="0"/>
-              <a:t>TerraGrid is an AI-powered disaster intelligence platform that unifies response across four phases:</a:t>
+              <a:rPr sz="1000" b="0" i="0">
+                <a:solidFill>
+                  <a:srgbClr val="1A1A1A"/>
+                </a:solidFill>
+                <a:latin typeface="Google Sans Flex"/>
+              </a:rPr>
+              <a:t>TerraGrid is an AI-powered disaster intelligence platform built around a four-phase lifecycle. Two phases are working in this prototype today; two are the near-term roadmap:</a:t>
             </a:r>
           </a:p>
           <a:p>
-            <a:br>
-              <a:rPr lang="en-IN" sz="1000" dirty="0"/>
-            </a:br>
+            <a:pPr>
+              <a:spcBef>
+                <a:spcPts val="300"/>
+              </a:spcBef>
+              <a:spcAft>
+                <a:spcPts val="0"/>
+              </a:spcAft>
+            </a:pPr>
             <a:r>
-              <a:rPr lang="en-IN" sz="1000" dirty="0"/>
-              <a:t>1. </a:t>
+              <a:rPr sz="1000" b="1" i="0">
+                <a:solidFill>
+                  <a:srgbClr val="1A1A1A"/>
+                </a:solidFill>
+                <a:latin typeface="Google Sans Flex"/>
+              </a:rPr>
+              <a:t>1. PREPARE </a:t>
             </a:r>
             <a:r>
-              <a:rPr lang="en-IN" sz="1000" b="1" dirty="0"/>
-              <a:t>**PREDICT**</a:t>
+              <a:rPr sz="900" b="0" i="1">
+                <a:solidFill>
+                  <a:srgbClr val="1E8E3E"/>
+                </a:solidFill>
+                <a:latin typeface="Google Sans Flex"/>
+              </a:rPr>
+              <a:t>(live in this prototype) </a:t>
             </a:r>
             <a:r>
-              <a:rPr lang="en-IN" sz="1000" dirty="0"/>
-              <a:t> — 7-day forecast + infrastructure vulnerability identification</a:t>
+              <a:rPr sz="1000" b="0" i="0">
+                <a:solidFill>
+                  <a:srgbClr val="1A1A1A"/>
+                </a:solidFill>
+                <a:latin typeface="Google Sans Flex"/>
+              </a:rPr>
+              <a:t>— AI-generated impact analysis and preparedness checklists, 7-day risk forecasting across 8 cities, per-audience agency alert drafting</a:t>
             </a:r>
           </a:p>
           <a:p>
+            <a:pPr>
+              <a:spcBef>
+                <a:spcPts val="300"/>
+              </a:spcBef>
+              <a:spcAft>
+                <a:spcPts val="0"/>
+              </a:spcAft>
+            </a:pPr>
             <a:r>
-              <a:rPr lang="en-IN" sz="1000" dirty="0"/>
-              <a:t>2. </a:t>
+              <a:rPr sz="1000" b="1" i="0">
+                <a:solidFill>
+                  <a:srgbClr val="1A1A1A"/>
+                </a:solidFill>
+                <a:latin typeface="Google Sans Flex"/>
+              </a:rPr>
+              <a:t>2. RESPONSE </a:t>
             </a:r>
             <a:r>
-              <a:rPr lang="en-IN" sz="1000" b="1" dirty="0"/>
-              <a:t>**PREPARE**</a:t>
+              <a:rPr sz="900" b="0" i="1">
+                <a:solidFill>
+                  <a:srgbClr val="1E8E3E"/>
+                </a:solidFill>
+                <a:latin typeface="Google Sans Flex"/>
+              </a:rPr>
+              <a:t>(live in this prototype) </a:t>
             </a:r>
             <a:r>
-              <a:rPr lang="en-IN" sz="1000" dirty="0"/>
-              <a:t> — AI impact analysis ("X buildings exposed, Y population at risk") + resource pre-positioning</a:t>
+              <a:rPr sz="1000" b="0" i="0">
+                <a:solidFill>
+                  <a:srgbClr val="1A1A1A"/>
+                </a:solidFill>
+                <a:latin typeface="Google Sans Flex"/>
+              </a:rPr>
+              <a:t>— Live multi-hazard incident dashboard, AI decision support (Gemini), evacuation route pre-calculation, multi-channel WhatsApp/email alerting</a:t>
             </a:r>
           </a:p>
           <a:p>
+            <a:pPr>
+              <a:spcBef>
+                <a:spcPts val="300"/>
+              </a:spcBef>
+              <a:spcAft>
+                <a:spcPts val="0"/>
+              </a:spcAft>
+            </a:pPr>
             <a:r>
-              <a:rPr lang="en-IN" sz="1000" dirty="0"/>
-              <a:t>3. </a:t>
+              <a:rPr sz="1000" b="1" i="0">
+                <a:solidFill>
+                  <a:srgbClr val="1A1A1A"/>
+                </a:solidFill>
+                <a:latin typeface="Google Sans Flex"/>
+              </a:rPr>
+              <a:t>3. PREDICT </a:t>
             </a:r>
             <a:r>
-              <a:rPr lang="en-IN" sz="1000" b="1" dirty="0"/>
-              <a:t>**RESPONSE**</a:t>
+              <a:rPr sz="900" b="0" i="1">
+                <a:solidFill>
+                  <a:srgbClr val="B86E00"/>
+                </a:solidFill>
+                <a:latin typeface="Google Sans Flex"/>
+              </a:rPr>
+              <a:t>(roadmap — next sprint) </a:t>
             </a:r>
             <a:r>
-              <a:rPr lang="en-IN" sz="1000" dirty="0"/>
-              <a:t> — Live incident dashboard + dynamic evacuation routing + multi-channel alerts</a:t>
+              <a:rPr sz="1000" b="0" i="0">
+                <a:solidFill>
+                  <a:srgbClr val="1A1A1A"/>
+                </a:solidFill>
+                <a:latin typeface="Google Sans Flex"/>
+              </a:rPr>
+              <a:t>— 6-month early warning from climate signals (ENSO, seasonal rainfall)</a:t>
             </a:r>
           </a:p>
           <a:p>
+            <a:pPr>
+              <a:spcBef>
+                <a:spcPts val="300"/>
+              </a:spcBef>
+              <a:spcAft>
+                <a:spcPts val="0"/>
+              </a:spcAft>
+            </a:pPr>
             <a:r>
-              <a:rPr lang="en-IN" sz="1000" dirty="0"/>
-              <a:t>4. </a:t>
+              <a:rPr sz="1000" b="1" i="0">
+                <a:solidFill>
+                  <a:srgbClr val="1A1A1A"/>
+                </a:solidFill>
+                <a:latin typeface="Google Sans Flex"/>
+              </a:rPr>
+              <a:t>4. RECOVER </a:t>
             </a:r>
             <a:r>
-              <a:rPr lang="en-IN" sz="1000" b="1" dirty="0"/>
-              <a:t>**RECOVER**</a:t>
+              <a:rPr sz="900" b="0" i="1">
+                <a:solidFill>
+                  <a:srgbClr val="B86E00"/>
+                </a:solidFill>
+                <a:latin typeface="Google Sans Flex"/>
+              </a:rPr>
+              <a:t>(roadmap) </a:t>
             </a:r>
             <a:r>
-              <a:rPr lang="en-IN" sz="1000" dirty="0"/>
-              <a:t> — Before/after damage assessment + lessons learned</a:t>
+              <a:rPr sz="1000" b="0" i="0">
+                <a:solidFill>
+                  <a:srgbClr val="1A1A1A"/>
+                </a:solidFill>
+                <a:latin typeface="Google Sans Flex"/>
+              </a:rPr>
+              <a:t>— Before/after satellite damage assessment, recovery tracking</a:t>
             </a:r>
           </a:p>
           <a:p>
-            <a:br>
-              <a:rPr lang="en-IN" sz="1000" dirty="0"/>
-            </a:br>
-            <a:endParaRPr lang="en-IN" sz="1000" dirty="0"/>
-          </a:p>
-          <a:p>
+            <a:pPr>
+              <a:spcBef>
+                <a:spcPts val="600"/>
+              </a:spcBef>
+              <a:spcAft>
+                <a:spcPts val="0"/>
+              </a:spcAft>
+            </a:pPr>
             <a:r>
-              <a:rPr lang="en-IN" sz="1000" dirty="0"/>
-              <a:t>Unlike point solutions (fire detection, earthquake dashboards), TerraGrid connects all four phases. Every decision is tracked—why it was made, what data informed it, whether it worked post-event. Responders don't just see data; they get AI recommendations: </a:t>
+              <a:rPr sz="1000" b="0" i="0">
+                <a:solidFill>
+                  <a:srgbClr val="1A1A1A"/>
+                </a:solidFill>
+                <a:latin typeface="Google Sans Flex"/>
+              </a:rPr>
+              <a:t>Unlike point solutions (fire detection, earthquake dashboards), TerraGrid connects phases into one workflow instead of leaving teams to stitch together disconnected tools. Every AI recommendation is logged — what data informed it, what the model returned — so the reasoning behind a suggested action is auditable, not a black box.</a:t>
             </a:r>
-            <a:r>
-              <a:rPr lang="en-IN" sz="1000" i="1" dirty="0"/>
-              <a:t>*"Route evac via Highway 3 (not Highway 1—flooded). This saves 15 min/person</a:t>
-            </a:r>
-            <a:r>
-              <a:rPr lang="en-IN" sz="1100" i="1" dirty="0"/>
-              <a:t>."*</a:t>
-            </a:r>
-            <a:endParaRPr lang="en-IN" sz="1100" dirty="0">
-              <a:latin typeface="Consolas" panose="020B0609020204030204" pitchFamily="49" charset="0"/>
-            </a:endParaRPr>
-          </a:p>
-          <a:p>
-            <a:endParaRPr lang="en-IN" sz="1100" dirty="0"/>
           </a:p>
         </p:txBody>
       </p:sp>
@@ -9539,7 +9664,7 @@
         <p:spPr>
           <a:xfrm>
             <a:off x="317602" y="578917"/>
-            <a:ext cx="8943000" cy="1366200"/>
+            <a:ext cx="8943000" cy="2050000"/>
           </a:xfrm>
           <a:prstGeom prst="rect">
             <a:avLst/>
@@ -9560,16 +9685,17 @@
                 <a:spcPts val="0"/>
               </a:spcBef>
               <a:spcAft>
-                <a:spcPts val="0"/>
+                <a:spcPts val="100"/>
               </a:spcAft>
               <a:buSzPts val="1300"/>
+              <a:buNone/>
             </a:pPr>
             <a:r>
-              <a:rPr lang="en-GB" sz="1300" dirty="0">
-                <a:latin typeface="Google Sans Flex"/>
-                <a:ea typeface="Google Sans Flex"/>
-                <a:cs typeface="Google Sans Flex"/>
-                <a:sym typeface="Google Sans Flex"/>
+              <a:rPr sz="1300" b="0" i="0">
+                <a:solidFill>
+                  <a:srgbClr val="1A1A1A"/>
+                </a:solidFill>
+                <a:latin typeface="Google Sans Flex Medium"/>
               </a:rPr>
               <a:t>How different is it from any of the other existing ideas?</a:t>
             </a:r>
@@ -9581,493 +9707,626 @@
             </a:endParaRPr>
           </a:p>
           <a:p>
-            <a:pPr marL="457200" lvl="0" indent="-311150" algn="l" rtl="0">
-              <a:spcBef>
-                <a:spcPts val="0"/>
-              </a:spcBef>
-              <a:spcAft>
-                <a:spcPts val="0"/>
-              </a:spcAft>
-              <a:buSzPts val="1300"/>
-              <a:buFont typeface="Google Sans Flex"/>
-              <a:buChar char="●"/>
-            </a:pPr>
-            <a:endParaRPr lang="en-GB" sz="1300" dirty="0">
-              <a:latin typeface="Google Sans Flex"/>
-              <a:ea typeface="Google Sans Flex"/>
-              <a:cs typeface="Google Sans Flex"/>
-              <a:sym typeface="Google Sans Flex"/>
-            </a:endParaRPr>
-          </a:p>
-          <a:p>
-            <a:pPr marL="457200" lvl="0" indent="-311150" algn="l" rtl="0">
-              <a:spcBef>
-                <a:spcPts val="0"/>
-              </a:spcBef>
-              <a:spcAft>
-                <a:spcPts val="0"/>
-              </a:spcAft>
-              <a:buSzPts val="1300"/>
-              <a:buFont typeface="Google Sans Flex"/>
-              <a:buChar char="●"/>
-            </a:pPr>
-            <a:endParaRPr lang="en-GB" sz="1300" dirty="0">
-              <a:latin typeface="Google Sans Flex"/>
-              <a:ea typeface="Google Sans Flex"/>
-              <a:cs typeface="Google Sans Flex"/>
-              <a:sym typeface="Google Sans Flex"/>
-            </a:endParaRPr>
-          </a:p>
-          <a:p>
-            <a:pPr marL="457200" lvl="0" indent="-311150">
-              <a:buSzPts val="1300"/>
-              <a:buFont typeface="Google Sans Flex"/>
-              <a:buChar char="●"/>
+            <a:pPr>
+              <a:spcBef>
+                <a:spcPts val="500"/>
+              </a:spcBef>
+              <a:spcAft>
+                <a:spcPts val="100"/>
+              </a:spcAft>
             </a:pPr>
             <a:r>
-              <a:rPr lang="en-GB" sz="1000" dirty="0">
-                <a:latin typeface="+mj-lt"/>
-                <a:ea typeface="Google Sans Flex"/>
-                <a:cs typeface="Google Sans Flex"/>
-                <a:sym typeface="Google Sans Flex"/>
+              <a:rPr sz="1050" b="1" i="0">
+                <a:solidFill>
+                  <a:srgbClr val="1A1A1A"/>
+                </a:solidFill>
+                <a:latin typeface="Google Sans Flex Medium"/>
               </a:rPr>
-              <a:t>Current Market:• NASA/USGS dashboards → Fire/earthquake detection only (no response coordination)• Weather forecasting apps → Predict phase only (no action planning)• Emergency management platforms → Manual, slow decision-making• Routing apps (Google Maps) → General navigation (not disaster-specific optimization)TerraGrid:┌───────────────────┬─────────────────────────────────┬────────────────────────────────────────────────────┐│ Aspect            │ Others                          │ TerraGrid                                          │├───────────────────┼─────────────────────────────────┼────────────────────────────────────────────────────┤│ Scope             │ Single phase (usually RESPONSE) │ All 4 phases (PREDICT→PREPARE→RESPONSE→RECOVER)    │├───────────────────┼─────────────────────────────────┼────────────────────────────────────────────────────┤│ Intelligence      │ Shows data                      │ Recommends actions (AI-powered)                    │├───────────────────┼─────────────────────────────────┼────────────────────────────────────────────────────┤│ Decision Tracking │ Black box                       │ Full lineage + outcome validation                  │├───────────────────┼─────────────────────────────────┼────────────────────────────────────────────────────┤│ Real-time         │ Pre-computed scenarios          │ Live dynamic optimization                          │├───────────────────┼─────────────────────────────────┼────────────────────────────────────────────────────┤│ Integration       │ Point solutions                 │ 7+ APIs unified in one platform                    │├───────────────────┼─────────────────────────────────┼────────────────────────────────────────────────────┤│ Field-Ready       │ Technical dashboards            │ Role-adaptive UI (meteorologist/planner/responder) │└───────────────────┴─────────────────────────────────┴────────────────────────────────────────────────────┘Why TerraGrid Stands </a:t>
+              <a:t>Current Market</a:t>
             </a:r>
+          </a:p>
+          <a:p>
+            <a:pPr>
+              <a:spcBef>
+                <a:spcPts val="0"/>
+              </a:spcBef>
+              <a:spcAft>
+                <a:spcPts val="0"/>
+              </a:spcAft>
+            </a:pPr>
             <a:r>
-              <a:rPr lang="en-GB" sz="1000" dirty="0" err="1">
-                <a:latin typeface="+mj-lt"/>
-                <a:ea typeface="Google Sans Flex"/>
-                <a:cs typeface="Google Sans Flex"/>
-                <a:sym typeface="Google Sans Flex"/>
+              <a:rPr sz="900" b="0" i="0">
+                <a:solidFill>
+                  <a:srgbClr val="1A1A1A"/>
+                </a:solidFill>
+                <a:latin typeface="Google Sans Flex"/>
               </a:rPr>
-              <a:t>Alone:No</a:t>
+              <a:t>•  NASA/USGS dashboards → fire/earthquake detection only, no response coordination</a:t>
             </a:r>
+          </a:p>
+          <a:p>
+            <a:pPr>
+              <a:spcBef>
+                <a:spcPts val="0"/>
+              </a:spcBef>
+              <a:spcAft>
+                <a:spcPts val="0"/>
+              </a:spcAft>
+            </a:pPr>
             <a:r>
-              <a:rPr lang="en-GB" sz="1000" dirty="0">
-                <a:latin typeface="+mj-lt"/>
-                <a:ea typeface="Google Sans Flex"/>
-                <a:cs typeface="Google Sans Flex"/>
-                <a:sym typeface="Google Sans Flex"/>
+              <a:rPr sz="900" b="0" i="0">
+                <a:solidFill>
+                  <a:srgbClr val="1A1A1A"/>
+                </a:solidFill>
+                <a:latin typeface="Google Sans Flex"/>
               </a:rPr>
-              <a:t> existing solution connects all four disaster phases + AI recommendations + decision lineage in one platform.</a:t>
+              <a:t>•  Weather forecasting apps → forecast only, no action planning</a:t>
             </a:r>
           </a:p>
           <a:p>
-            <a:pPr marL="457200" lvl="0" indent="-311150" algn="l" rtl="0">
-              <a:spcBef>
-                <a:spcPts val="0"/>
-              </a:spcBef>
-              <a:spcAft>
-                <a:spcPts val="0"/>
-              </a:spcAft>
-              <a:buSzPts val="1300"/>
-              <a:buFont typeface="Google Sans Flex"/>
-              <a:buChar char="●"/>
-            </a:pPr>
-            <a:endParaRPr lang="en-GB" sz="1300" dirty="0">
-              <a:latin typeface="Google Sans Flex"/>
-              <a:ea typeface="Google Sans Flex"/>
-              <a:cs typeface="Google Sans Flex"/>
-              <a:sym typeface="Google Sans Flex"/>
-            </a:endParaRPr>
-          </a:p>
-          <a:p>
-            <a:pPr marL="457200" lvl="0" indent="-311150" algn="l" rtl="0">
-              <a:spcBef>
-                <a:spcPts val="0"/>
-              </a:spcBef>
-              <a:spcAft>
-                <a:spcPts val="0"/>
-              </a:spcAft>
-              <a:buSzPts val="1300"/>
-              <a:buFont typeface="Google Sans Flex"/>
-              <a:buChar char="●"/>
-            </a:pPr>
-            <a:endParaRPr lang="en-GB" sz="1300" dirty="0">
-              <a:latin typeface="Google Sans Flex"/>
-              <a:ea typeface="Google Sans Flex"/>
-              <a:cs typeface="Google Sans Flex"/>
-              <a:sym typeface="Google Sans Flex"/>
-            </a:endParaRPr>
-          </a:p>
-          <a:p>
-            <a:pPr marL="457200" lvl="0" indent="-311150" algn="l" rtl="0">
-              <a:spcBef>
-                <a:spcPts val="0"/>
-              </a:spcBef>
-              <a:spcAft>
-                <a:spcPts val="0"/>
-              </a:spcAft>
-              <a:buSzPts val="1300"/>
-              <a:buFont typeface="Google Sans Flex"/>
-              <a:buChar char="●"/>
-            </a:pPr>
-            <a:endParaRPr lang="en-GB" sz="1300" dirty="0">
-              <a:latin typeface="Google Sans Flex"/>
-              <a:ea typeface="Google Sans Flex"/>
-              <a:cs typeface="Google Sans Flex"/>
-              <a:sym typeface="Google Sans Flex"/>
-            </a:endParaRPr>
-          </a:p>
-          <a:p>
-            <a:pPr marL="457200" lvl="0" indent="-311150" algn="l" rtl="0">
-              <a:spcBef>
-                <a:spcPts val="0"/>
-              </a:spcBef>
-              <a:spcAft>
-                <a:spcPts val="0"/>
-              </a:spcAft>
-              <a:buSzPts val="1300"/>
-              <a:buFont typeface="Google Sans Flex"/>
-              <a:buChar char="●"/>
-            </a:pPr>
-            <a:endParaRPr lang="en-GB" sz="1300" dirty="0">
-              <a:latin typeface="Google Sans Flex"/>
-              <a:ea typeface="Google Sans Flex"/>
-              <a:cs typeface="Google Sans Flex"/>
-              <a:sym typeface="Google Sans Flex"/>
-            </a:endParaRPr>
-          </a:p>
-          <a:p>
-            <a:pPr marL="457200" lvl="0" indent="-311150" algn="l" rtl="0">
-              <a:spcBef>
-                <a:spcPts val="0"/>
-              </a:spcBef>
-              <a:spcAft>
-                <a:spcPts val="0"/>
-              </a:spcAft>
-              <a:buSzPts val="1300"/>
-              <a:buFont typeface="Google Sans Flex"/>
-              <a:buChar char="●"/>
-            </a:pPr>
-            <a:endParaRPr lang="en-GB" sz="1300" dirty="0">
-              <a:latin typeface="Google Sans Flex"/>
-              <a:ea typeface="Google Sans Flex"/>
-              <a:cs typeface="Google Sans Flex"/>
-              <a:sym typeface="Google Sans Flex"/>
-            </a:endParaRPr>
-          </a:p>
-          <a:p>
-            <a:pPr marL="457200" lvl="0" indent="-311150" algn="l" rtl="0">
-              <a:spcBef>
-                <a:spcPts val="0"/>
-              </a:spcBef>
-              <a:spcAft>
-                <a:spcPts val="0"/>
-              </a:spcAft>
-              <a:buSzPts val="1300"/>
-              <a:buFont typeface="Google Sans Flex"/>
-              <a:buChar char="●"/>
-            </a:pPr>
-            <a:endParaRPr lang="en-GB" sz="1300" dirty="0">
-              <a:latin typeface="Google Sans Flex"/>
-              <a:ea typeface="Google Sans Flex"/>
-              <a:cs typeface="Google Sans Flex"/>
-              <a:sym typeface="Google Sans Flex"/>
-            </a:endParaRPr>
-          </a:p>
-          <a:p>
-            <a:pPr marL="457200" lvl="0" indent="-311150" algn="l" rtl="0">
-              <a:spcBef>
-                <a:spcPts val="0"/>
-              </a:spcBef>
-              <a:spcAft>
-                <a:spcPts val="0"/>
-              </a:spcAft>
-              <a:buSzPts val="1300"/>
-              <a:buFont typeface="Google Sans Flex"/>
-              <a:buChar char="●"/>
-            </a:pPr>
-            <a:endParaRPr lang="en-GB" sz="1300" dirty="0">
-              <a:latin typeface="Google Sans Flex"/>
-              <a:ea typeface="Google Sans Flex"/>
-              <a:cs typeface="Google Sans Flex"/>
-              <a:sym typeface="Google Sans Flex"/>
-            </a:endParaRPr>
-          </a:p>
-          <a:p>
-            <a:pPr marL="457200" lvl="0" indent="-311150" algn="l" rtl="0">
-              <a:spcBef>
-                <a:spcPts val="0"/>
-              </a:spcBef>
-              <a:spcAft>
-                <a:spcPts val="0"/>
-              </a:spcAft>
-              <a:buSzPts val="1300"/>
-              <a:buFont typeface="Google Sans Flex"/>
-              <a:buChar char="●"/>
-            </a:pPr>
-            <a:endParaRPr lang="en-GB" sz="1300" dirty="0">
-              <a:latin typeface="Google Sans Flex"/>
-              <a:ea typeface="Google Sans Flex"/>
-              <a:cs typeface="Google Sans Flex"/>
-              <a:sym typeface="Google Sans Flex"/>
-            </a:endParaRPr>
-          </a:p>
-          <a:p>
-            <a:pPr marL="457200" lvl="0" indent="-311150" algn="l" rtl="0">
-              <a:spcBef>
-                <a:spcPts val="0"/>
-              </a:spcBef>
-              <a:spcAft>
-                <a:spcPts val="0"/>
-              </a:spcAft>
-              <a:buSzPts val="1300"/>
-              <a:buFont typeface="Google Sans Flex"/>
-              <a:buChar char="●"/>
-            </a:pPr>
-            <a:endParaRPr lang="en-GB" sz="1300" dirty="0">
-              <a:latin typeface="Google Sans Flex"/>
-              <a:ea typeface="Google Sans Flex"/>
-              <a:cs typeface="Google Sans Flex"/>
-              <a:sym typeface="Google Sans Flex"/>
-            </a:endParaRPr>
-          </a:p>
-          <a:p>
-            <a:pPr marL="457200" lvl="0" indent="-311150" algn="l" rtl="0">
-              <a:spcBef>
-                <a:spcPts val="0"/>
-              </a:spcBef>
-              <a:spcAft>
-                <a:spcPts val="0"/>
-              </a:spcAft>
-              <a:buSzPts val="1300"/>
-              <a:buFont typeface="Google Sans Flex"/>
-              <a:buChar char="●"/>
-            </a:pPr>
-            <a:endParaRPr lang="en-GB" sz="1300" dirty="0">
-              <a:latin typeface="Google Sans Flex"/>
-              <a:ea typeface="Google Sans Flex"/>
-              <a:cs typeface="Google Sans Flex"/>
-              <a:sym typeface="Google Sans Flex"/>
-            </a:endParaRPr>
-          </a:p>
-          <a:p>
-            <a:pPr marL="457200" lvl="0" indent="-311150" algn="l" rtl="0">
-              <a:spcBef>
-                <a:spcPts val="0"/>
-              </a:spcBef>
-              <a:spcAft>
-                <a:spcPts val="0"/>
-              </a:spcAft>
-              <a:buSzPts val="1300"/>
-              <a:buFont typeface="Google Sans Flex"/>
-              <a:buChar char="●"/>
-            </a:pPr>
-            <a:endParaRPr lang="en-GB" sz="1300" dirty="0">
-              <a:latin typeface="Google Sans Flex"/>
-              <a:ea typeface="Google Sans Flex"/>
-              <a:cs typeface="Google Sans Flex"/>
-              <a:sym typeface="Google Sans Flex"/>
-            </a:endParaRPr>
-          </a:p>
-          <a:p>
-            <a:pPr marL="457200" lvl="0" indent="-311150" algn="l" rtl="0">
-              <a:spcBef>
-                <a:spcPts val="0"/>
-              </a:spcBef>
-              <a:spcAft>
-                <a:spcPts val="0"/>
-              </a:spcAft>
-              <a:buSzPts val="1300"/>
-              <a:buFont typeface="Google Sans Flex"/>
-              <a:buChar char="●"/>
-            </a:pPr>
-            <a:endParaRPr lang="en-GB" sz="1300" dirty="0">
-              <a:latin typeface="Google Sans Flex"/>
-              <a:ea typeface="Google Sans Flex"/>
-              <a:cs typeface="Google Sans Flex"/>
-              <a:sym typeface="Google Sans Flex"/>
-            </a:endParaRPr>
-          </a:p>
-          <a:p>
-            <a:pPr marL="457200" lvl="0" indent="-311150" algn="l" rtl="0">
-              <a:spcBef>
-                <a:spcPts val="0"/>
-              </a:spcBef>
-              <a:spcAft>
-                <a:spcPts val="0"/>
-              </a:spcAft>
-              <a:buSzPts val="1300"/>
-              <a:buFont typeface="Google Sans Flex"/>
-              <a:buChar char="●"/>
-            </a:pPr>
-            <a:endParaRPr lang="en-GB" sz="1300" dirty="0">
-              <a:latin typeface="Google Sans Flex"/>
-              <a:ea typeface="Google Sans Flex"/>
-              <a:cs typeface="Google Sans Flex"/>
-              <a:sym typeface="Google Sans Flex"/>
-            </a:endParaRPr>
-          </a:p>
-          <a:p>
-            <a:pPr marL="457200" lvl="0" indent="-311150" algn="l" rtl="0">
-              <a:spcBef>
-                <a:spcPts val="0"/>
-              </a:spcBef>
-              <a:spcAft>
-                <a:spcPts val="0"/>
-              </a:spcAft>
-              <a:buSzPts val="1300"/>
-              <a:buFont typeface="Google Sans Flex"/>
-              <a:buChar char="●"/>
-            </a:pPr>
-            <a:endParaRPr lang="en-GB" sz="1300" dirty="0">
-              <a:latin typeface="Google Sans Flex"/>
-              <a:ea typeface="Google Sans Flex"/>
-              <a:cs typeface="Google Sans Flex"/>
-              <a:sym typeface="Google Sans Flex"/>
-            </a:endParaRPr>
-          </a:p>
-          <a:p>
-            <a:pPr marL="457200" lvl="0" indent="-311150" algn="l" rtl="0">
-              <a:spcBef>
-                <a:spcPts val="0"/>
-              </a:spcBef>
-              <a:spcAft>
-                <a:spcPts val="0"/>
-              </a:spcAft>
-              <a:buSzPts val="1300"/>
-              <a:buFont typeface="Google Sans Flex"/>
-              <a:buChar char="●"/>
-            </a:pPr>
-            <a:endParaRPr lang="en-GB" sz="1300" dirty="0">
-              <a:latin typeface="Google Sans Flex"/>
-              <a:ea typeface="Google Sans Flex"/>
-              <a:cs typeface="Google Sans Flex"/>
-              <a:sym typeface="Google Sans Flex"/>
-            </a:endParaRPr>
-          </a:p>
-          <a:p>
-            <a:pPr marL="457200" lvl="0" indent="-311150" algn="l" rtl="0">
-              <a:spcBef>
-                <a:spcPts val="0"/>
-              </a:spcBef>
-              <a:spcAft>
-                <a:spcPts val="0"/>
-              </a:spcAft>
-              <a:buSzPts val="1300"/>
-              <a:buFont typeface="Google Sans Flex"/>
-              <a:buChar char="●"/>
-            </a:pPr>
-            <a:endParaRPr lang="en-GB" sz="1300" dirty="0">
-              <a:latin typeface="Google Sans Flex"/>
-              <a:ea typeface="Google Sans Flex"/>
-              <a:cs typeface="Google Sans Flex"/>
-              <a:sym typeface="Google Sans Flex"/>
-            </a:endParaRPr>
-          </a:p>
-          <a:p>
-            <a:pPr marL="457200" lvl="0" indent="-311150" algn="l" rtl="0">
-              <a:spcBef>
-                <a:spcPts val="0"/>
-              </a:spcBef>
-              <a:spcAft>
-                <a:spcPts val="0"/>
-              </a:spcAft>
-              <a:buSzPts val="1300"/>
-              <a:buFont typeface="Google Sans Flex"/>
-              <a:buChar char="●"/>
-            </a:pPr>
-            <a:endParaRPr lang="en-GB" sz="1300" dirty="0">
-              <a:latin typeface="Google Sans Flex"/>
-              <a:ea typeface="Google Sans Flex"/>
-              <a:cs typeface="Google Sans Flex"/>
-              <a:sym typeface="Google Sans Flex"/>
-            </a:endParaRPr>
-          </a:p>
-          <a:p>
-            <a:pPr marL="457200" lvl="0" indent="-311150" algn="l" rtl="0">
-              <a:spcBef>
-                <a:spcPts val="0"/>
-              </a:spcBef>
-              <a:spcAft>
-                <a:spcPts val="0"/>
-              </a:spcAft>
-              <a:buSzPts val="1300"/>
-              <a:buFont typeface="Google Sans Flex"/>
-              <a:buChar char="●"/>
-            </a:pPr>
-            <a:endParaRPr lang="en-GB" sz="1300" dirty="0">
-              <a:latin typeface="Google Sans Flex"/>
-              <a:ea typeface="Google Sans Flex"/>
-              <a:cs typeface="Google Sans Flex"/>
-              <a:sym typeface="Google Sans Flex"/>
-            </a:endParaRPr>
-          </a:p>
-          <a:p>
-            <a:pPr marL="457200" lvl="0" indent="-311150" algn="l" rtl="0">
-              <a:spcBef>
-                <a:spcPts val="0"/>
-              </a:spcBef>
-              <a:spcAft>
-                <a:spcPts val="0"/>
-              </a:spcAft>
-              <a:buSzPts val="1300"/>
-              <a:buFont typeface="Google Sans Flex"/>
-              <a:buChar char="●"/>
-            </a:pPr>
-            <a:endParaRPr lang="en-GB" sz="1300" dirty="0">
-              <a:latin typeface="Google Sans Flex"/>
-              <a:ea typeface="Google Sans Flex"/>
-              <a:cs typeface="Google Sans Flex"/>
-              <a:sym typeface="Google Sans Flex"/>
-            </a:endParaRPr>
-          </a:p>
-          <a:p>
-            <a:pPr marL="457200" lvl="0" indent="-311150" algn="l" rtl="0">
-              <a:spcBef>
-                <a:spcPts val="0"/>
-              </a:spcBef>
-              <a:spcAft>
-                <a:spcPts val="0"/>
-              </a:spcAft>
-              <a:buSzPts val="1300"/>
-              <a:buFont typeface="Google Sans Flex"/>
-              <a:buChar char="●"/>
-            </a:pPr>
-            <a:endParaRPr lang="en-GB" sz="1300" dirty="0">
-              <a:latin typeface="Google Sans Flex"/>
-              <a:ea typeface="Google Sans Flex"/>
-              <a:cs typeface="Google Sans Flex"/>
-              <a:sym typeface="Google Sans Flex"/>
-            </a:endParaRPr>
-          </a:p>
-          <a:p>
-            <a:pPr marL="0" lvl="0" indent="0" algn="l" rtl="0">
-              <a:spcBef>
-                <a:spcPts val="0"/>
-              </a:spcBef>
-              <a:spcAft>
-                <a:spcPts val="0"/>
-              </a:spcAft>
-              <a:buNone/>
-            </a:pPr>
-            <a:endParaRPr sz="1600" dirty="0">
-              <a:latin typeface="Google Sans Flex Medium"/>
-              <a:ea typeface="Google Sans Flex Medium"/>
-              <a:cs typeface="Google Sans Flex Medium"/>
-              <a:sym typeface="Google Sans Flex Medium"/>
-            </a:endParaRPr>
-          </a:p>
-          <a:p>
-            <a:pPr marL="0" lvl="0" indent="0" algn="l" rtl="0">
-              <a:spcBef>
-                <a:spcPts val="0"/>
-              </a:spcBef>
-              <a:spcAft>
-                <a:spcPts val="0"/>
-              </a:spcAft>
-              <a:buNone/>
-            </a:pPr>
-            <a:endParaRPr sz="1600" dirty="0">
-              <a:latin typeface="Google Sans Flex Medium"/>
-              <a:ea typeface="Google Sans Flex Medium"/>
-              <a:cs typeface="Google Sans Flex Medium"/>
-              <a:sym typeface="Google Sans Flex Medium"/>
-            </a:endParaRPr>
+            <a:pPr>
+              <a:spcBef>
+                <a:spcPts val="0"/>
+              </a:spcBef>
+              <a:spcAft>
+                <a:spcPts val="0"/>
+              </a:spcAft>
+            </a:pPr>
+            <a:r>
+              <a:rPr sz="900" b="0" i="0">
+                <a:solidFill>
+                  <a:srgbClr val="1A1A1A"/>
+                </a:solidFill>
+                <a:latin typeface="Google Sans Flex"/>
+              </a:rPr>
+              <a:t>•  Emergency management platforms → manual, spreadsheet-driven decisions</a:t>
+            </a:r>
+          </a:p>
+          <a:p>
+            <a:pPr>
+              <a:spcBef>
+                <a:spcPts val="0"/>
+              </a:spcBef>
+              <a:spcAft>
+                <a:spcPts val="0"/>
+              </a:spcAft>
+            </a:pPr>
+            <a:r>
+              <a:rPr sz="900" b="0" i="0">
+                <a:solidFill>
+                  <a:srgbClr val="1A1A1A"/>
+                </a:solidFill>
+                <a:latin typeface="Google Sans Flex"/>
+              </a:rPr>
+              <a:t>•  Routing apps (Google Maps) → general navigation, not disaster-aware</a:t>
+            </a:r>
           </a:p>
         </p:txBody>
       </p:sp>
+      <p:graphicFrame>
+        <p:nvGraphicFramePr>
+          <p:cNvPr id="80" name="Table 79"/>
+          <p:cNvGraphicFramePr>
+            <a:graphicFrameLocks noGrp="1"/>
+          </p:cNvGraphicFramePr>
+          <p:nvPr/>
+        </p:nvGraphicFramePr>
+        <p:xfrm>
+          <a:off x="317602" y="2750000"/>
+          <a:ext cx="8508796" cy="2150000"/>
+        </p:xfrm>
+        <a:graphic>
+          <a:graphicData uri="http://schemas.openxmlformats.org/drawingml/2006/table">
+            <a:tbl>
+              <a:tblPr firstRow="1" bandRow="1">
+                <a:tableStyleId>{5C22544A-7EE6-4342-B048-85BDC9FD1C3A}</a:tableStyleId>
+              </a:tblPr>
+              <a:tblGrid>
+                <a:gridCol w="1500000"/>
+                <a:gridCol w="3300000"/>
+                <a:gridCol w="3708796"/>
+              </a:tblGrid>
+              <a:tr h="260000">
+                <a:tc>
+                  <a:txBody>
+                    <a:bodyPr wrap="square"/>
+                    <a:lstStyle/>
+                    <a:p>
+                      <a:pPr algn="l"/>
+                      <a:r>
+                        <a:rPr sz="900" b="1">
+                          <a:solidFill>
+                            <a:srgbClr val="FFFFFF"/>
+                          </a:solidFill>
+                          <a:latin typeface="Google Sans Flex Medium"/>
+                        </a:rPr>
+                        <a:t>Aspect</a:t>
+                      </a:r>
+                    </a:p>
+                  </a:txBody>
+                  <a:tcPr marL="45700" marR="45700" marT="18000" marB="18000" anchor="ctr">
+                    <a:solidFill>
+                      <a:srgbClr val="1A1A1A"/>
+                    </a:solidFill>
+                  </a:tcPr>
+                </a:tc>
+                <a:tc>
+                  <a:txBody>
+                    <a:bodyPr wrap="square"/>
+                    <a:lstStyle/>
+                    <a:p>
+                      <a:pPr algn="l"/>
+                      <a:r>
+                        <a:rPr sz="900" b="1">
+                          <a:solidFill>
+                            <a:srgbClr val="FFFFFF"/>
+                          </a:solidFill>
+                          <a:latin typeface="Google Sans Flex Medium"/>
+                        </a:rPr>
+                        <a:t>Others</a:t>
+                      </a:r>
+                    </a:p>
+                  </a:txBody>
+                  <a:tcPr marL="45700" marR="45700" marT="18000" marB="18000" anchor="ctr">
+                    <a:solidFill>
+                      <a:srgbClr val="1A1A1A"/>
+                    </a:solidFill>
+                  </a:tcPr>
+                </a:tc>
+                <a:tc>
+                  <a:txBody>
+                    <a:bodyPr wrap="square"/>
+                    <a:lstStyle/>
+                    <a:p>
+                      <a:pPr algn="l"/>
+                      <a:r>
+                        <a:rPr sz="900" b="1">
+                          <a:solidFill>
+                            <a:srgbClr val="FFFFFF"/>
+                          </a:solidFill>
+                          <a:latin typeface="Google Sans Flex Medium"/>
+                        </a:rPr>
+                        <a:t>TerraGrid</a:t>
+                      </a:r>
+                    </a:p>
+                  </a:txBody>
+                  <a:tcPr marL="45700" marR="45700" marT="18000" marB="18000" anchor="ctr">
+                    <a:solidFill>
+                      <a:srgbClr val="1A1A1A"/>
+                    </a:solidFill>
+                  </a:tcPr>
+                </a:tc>
+              </a:tr>
+              <a:tr h="315000">
+                <a:tc>
+                  <a:txBody>
+                    <a:bodyPr wrap="square"/>
+                    <a:lstStyle/>
+                    <a:p>
+                      <a:pPr algn="l"/>
+                      <a:r>
+                        <a:rPr sz="800" b="1">
+                          <a:solidFill>
+                            <a:srgbClr val="1A1A1A"/>
+                          </a:solidFill>
+                          <a:latin typeface="Google Sans Flex"/>
+                        </a:rPr>
+                        <a:t>Scope</a:t>
+                      </a:r>
+                    </a:p>
+                  </a:txBody>
+                  <a:tcPr marL="45700" marR="45700" marT="18000" marB="18000" anchor="ctr">
+                    <a:solidFill>
+                      <a:srgbClr val="FFFFFF"/>
+                    </a:solidFill>
+                  </a:tcPr>
+                </a:tc>
+                <a:tc>
+                  <a:txBody>
+                    <a:bodyPr wrap="square"/>
+                    <a:lstStyle/>
+                    <a:p>
+                      <a:pPr algn="l"/>
+                      <a:r>
+                        <a:rPr sz="800" b="0">
+                          <a:solidFill>
+                            <a:srgbClr val="C03030"/>
+                          </a:solidFill>
+                          <a:latin typeface="Google Sans Flex"/>
+                        </a:rPr>
+                        <a:t>Single phase (usually RESPONSE only)</a:t>
+                      </a:r>
+                    </a:p>
+                  </a:txBody>
+                  <a:tcPr marL="45700" marR="45700" marT="18000" marB="18000" anchor="ctr">
+                    <a:solidFill>
+                      <a:srgbClr val="FFFFFF"/>
+                    </a:solidFill>
+                  </a:tcPr>
+                </a:tc>
+                <a:tc>
+                  <a:txBody>
+                    <a:bodyPr wrap="square"/>
+                    <a:lstStyle/>
+                    <a:p>
+                      <a:pPr algn="l"/>
+                      <a:r>
+                        <a:rPr sz="800" b="0">
+                          <a:solidFill>
+                            <a:srgbClr val="1E8E3E"/>
+                          </a:solidFill>
+                          <a:latin typeface="Google Sans Flex"/>
+                        </a:rPr>
+                        <a:t>PREPARE + RESPONSE live today; PREDICT + RECOVER roadmapped</a:t>
+                      </a:r>
+                    </a:p>
+                  </a:txBody>
+                  <a:tcPr marL="45700" marR="45700" marT="18000" marB="18000" anchor="ctr">
+                    <a:solidFill>
+                      <a:srgbClr val="FFFFFF"/>
+                    </a:solidFill>
+                  </a:tcPr>
+                </a:tc>
+              </a:tr>
+              <a:tr h="315000">
+                <a:tc>
+                  <a:txBody>
+                    <a:bodyPr wrap="square"/>
+                    <a:lstStyle/>
+                    <a:p>
+                      <a:pPr algn="l"/>
+                      <a:r>
+                        <a:rPr sz="800" b="1">
+                          <a:solidFill>
+                            <a:srgbClr val="1A1A1A"/>
+                          </a:solidFill>
+                          <a:latin typeface="Google Sans Flex"/>
+                        </a:rPr>
+                        <a:t>Intelligence</a:t>
+                      </a:r>
+                    </a:p>
+                  </a:txBody>
+                  <a:tcPr marL="45700" marR="45700" marT="18000" marB="18000" anchor="ctr">
+                    <a:solidFill>
+                      <a:srgbClr val="F2F2F2"/>
+                    </a:solidFill>
+                  </a:tcPr>
+                </a:tc>
+                <a:tc>
+                  <a:txBody>
+                    <a:bodyPr wrap="square"/>
+                    <a:lstStyle/>
+                    <a:p>
+                      <a:pPr algn="l"/>
+                      <a:r>
+                        <a:rPr sz="800" b="0">
+                          <a:solidFill>
+                            <a:srgbClr val="C03030"/>
+                          </a:solidFill>
+                          <a:latin typeface="Google Sans Flex"/>
+                        </a:rPr>
+                        <a:t>Shows raw data</a:t>
+                      </a:r>
+                    </a:p>
+                  </a:txBody>
+                  <a:tcPr marL="45700" marR="45700" marT="18000" marB="18000" anchor="ctr">
+                    <a:solidFill>
+                      <a:srgbClr val="F2F2F2"/>
+                    </a:solidFill>
+                  </a:tcPr>
+                </a:tc>
+                <a:tc>
+                  <a:txBody>
+                    <a:bodyPr wrap="square"/>
+                    <a:lstStyle/>
+                    <a:p>
+                      <a:pPr algn="l"/>
+                      <a:r>
+                        <a:rPr sz="800" b="0">
+                          <a:solidFill>
+                            <a:srgbClr val="1E8E3E"/>
+                          </a:solidFill>
+                          <a:latin typeface="Google Sans Flex"/>
+                        </a:rPr>
+                        <a:t>AI-generated recommendations with confidence scoring (Gemini 2.5 Flash)</a:t>
+                      </a:r>
+                    </a:p>
+                  </a:txBody>
+                  <a:tcPr marL="45700" marR="45700" marT="18000" marB="18000" anchor="ctr">
+                    <a:solidFill>
+                      <a:srgbClr val="F2F2F2"/>
+                    </a:solidFill>
+                  </a:tcPr>
+                </a:tc>
+              </a:tr>
+              <a:tr h="315000">
+                <a:tc>
+                  <a:txBody>
+                    <a:bodyPr wrap="square"/>
+                    <a:lstStyle/>
+                    <a:p>
+                      <a:pPr algn="l"/>
+                      <a:r>
+                        <a:rPr sz="800" b="1">
+                          <a:solidFill>
+                            <a:srgbClr val="1A1A1A"/>
+                          </a:solidFill>
+                          <a:latin typeface="Google Sans Flex"/>
+                        </a:rPr>
+                        <a:t>Auditability</a:t>
+                      </a:r>
+                    </a:p>
+                  </a:txBody>
+                  <a:tcPr marL="45700" marR="45700" marT="18000" marB="18000" anchor="ctr">
+                    <a:solidFill>
+                      <a:srgbClr val="FFFFFF"/>
+                    </a:solidFill>
+                  </a:tcPr>
+                </a:tc>
+                <a:tc>
+                  <a:txBody>
+                    <a:bodyPr wrap="square"/>
+                    <a:lstStyle/>
+                    <a:p>
+                      <a:pPr algn="l"/>
+                      <a:r>
+                        <a:rPr sz="800" b="0">
+                          <a:solidFill>
+                            <a:srgbClr val="C03030"/>
+                          </a:solidFill>
+                          <a:latin typeface="Google Sans Flex"/>
+                        </a:rPr>
+                        <a:t>Black box</a:t>
+                      </a:r>
+                    </a:p>
+                  </a:txBody>
+                  <a:tcPr marL="45700" marR="45700" marT="18000" marB="18000" anchor="ctr">
+                    <a:solidFill>
+                      <a:srgbClr val="FFFFFF"/>
+                    </a:solidFill>
+                  </a:tcPr>
+                </a:tc>
+                <a:tc>
+                  <a:txBody>
+                    <a:bodyPr wrap="square"/>
+                    <a:lstStyle/>
+                    <a:p>
+                      <a:pPr algn="l"/>
+                      <a:r>
+                        <a:rPr sz="800" b="0">
+                          <a:solidFill>
+                            <a:srgbClr val="1E8E3E"/>
+                          </a:solidFill>
+                          <a:latin typeface="Google Sans Flex"/>
+                        </a:rPr>
+                        <a:t>Every API fetch + AI response logged to disk for cross-check</a:t>
+                      </a:r>
+                    </a:p>
+                  </a:txBody>
+                  <a:tcPr marL="45700" marR="45700" marT="18000" marB="18000" anchor="ctr">
+                    <a:solidFill>
+                      <a:srgbClr val="FFFFFF"/>
+                    </a:solidFill>
+                  </a:tcPr>
+                </a:tc>
+              </a:tr>
+              <a:tr h="315000">
+                <a:tc>
+                  <a:txBody>
+                    <a:bodyPr wrap="square"/>
+                    <a:lstStyle/>
+                    <a:p>
+                      <a:pPr algn="l"/>
+                      <a:r>
+                        <a:rPr sz="800" b="1">
+                          <a:solidFill>
+                            <a:srgbClr val="1A1A1A"/>
+                          </a:solidFill>
+                          <a:latin typeface="Google Sans Flex"/>
+                        </a:rPr>
+                        <a:t>Alerting</a:t>
+                      </a:r>
+                    </a:p>
+                  </a:txBody>
+                  <a:tcPr marL="45700" marR="45700" marT="18000" marB="18000" anchor="ctr">
+                    <a:solidFill>
+                      <a:srgbClr val="F2F2F2"/>
+                    </a:solidFill>
+                  </a:tcPr>
+                </a:tc>
+                <a:tc>
+                  <a:txBody>
+                    <a:bodyPr wrap="square"/>
+                    <a:lstStyle/>
+                    <a:p>
+                      <a:pPr algn="l"/>
+                      <a:r>
+                        <a:rPr sz="800" b="0">
+                          <a:solidFill>
+                            <a:srgbClr val="C03030"/>
+                          </a:solidFill>
+                          <a:latin typeface="Google Sans Flex"/>
+                        </a:rPr>
+                        <a:t>Manual, single-channel</a:t>
+                      </a:r>
+                    </a:p>
+                  </a:txBody>
+                  <a:tcPr marL="45700" marR="45700" marT="18000" marB="18000" anchor="ctr">
+                    <a:solidFill>
+                      <a:srgbClr val="F2F2F2"/>
+                    </a:solidFill>
+                  </a:tcPr>
+                </a:tc>
+                <a:tc>
+                  <a:txBody>
+                    <a:bodyPr wrap="square"/>
+                    <a:lstStyle/>
+                    <a:p>
+                      <a:pPr algn="l"/>
+                      <a:r>
+                        <a:rPr sz="800" b="0">
+                          <a:solidFill>
+                            <a:srgbClr val="1E8E3E"/>
+                          </a:solidFill>
+                          <a:latin typeface="Google Sans Flex"/>
+                        </a:rPr>
+                        <a:t>Automated, multi-channel (WhatsApp + email), per-audience tone</a:t>
+                      </a:r>
+                    </a:p>
+                  </a:txBody>
+                  <a:tcPr marL="45700" marR="45700" marT="18000" marB="18000" anchor="ctr">
+                    <a:solidFill>
+                      <a:srgbClr val="F2F2F2"/>
+                    </a:solidFill>
+                  </a:tcPr>
+                </a:tc>
+              </a:tr>
+              <a:tr h="315000">
+                <a:tc>
+                  <a:txBody>
+                    <a:bodyPr wrap="square"/>
+                    <a:lstStyle/>
+                    <a:p>
+                      <a:pPr algn="l"/>
+                      <a:r>
+                        <a:rPr sz="800" b="1">
+                          <a:solidFill>
+                            <a:srgbClr val="1A1A1A"/>
+                          </a:solidFill>
+                          <a:latin typeface="Google Sans Flex"/>
+                        </a:rPr>
+                        <a:t>Integration</a:t>
+                      </a:r>
+                    </a:p>
+                  </a:txBody>
+                  <a:tcPr marL="45700" marR="45700" marT="18000" marB="18000" anchor="ctr">
+                    <a:solidFill>
+                      <a:srgbClr val="FFFFFF"/>
+                    </a:solidFill>
+                  </a:tcPr>
+                </a:tc>
+                <a:tc>
+                  <a:txBody>
+                    <a:bodyPr wrap="square"/>
+                    <a:lstStyle/>
+                    <a:p>
+                      <a:pPr algn="l"/>
+                      <a:r>
+                        <a:rPr sz="800" b="0">
+                          <a:solidFill>
+                            <a:srgbClr val="C03030"/>
+                          </a:solidFill>
+                          <a:latin typeface="Google Sans Flex"/>
+                        </a:rPr>
+                        <a:t>One source, one tool</a:t>
+                      </a:r>
+                    </a:p>
+                  </a:txBody>
+                  <a:tcPr marL="45700" marR="45700" marT="18000" marB="18000" anchor="ctr">
+                    <a:solidFill>
+                      <a:srgbClr val="FFFFFF"/>
+                    </a:solidFill>
+                  </a:tcPr>
+                </a:tc>
+                <a:tc>
+                  <a:txBody>
+                    <a:bodyPr wrap="square"/>
+                    <a:lstStyle/>
+                    <a:p>
+                      <a:pPr algn="l"/>
+                      <a:r>
+                        <a:rPr sz="800" b="0">
+                          <a:solidFill>
+                            <a:srgbClr val="1E8E3E"/>
+                          </a:solidFill>
+                          <a:latin typeface="Google Sans Flex"/>
+                        </a:rPr>
+                        <a:t>7 live data sources unified in one dashboard</a:t>
+                      </a:r>
+                    </a:p>
+                  </a:txBody>
+                  <a:tcPr marL="45700" marR="45700" marT="18000" marB="18000" anchor="ctr">
+                    <a:solidFill>
+                      <a:srgbClr val="FFFFFF"/>
+                    </a:solidFill>
+                  </a:tcPr>
+                </a:tc>
+              </a:tr>
+              <a:tr h="315000">
+                <a:tc>
+                  <a:txBody>
+                    <a:bodyPr wrap="square"/>
+                    <a:lstStyle/>
+                    <a:p>
+                      <a:pPr algn="l"/>
+                      <a:r>
+                        <a:rPr sz="800" b="1">
+                          <a:solidFill>
+                            <a:srgbClr val="1A1A1A"/>
+                          </a:solidFill>
+                          <a:latin typeface="Google Sans Flex"/>
+                        </a:rPr>
+                        <a:t>Resilience</a:t>
+                      </a:r>
+                    </a:p>
+                  </a:txBody>
+                  <a:tcPr marL="45700" marR="45700" marT="18000" marB="18000" anchor="ctr">
+                    <a:solidFill>
+                      <a:srgbClr val="F2F2F2"/>
+                    </a:solidFill>
+                  </a:tcPr>
+                </a:tc>
+                <a:tc>
+                  <a:txBody>
+                    <a:bodyPr wrap="square"/>
+                    <a:lstStyle/>
+                    <a:p>
+                      <a:pPr algn="l"/>
+                      <a:r>
+                        <a:rPr sz="800" b="0">
+                          <a:solidFill>
+                            <a:srgbClr val="C03030"/>
+                          </a:solidFill>
+                          <a:latin typeface="Google Sans Flex"/>
+                        </a:rPr>
+                        <a:t>Fails silently on source outage</a:t>
+                      </a:r>
+                    </a:p>
+                  </a:txBody>
+                  <a:tcPr marL="45700" marR="45700" marT="18000" marB="18000" anchor="ctr">
+                    <a:solidFill>
+                      <a:srgbClr val="F2F2F2"/>
+                    </a:solidFill>
+                  </a:tcPr>
+                </a:tc>
+                <a:tc>
+                  <a:txBody>
+                    <a:bodyPr wrap="square"/>
+                    <a:lstStyle/>
+                    <a:p>
+                      <a:pPr algn="l"/>
+                      <a:r>
+                        <a:rPr sz="800" b="0">
+                          <a:solidFill>
+                            <a:srgbClr val="1E8E3E"/>
+                          </a:solidFill>
+                          <a:latin typeface="Google Sans Flex"/>
+                        </a:rPr>
+                        <a:t>Automatic retry + backoff + graceful fallback</a:t>
+                      </a:r>
+                    </a:p>
+                  </a:txBody>
+                  <a:tcPr marL="45700" marR="45700" marT="18000" marB="18000" anchor="ctr">
+                    <a:solidFill>
+                      <a:srgbClr val="F2F2F2"/>
+                    </a:solidFill>
+                  </a:tcPr>
+                </a:tc>
+              </a:tr>
+            </a:tbl>
+          </a:graphicData>
+        </a:graphic>
+      </p:graphicFrame>
     </p:spTree>
   </p:cSld>
   <p:clrMapOvr>
@@ -10227,7 +10486,7 @@
         <p:spPr>
           <a:xfrm>
             <a:off x="317602" y="578917"/>
-            <a:ext cx="8943000" cy="1366200"/>
+            <a:ext cx="8943000" cy="4300000"/>
           </a:xfrm>
           <a:prstGeom prst="rect">
             <a:avLst/>
@@ -10244,577 +10503,323 @@
           <a:lstStyle/>
           <a:p>
             <a:pPr marL="457200" lvl="0" indent="-311150">
+              <a:spcBef>
+                <a:spcPts val="0"/>
+              </a:spcBef>
+              <a:spcAft>
+                <a:spcPts val="400"/>
+              </a:spcAft>
               <a:buSzPts val="1300"/>
               <a:buFont typeface="Google Sans Flex"/>
-              <a:buChar char="●"/>
+              <a:buNone/>
             </a:pPr>
             <a:r>
-              <a:rPr lang="en-US" sz="1300" dirty="0">
-                <a:latin typeface="Google Sans Flex"/>
-                <a:ea typeface="Google Sans Flex"/>
-                <a:cs typeface="Google Sans Flex"/>
-                <a:sym typeface="Google Sans Flex"/>
+              <a:rPr sz="1300" b="0" i="0">
+                <a:solidFill>
+                  <a:srgbClr val="1A1A1A"/>
+                </a:solidFill>
+                <a:latin typeface="Google Sans Flex Medium"/>
               </a:rPr>
               <a:t>How will it be able to solve the problem?</a:t>
             </a:r>
           </a:p>
           <a:p>
-            <a:pPr marL="457200" lvl="0" indent="-311150" algn="l" rtl="0">
-              <a:spcBef>
-                <a:spcPts val="0"/>
-              </a:spcBef>
-              <a:spcAft>
-                <a:spcPts val="0"/>
-              </a:spcAft>
-              <a:buSzPts val="1300"/>
-              <a:buFont typeface="Google Sans Flex"/>
-              <a:buChar char="●"/>
-            </a:pPr>
-            <a:endParaRPr lang="en-GB" sz="1300" dirty="0">
-              <a:latin typeface="Google Sans Flex"/>
-              <a:ea typeface="Google Sans Flex"/>
-              <a:cs typeface="Google Sans Flex"/>
-              <a:sym typeface="Google Sans Flex"/>
-            </a:endParaRPr>
-          </a:p>
-          <a:p>
-            <a:pPr marL="457200" lvl="0" indent="-311150">
-              <a:buSzPts val="1300"/>
-              <a:buFont typeface="Google Sans Flex"/>
-              <a:buChar char="●"/>
+            <a:pPr>
+              <a:spcBef>
+                <a:spcPts val="200"/>
+              </a:spcBef>
+              <a:spcAft>
+                <a:spcPts val="200"/>
+              </a:spcAft>
             </a:pPr>
             <a:r>
-              <a:rPr lang="en-GB" sz="1300" dirty="0">
+              <a:rPr sz="950" b="1" i="0">
+                <a:solidFill>
+                  <a:srgbClr val="1A1A1A"/>
+                </a:solidFill>
                 <a:latin typeface="Google Sans Flex"/>
-                <a:ea typeface="Google Sans Flex"/>
-                <a:cs typeface="Google Sans Flex"/>
-                <a:sym typeface="Google Sans Flex"/>
               </a:rPr>
-              <a:t>The Problem: Decision-to-action takes hours. Preventable lives are </a:t>
+              <a:t>The Problem: Decision-to-action takes hours today. Preventable lives are lost.</a:t>
+            </a:r>
+          </a:p>
+          <a:p>
+            <a:pPr>
+              <a:spcBef>
+                <a:spcPts val="200"/>
+              </a:spcBef>
+              <a:spcAft>
+                <a:spcPts val="100"/>
+              </a:spcAft>
+            </a:pPr>
+            <a:r>
+              <a:rPr sz="950" b="1" i="0">
+                <a:solidFill>
+                  <a:srgbClr val="1E8E3E"/>
+                </a:solidFill>
+                <a:latin typeface="Google Sans Flex"/>
+              </a:rPr>
+              <a:t>TerraGrid's Solution Path (live today): </a:t>
             </a:r>
             <a:r>
-              <a:rPr lang="en-GB" sz="1300" dirty="0" err="1">
+              <a:rPr sz="950" b="0" i="0">
+                <a:solidFill>
+                  <a:srgbClr val="1A1A1A"/>
+                </a:solidFill>
                 <a:latin typeface="Google Sans Flex"/>
-                <a:ea typeface="Google Sans Flex"/>
-                <a:cs typeface="Google Sans Flex"/>
-                <a:sym typeface="Google Sans Flex"/>
               </a:rPr>
-              <a:t>lost.TerraGrid's</a:t>
+              <a:t>PREPARE (AI impact analysis + checklists) → RESPONSE (live dashboard + AI-recommended actions + multi-channel alerts)</a:t>
+            </a:r>
+          </a:p>
+          <a:p>
+            <a:pPr>
+              <a:spcBef>
+                <a:spcPts val="200"/>
+              </a:spcBef>
+              <a:spcAft>
+                <a:spcPts val="400"/>
+              </a:spcAft>
+            </a:pPr>
+            <a:r>
+              <a:rPr sz="850" b="0" i="1">
+                <a:solidFill>
+                  <a:srgbClr val="B86E00"/>
+                </a:solidFill>
+                <a:latin typeface="Google Sans Flex"/>
+              </a:rPr>
+              <a:t>PREDICT and RECOVER — early warning and post-event learning — are the next two phases on the roadmap, not yet built.</a:t>
+            </a:r>
+          </a:p>
+          <a:p>
+            <a:pPr>
+              <a:spcBef>
+                <a:spcPts val="200"/>
+              </a:spcBef>
+              <a:spcAft>
+                <a:spcPts val="200"/>
+              </a:spcAft>
+            </a:pPr>
+            <a:r>
+              <a:rPr sz="1000" b="1" i="0">
+                <a:solidFill>
+                  <a:srgbClr val="1A1A1A"/>
+                </a:solidFill>
+                <a:latin typeface="Google Sans Flex Medium"/>
+              </a:rPr>
+              <a:t>Key Mechanisms (what's actually running):</a:t>
+            </a:r>
+          </a:p>
+          <a:p>
+            <a:pPr>
+              <a:spcBef>
+                <a:spcPts val="100"/>
+              </a:spcBef>
+              <a:spcAft>
+                <a:spcPts val="100"/>
+              </a:spcAft>
+            </a:pPr>
+            <a:r>
+              <a:rPr sz="950" b="1" i="0">
+                <a:solidFill>
+                  <a:srgbClr val="1E8E3E"/>
+                </a:solidFill>
+                <a:latin typeface="Google Sans Flex"/>
+              </a:rPr>
+              <a:t>✓  </a:t>
             </a:r>
             <a:r>
-              <a:rPr lang="en-GB" sz="1300" dirty="0">
+              <a:rPr sz="950" b="1" i="0">
+                <a:solidFill>
+                  <a:srgbClr val="1A1A1A"/>
+                </a:solidFill>
                 <a:latin typeface="Google Sans Flex"/>
-                <a:ea typeface="Google Sans Flex"/>
-                <a:cs typeface="Google Sans Flex"/>
-                <a:sym typeface="Google Sans Flex"/>
               </a:rPr>
-              <a:t> Solution </a:t>
+              <a:t>Real-time Multi-Source Intelligence:</a:t>
             </a:r>
             <a:r>
-              <a:rPr lang="en-GB" sz="1300" dirty="0" err="1">
+              <a:rPr sz="950" b="0" i="0">
+                <a:solidFill>
+                  <a:srgbClr val="1A1A1A"/>
+                </a:solidFill>
                 <a:latin typeface="Google Sans Flex"/>
-                <a:ea typeface="Google Sans Flex"/>
-                <a:cs typeface="Google Sans Flex"/>
-                <a:sym typeface="Google Sans Flex"/>
               </a:rPr>
-              <a:t>Path:PREDICT</a:t>
+              <a:t> 7 APIs auto-ingested (NASA EONET, USGS, NOAA, GDACS, OpenWeatherMap, OSM, OSRM) — no manual data gathering</a:t>
+            </a:r>
+          </a:p>
+          <a:p>
+            <a:pPr>
+              <a:spcBef>
+                <a:spcPts val="100"/>
+              </a:spcBef>
+              <a:spcAft>
+                <a:spcPts val="100"/>
+              </a:spcAft>
+            </a:pPr>
+            <a:r>
+              <a:rPr sz="950" b="1" i="0">
+                <a:solidFill>
+                  <a:srgbClr val="1E8E3E"/>
+                </a:solidFill>
+                <a:latin typeface="Google Sans Flex"/>
+              </a:rPr>
+              <a:t>✓  </a:t>
             </a:r>
             <a:r>
-              <a:rPr lang="en-GB" sz="1300" dirty="0">
+              <a:rPr sz="950" b="1" i="0">
+                <a:solidFill>
+                  <a:srgbClr val="1A1A1A"/>
+                </a:solidFill>
                 <a:latin typeface="Google Sans Flex"/>
-                <a:ea typeface="Google Sans Flex"/>
-                <a:cs typeface="Google Sans Flex"/>
-                <a:sym typeface="Google Sans Flex"/>
               </a:rPr>
-              <a:t> (Early Warning)    ↓PREPARE (AI Impact Analysis + Resource Positioning)    ↓RESPONSE (Live Dashboard + AI-Optimized Routing + Instant Alerts)    ↓RECOVER (Outcome Validation + Lessons Learned)    ↓FEEDBACK LOOP → Improve next PREDICT </a:t>
+              <a:t>AI Decision Support:</a:t>
             </a:r>
             <a:r>
-              <a:rPr lang="en-GB" sz="1300" dirty="0" err="1">
+              <a:rPr sz="950" b="0" i="0">
+                <a:solidFill>
+                  <a:srgbClr val="1A1A1A"/>
+                </a:solidFill>
                 <a:latin typeface="Google Sans Flex"/>
-                <a:ea typeface="Google Sans Flex"/>
-                <a:cs typeface="Google Sans Flex"/>
-                <a:sym typeface="Google Sans Flex"/>
               </a:rPr>
-              <a:t>cycleHow</a:t>
+              <a:t> Gemini 2.5 Flash generates response plans, preparedness actions, and agency alert drafts, each with a confidence score</a:t>
+            </a:r>
+          </a:p>
+          <a:p>
+            <a:pPr>
+              <a:spcBef>
+                <a:spcPts val="100"/>
+              </a:spcBef>
+              <a:spcAft>
+                <a:spcPts val="100"/>
+              </a:spcAft>
+            </a:pPr>
+            <a:r>
+              <a:rPr sz="950" b="1" i="0">
+                <a:solidFill>
+                  <a:srgbClr val="1E8E3E"/>
+                </a:solidFill>
+                <a:latin typeface="Google Sans Flex"/>
+              </a:rPr>
+              <a:t>✓  </a:t>
             </a:r>
             <a:r>
-              <a:rPr lang="en-GB" sz="1300" dirty="0">
+              <a:rPr sz="950" b="1" i="0">
+                <a:solidFill>
+                  <a:srgbClr val="1A1A1A"/>
+                </a:solidFill>
                 <a:latin typeface="Google Sans Flex"/>
-                <a:ea typeface="Google Sans Flex"/>
-                <a:cs typeface="Google Sans Flex"/>
-                <a:sym typeface="Google Sans Flex"/>
               </a:rPr>
-              <a:t> It Reduces Response Time:1. Before: Disaster detected → Wait for human analysis → Manual planning → Delayed alerts• Time: 2-4 hours ⚠️2. With TerraGrid: Disaster detected → AI instantly </a:t>
+              <a:t>Evacuation Route Pre-Calculation:</a:t>
             </a:r>
             <a:r>
-              <a:rPr lang="en-GB" sz="1300" dirty="0" err="1">
+              <a:rPr sz="950" b="0" i="0">
+                <a:solidFill>
+                  <a:srgbClr val="1A1A1A"/>
+                </a:solidFill>
                 <a:latin typeface="Google Sans Flex"/>
-                <a:ea typeface="Google Sans Flex"/>
-                <a:cs typeface="Google Sans Flex"/>
-                <a:sym typeface="Google Sans Flex"/>
               </a:rPr>
-              <a:t>analyzes</a:t>
+              <a:t> OSRM road-network routing with automatic geodesic fallback if the routing service fails</a:t>
+            </a:r>
+          </a:p>
+          <a:p>
+            <a:pPr>
+              <a:spcBef>
+                <a:spcPts val="100"/>
+              </a:spcBef>
+              <a:spcAft>
+                <a:spcPts val="100"/>
+              </a:spcAft>
+            </a:pPr>
+            <a:r>
+              <a:rPr sz="950" b="1" i="0">
+                <a:solidFill>
+                  <a:srgbClr val="1E8E3E"/>
+                </a:solidFill>
+                <a:latin typeface="Google Sans Flex"/>
+              </a:rPr>
+              <a:t>✓  </a:t>
             </a:r>
             <a:r>
-              <a:rPr lang="en-GB" sz="1300" dirty="0">
+              <a:rPr sz="950" b="1" i="0">
+                <a:solidFill>
+                  <a:srgbClr val="1A1A1A"/>
+                </a:solidFill>
                 <a:latin typeface="Google Sans Flex"/>
-                <a:ea typeface="Google Sans Flex"/>
-                <a:cs typeface="Google Sans Flex"/>
-                <a:sym typeface="Google Sans Flex"/>
               </a:rPr>
-              <a:t> impact → Recommends actions → Alerts broadcast• Time: 2-5 minutes ✅Key Mechanisms:• ✅ Real-time Multi-Source Intelligence: 7 APIs auto-ingested; no manual data gathering• ✅ AI Decision Support: Vertex AI + Gemini recommends where/how to evacuate, where to stage resources• ✅ Dynamic Route Optimization: OR-Tools recalculates evacuation routes every 30 sec based on current hazard extent• ✅ Multi-Channel Alerts: SMS + Email reach vulnerable populations instantly with personalized guidance• ✅ Decision Lineage: Every recommendation logged—responders see "why" and can validate post-</a:t>
+              <a:t>Multi-Channel Alerts:</a:t>
             </a:r>
             <a:r>
-              <a:rPr lang="en-GB" sz="1300" dirty="0" err="1">
+              <a:rPr sz="950" b="0" i="0">
+                <a:solidFill>
+                  <a:srgbClr val="1A1A1A"/>
+                </a:solidFill>
                 <a:latin typeface="Google Sans Flex"/>
-                <a:ea typeface="Google Sans Flex"/>
-                <a:cs typeface="Google Sans Flex"/>
-                <a:sym typeface="Google Sans Flex"/>
               </a:rPr>
-              <a:t>eventResult</a:t>
+              <a:t> WhatsApp (WAHA) + Email (Resend), tone adapted per audience (farmers, hospitals, NGOs, municipal corps)</a:t>
+            </a:r>
+          </a:p>
+          <a:p>
+            <a:pPr>
+              <a:spcBef>
+                <a:spcPts val="100"/>
+              </a:spcBef>
+              <a:spcAft>
+                <a:spcPts val="100"/>
+              </a:spcAft>
+            </a:pPr>
+            <a:r>
+              <a:rPr sz="950" b="1" i="0">
+                <a:solidFill>
+                  <a:srgbClr val="1E8E3E"/>
+                </a:solidFill>
+                <a:latin typeface="Google Sans Flex"/>
+              </a:rPr>
+              <a:t>✓  </a:t>
             </a:r>
             <a:r>
-              <a:rPr lang="en-GB" sz="1300" dirty="0">
+              <a:rPr sz="950" b="1" i="0">
+                <a:solidFill>
+                  <a:srgbClr val="1A1A1A"/>
+                </a:solidFill>
                 <a:latin typeface="Google Sans Flex"/>
-                <a:ea typeface="Google Sans Flex"/>
-                <a:cs typeface="Google Sans Flex"/>
-                <a:sym typeface="Google Sans Flex"/>
               </a:rPr>
-              <a:t>: From "detect disaster" → "coordinate response" in minutes, not hours.</a:t>
+              <a:t>Cross-Check Logging:</a:t>
             </a:r>
-          </a:p>
-          <a:p>
-            <a:pPr marL="457200" lvl="0" indent="-311150" algn="l" rtl="0">
-              <a:spcBef>
-                <a:spcPts val="0"/>
-              </a:spcBef>
-              <a:spcAft>
-                <a:spcPts val="0"/>
-              </a:spcAft>
-              <a:buSzPts val="1300"/>
-              <a:buFont typeface="Google Sans Flex"/>
-              <a:buChar char="●"/>
-            </a:pPr>
-            <a:endParaRPr lang="en-GB" sz="1300" dirty="0">
-              <a:latin typeface="Google Sans Flex"/>
-              <a:ea typeface="Google Sans Flex"/>
-              <a:cs typeface="Google Sans Flex"/>
-              <a:sym typeface="Google Sans Flex"/>
-            </a:endParaRPr>
-          </a:p>
-          <a:p>
-            <a:pPr marL="457200" lvl="0" indent="-311150" algn="l" rtl="0">
-              <a:spcBef>
-                <a:spcPts val="0"/>
-              </a:spcBef>
-              <a:spcAft>
-                <a:spcPts val="0"/>
-              </a:spcAft>
-              <a:buSzPts val="1300"/>
-              <a:buFont typeface="Google Sans Flex"/>
-              <a:buChar char="●"/>
-            </a:pPr>
-            <a:endParaRPr lang="en-GB" sz="1300" dirty="0">
-              <a:latin typeface="Google Sans Flex"/>
-              <a:ea typeface="Google Sans Flex"/>
-              <a:cs typeface="Google Sans Flex"/>
-              <a:sym typeface="Google Sans Flex"/>
-            </a:endParaRPr>
-          </a:p>
-          <a:p>
-            <a:pPr marL="457200" lvl="0" indent="-311150" algn="l" rtl="0">
-              <a:spcBef>
-                <a:spcPts val="0"/>
-              </a:spcBef>
-              <a:spcAft>
-                <a:spcPts val="0"/>
-              </a:spcAft>
-              <a:buSzPts val="1300"/>
-              <a:buFont typeface="Google Sans Flex"/>
-              <a:buChar char="●"/>
-            </a:pPr>
-            <a:endParaRPr lang="en-GB" sz="1300" dirty="0">
-              <a:latin typeface="Google Sans Flex"/>
-              <a:ea typeface="Google Sans Flex"/>
-              <a:cs typeface="Google Sans Flex"/>
-              <a:sym typeface="Google Sans Flex"/>
-            </a:endParaRPr>
-          </a:p>
-          <a:p>
-            <a:pPr marL="457200" lvl="0" indent="-311150" algn="l" rtl="0">
-              <a:spcBef>
-                <a:spcPts val="0"/>
-              </a:spcBef>
-              <a:spcAft>
-                <a:spcPts val="0"/>
-              </a:spcAft>
-              <a:buSzPts val="1300"/>
-              <a:buFont typeface="Google Sans Flex"/>
-              <a:buChar char="●"/>
-            </a:pPr>
-            <a:endParaRPr lang="en-GB" sz="1300" dirty="0">
-              <a:latin typeface="Google Sans Flex"/>
-              <a:ea typeface="Google Sans Flex"/>
-              <a:cs typeface="Google Sans Flex"/>
-              <a:sym typeface="Google Sans Flex"/>
-            </a:endParaRPr>
-          </a:p>
-          <a:p>
-            <a:pPr marL="457200" lvl="0" indent="-311150" algn="l" rtl="0">
-              <a:spcBef>
-                <a:spcPts val="0"/>
-              </a:spcBef>
-              <a:spcAft>
-                <a:spcPts val="0"/>
-              </a:spcAft>
-              <a:buSzPts val="1300"/>
-              <a:buFont typeface="Google Sans Flex"/>
-              <a:buChar char="●"/>
-            </a:pPr>
-            <a:endParaRPr lang="en-GB" sz="1300" dirty="0">
-              <a:latin typeface="Google Sans Flex"/>
-              <a:ea typeface="Google Sans Flex"/>
-              <a:cs typeface="Google Sans Flex"/>
-              <a:sym typeface="Google Sans Flex"/>
-            </a:endParaRPr>
-          </a:p>
-          <a:p>
-            <a:pPr marL="457200" lvl="0" indent="-311150" algn="l" rtl="0">
-              <a:spcBef>
-                <a:spcPts val="0"/>
-              </a:spcBef>
-              <a:spcAft>
-                <a:spcPts val="0"/>
-              </a:spcAft>
-              <a:buSzPts val="1300"/>
-              <a:buFont typeface="Google Sans Flex"/>
-              <a:buChar char="●"/>
-            </a:pPr>
-            <a:endParaRPr lang="en-GB" sz="1300" dirty="0">
-              <a:latin typeface="Google Sans Flex"/>
-              <a:ea typeface="Google Sans Flex"/>
-              <a:cs typeface="Google Sans Flex"/>
-              <a:sym typeface="Google Sans Flex"/>
-            </a:endParaRPr>
-          </a:p>
-          <a:p>
-            <a:pPr marL="457200" lvl="0" indent="-311150" algn="l" rtl="0">
-              <a:spcBef>
-                <a:spcPts val="0"/>
-              </a:spcBef>
-              <a:spcAft>
-                <a:spcPts val="0"/>
-              </a:spcAft>
-              <a:buSzPts val="1300"/>
-              <a:buFont typeface="Google Sans Flex"/>
-              <a:buChar char="●"/>
-            </a:pPr>
-            <a:endParaRPr lang="en-GB" sz="1300" dirty="0">
-              <a:latin typeface="Google Sans Flex"/>
-              <a:ea typeface="Google Sans Flex"/>
-              <a:cs typeface="Google Sans Flex"/>
-              <a:sym typeface="Google Sans Flex"/>
-            </a:endParaRPr>
-          </a:p>
-          <a:p>
-            <a:pPr marL="457200" lvl="0" indent="-311150" algn="l" rtl="0">
-              <a:spcBef>
-                <a:spcPts val="0"/>
-              </a:spcBef>
-              <a:spcAft>
-                <a:spcPts val="0"/>
-              </a:spcAft>
-              <a:buSzPts val="1300"/>
-              <a:buFont typeface="Google Sans Flex"/>
-              <a:buChar char="●"/>
-            </a:pPr>
-            <a:endParaRPr lang="en-GB" sz="1300" dirty="0">
-              <a:latin typeface="Google Sans Flex"/>
-              <a:ea typeface="Google Sans Flex"/>
-              <a:cs typeface="Google Sans Flex"/>
-              <a:sym typeface="Google Sans Flex"/>
-            </a:endParaRPr>
-          </a:p>
-          <a:p>
-            <a:pPr marL="457200" lvl="0" indent="-311150" algn="l" rtl="0">
-              <a:spcBef>
-                <a:spcPts val="0"/>
-              </a:spcBef>
-              <a:spcAft>
-                <a:spcPts val="0"/>
-              </a:spcAft>
-              <a:buSzPts val="1300"/>
-              <a:buFont typeface="Google Sans Flex"/>
-              <a:buChar char="●"/>
-            </a:pPr>
-            <a:endParaRPr lang="en-GB" sz="1300" dirty="0">
-              <a:latin typeface="Google Sans Flex"/>
-              <a:ea typeface="Google Sans Flex"/>
-              <a:cs typeface="Google Sans Flex"/>
-              <a:sym typeface="Google Sans Flex"/>
-            </a:endParaRPr>
-          </a:p>
-          <a:p>
-            <a:pPr marL="457200" lvl="0" indent="-311150" algn="l" rtl="0">
-              <a:spcBef>
-                <a:spcPts val="0"/>
-              </a:spcBef>
-              <a:spcAft>
-                <a:spcPts val="0"/>
-              </a:spcAft>
-              <a:buSzPts val="1300"/>
-              <a:buFont typeface="Google Sans Flex"/>
-              <a:buChar char="●"/>
-            </a:pPr>
-            <a:endParaRPr lang="en-GB" sz="1300" dirty="0">
-              <a:latin typeface="Google Sans Flex"/>
-              <a:ea typeface="Google Sans Flex"/>
-              <a:cs typeface="Google Sans Flex"/>
-              <a:sym typeface="Google Sans Flex"/>
-            </a:endParaRPr>
-          </a:p>
-          <a:p>
-            <a:pPr marL="457200" lvl="0" indent="-311150" algn="l" rtl="0">
-              <a:spcBef>
-                <a:spcPts val="0"/>
-              </a:spcBef>
-              <a:spcAft>
-                <a:spcPts val="0"/>
-              </a:spcAft>
-              <a:buSzPts val="1300"/>
-              <a:buFont typeface="Google Sans Flex"/>
-              <a:buChar char="●"/>
-            </a:pPr>
-            <a:endParaRPr lang="en-GB" sz="1300" dirty="0">
-              <a:latin typeface="Google Sans Flex"/>
-              <a:ea typeface="Google Sans Flex"/>
-              <a:cs typeface="Google Sans Flex"/>
-              <a:sym typeface="Google Sans Flex"/>
-            </a:endParaRPr>
-          </a:p>
-          <a:p>
-            <a:pPr marL="457200" lvl="0" indent="-311150" algn="l" rtl="0">
-              <a:spcBef>
-                <a:spcPts val="0"/>
-              </a:spcBef>
-              <a:spcAft>
-                <a:spcPts val="0"/>
-              </a:spcAft>
-              <a:buSzPts val="1300"/>
-              <a:buFont typeface="Google Sans Flex"/>
-              <a:buChar char="●"/>
-            </a:pPr>
-            <a:endParaRPr lang="en-GB" sz="1300" dirty="0">
-              <a:latin typeface="Google Sans Flex"/>
-              <a:ea typeface="Google Sans Flex"/>
-              <a:cs typeface="Google Sans Flex"/>
-              <a:sym typeface="Google Sans Flex"/>
-            </a:endParaRPr>
-          </a:p>
-          <a:p>
-            <a:pPr marL="457200" lvl="0" indent="-311150" algn="l" rtl="0">
-              <a:spcBef>
-                <a:spcPts val="0"/>
-              </a:spcBef>
-              <a:spcAft>
-                <a:spcPts val="0"/>
-              </a:spcAft>
-              <a:buSzPts val="1300"/>
-              <a:buFont typeface="Google Sans Flex"/>
-              <a:buChar char="●"/>
-            </a:pPr>
-            <a:endParaRPr lang="en-GB" sz="1300" dirty="0">
-              <a:latin typeface="Google Sans Flex"/>
-              <a:ea typeface="Google Sans Flex"/>
-              <a:cs typeface="Google Sans Flex"/>
-              <a:sym typeface="Google Sans Flex"/>
-            </a:endParaRPr>
-          </a:p>
-          <a:p>
-            <a:pPr marL="457200" lvl="0" indent="-311150" algn="l" rtl="0">
-              <a:spcBef>
-                <a:spcPts val="0"/>
-              </a:spcBef>
-              <a:spcAft>
-                <a:spcPts val="0"/>
-              </a:spcAft>
-              <a:buSzPts val="1300"/>
-              <a:buFont typeface="Google Sans Flex"/>
-              <a:buChar char="●"/>
-            </a:pPr>
-            <a:endParaRPr lang="en-GB" sz="1300" dirty="0">
-              <a:latin typeface="Google Sans Flex"/>
-              <a:ea typeface="Google Sans Flex"/>
-              <a:cs typeface="Google Sans Flex"/>
-              <a:sym typeface="Google Sans Flex"/>
-            </a:endParaRPr>
-          </a:p>
-          <a:p>
-            <a:pPr marL="457200" lvl="0" indent="-311150" algn="l" rtl="0">
-              <a:spcBef>
-                <a:spcPts val="0"/>
-              </a:spcBef>
-              <a:spcAft>
-                <a:spcPts val="0"/>
-              </a:spcAft>
-              <a:buSzPts val="1300"/>
-              <a:buFont typeface="Google Sans Flex"/>
-              <a:buChar char="●"/>
-            </a:pPr>
-            <a:endParaRPr lang="en-GB" sz="1300" dirty="0">
-              <a:latin typeface="Google Sans Flex"/>
-              <a:ea typeface="Google Sans Flex"/>
-              <a:cs typeface="Google Sans Flex"/>
-              <a:sym typeface="Google Sans Flex"/>
-            </a:endParaRPr>
-          </a:p>
-          <a:p>
-            <a:pPr marL="457200" lvl="0" indent="-311150" algn="l" rtl="0">
-              <a:spcBef>
-                <a:spcPts val="0"/>
-              </a:spcBef>
-              <a:spcAft>
-                <a:spcPts val="0"/>
-              </a:spcAft>
-              <a:buSzPts val="1300"/>
-              <a:buFont typeface="Google Sans Flex"/>
-              <a:buChar char="●"/>
-            </a:pPr>
-            <a:endParaRPr lang="en-GB" sz="1300" dirty="0">
-              <a:latin typeface="Google Sans Flex"/>
-              <a:ea typeface="Google Sans Flex"/>
-              <a:cs typeface="Google Sans Flex"/>
-              <a:sym typeface="Google Sans Flex"/>
-            </a:endParaRPr>
-          </a:p>
-          <a:p>
-            <a:pPr marL="457200" lvl="0" indent="-311150" algn="l" rtl="0">
-              <a:spcBef>
-                <a:spcPts val="0"/>
-              </a:spcBef>
-              <a:spcAft>
-                <a:spcPts val="0"/>
-              </a:spcAft>
-              <a:buSzPts val="1300"/>
-              <a:buFont typeface="Google Sans Flex"/>
-              <a:buChar char="●"/>
-            </a:pPr>
-            <a:endParaRPr lang="en-GB" sz="1300" dirty="0">
-              <a:latin typeface="Google Sans Flex"/>
-              <a:ea typeface="Google Sans Flex"/>
-              <a:cs typeface="Google Sans Flex"/>
-              <a:sym typeface="Google Sans Flex"/>
-            </a:endParaRPr>
-          </a:p>
-          <a:p>
-            <a:pPr marL="457200" lvl="0" indent="-311150" algn="l" rtl="0">
-              <a:spcBef>
-                <a:spcPts val="0"/>
-              </a:spcBef>
-              <a:spcAft>
-                <a:spcPts val="0"/>
-              </a:spcAft>
-              <a:buSzPts val="1300"/>
-              <a:buFont typeface="Google Sans Flex"/>
-              <a:buChar char="●"/>
-            </a:pPr>
-            <a:endParaRPr lang="en-GB" sz="1300" dirty="0">
-              <a:latin typeface="Google Sans Flex"/>
-              <a:ea typeface="Google Sans Flex"/>
-              <a:cs typeface="Google Sans Flex"/>
-              <a:sym typeface="Google Sans Flex"/>
-            </a:endParaRPr>
-          </a:p>
-          <a:p>
-            <a:pPr marL="457200" lvl="0" indent="-311150" algn="l" rtl="0">
-              <a:spcBef>
-                <a:spcPts val="0"/>
-              </a:spcBef>
-              <a:spcAft>
-                <a:spcPts val="0"/>
-              </a:spcAft>
-              <a:buSzPts val="1300"/>
-              <a:buFont typeface="Google Sans Flex"/>
-              <a:buChar char="●"/>
-            </a:pPr>
-            <a:endParaRPr lang="en-GB" sz="1300" dirty="0">
-              <a:latin typeface="Google Sans Flex"/>
-              <a:ea typeface="Google Sans Flex"/>
-              <a:cs typeface="Google Sans Flex"/>
-              <a:sym typeface="Google Sans Flex"/>
-            </a:endParaRPr>
-          </a:p>
-          <a:p>
-            <a:pPr marL="457200" lvl="0" indent="-311150" algn="l" rtl="0">
-              <a:spcBef>
-                <a:spcPts val="0"/>
-              </a:spcBef>
-              <a:spcAft>
-                <a:spcPts val="0"/>
-              </a:spcAft>
-              <a:buSzPts val="1300"/>
-              <a:buFont typeface="Google Sans Flex"/>
-              <a:buChar char="●"/>
-            </a:pPr>
-            <a:endParaRPr lang="en-GB" sz="1300" dirty="0">
-              <a:latin typeface="Google Sans Flex"/>
-              <a:ea typeface="Google Sans Flex"/>
-              <a:cs typeface="Google Sans Flex"/>
-              <a:sym typeface="Google Sans Flex"/>
-            </a:endParaRPr>
-          </a:p>
-          <a:p>
-            <a:pPr marL="457200" lvl="0" indent="-311150" algn="l" rtl="0">
-              <a:spcBef>
-                <a:spcPts val="0"/>
-              </a:spcBef>
-              <a:spcAft>
-                <a:spcPts val="0"/>
-              </a:spcAft>
-              <a:buSzPts val="1300"/>
-              <a:buFont typeface="Google Sans Flex"/>
-              <a:buChar char="●"/>
-            </a:pPr>
-            <a:endParaRPr lang="en-GB" sz="1300" dirty="0">
-              <a:latin typeface="Google Sans Flex"/>
-              <a:ea typeface="Google Sans Flex"/>
-              <a:cs typeface="Google Sans Flex"/>
-              <a:sym typeface="Google Sans Flex"/>
-            </a:endParaRPr>
-          </a:p>
-          <a:p>
-            <a:pPr marL="0" lvl="0" indent="0" algn="l" rtl="0">
-              <a:spcBef>
-                <a:spcPts val="0"/>
-              </a:spcBef>
-              <a:spcAft>
-                <a:spcPts val="0"/>
-              </a:spcAft>
-              <a:buNone/>
-            </a:pPr>
-            <a:endParaRPr sz="1600" dirty="0">
-              <a:latin typeface="Google Sans Flex Medium"/>
-              <a:ea typeface="Google Sans Flex Medium"/>
-              <a:cs typeface="Google Sans Flex Medium"/>
-              <a:sym typeface="Google Sans Flex Medium"/>
-            </a:endParaRPr>
-          </a:p>
-          <a:p>
-            <a:pPr marL="0" lvl="0" indent="0" algn="l" rtl="0">
-              <a:spcBef>
-                <a:spcPts val="0"/>
-              </a:spcBef>
-              <a:spcAft>
-                <a:spcPts val="0"/>
-              </a:spcAft>
-              <a:buNone/>
-            </a:pPr>
-            <a:endParaRPr sz="1600" dirty="0">
-              <a:latin typeface="Google Sans Flex Medium"/>
-              <a:ea typeface="Google Sans Flex Medium"/>
-              <a:cs typeface="Google Sans Flex Medium"/>
-              <a:sym typeface="Google Sans Flex Medium"/>
-            </a:endParaRPr>
+            <a:r>
+              <a:rPr sz="950" b="0" i="0">
+                <a:solidFill>
+                  <a:srgbClr val="1A1A1A"/>
+                </a:solidFill>
+                <a:latin typeface="Google Sans Flex"/>
+              </a:rPr>
+              <a:t> every external API call and every Gemini response is saved to disk as a JSON envelope — auditable, not a black box</a:t>
+            </a:r>
+          </a:p>
+          <a:p>
+            <a:pPr>
+              <a:spcBef>
+                <a:spcPts val="500"/>
+              </a:spcBef>
+              <a:spcAft>
+                <a:spcPts val="0"/>
+              </a:spcAft>
+            </a:pPr>
+            <a:r>
+              <a:rPr sz="950" b="1" i="0">
+                <a:solidFill>
+                  <a:srgbClr val="1A1A1A"/>
+                </a:solidFill>
+                <a:latin typeface="Google Sans Flex"/>
+              </a:rPr>
+              <a:t>Result: </a:t>
+            </a:r>
+            <a:r>
+              <a:rPr sz="950" b="0" i="1">
+                <a:solidFill>
+                  <a:srgbClr val="5F5F5F"/>
+                </a:solidFill>
+                <a:latin typeface="Google Sans Flex"/>
+              </a:rPr>
+              <a:t>TerraGrid automates the data-gathering and first-draft-recommendation steps, compressing the manual analysis chain. Exact time savings have not been formally benchmarked yet.</a:t>
+            </a:r>
           </a:p>
         </p:txBody>
       </p:sp>
@@ -10982,7 +10987,7 @@
         <p:spPr>
           <a:xfrm>
             <a:off x="317602" y="578917"/>
-            <a:ext cx="8943000" cy="1366200"/>
+            <a:ext cx="8943000" cy="2500000"/>
           </a:xfrm>
           <a:prstGeom prst="rect">
             <a:avLst/>
@@ -10999,616 +11004,742 @@
           <a:lstStyle/>
           <a:p>
             <a:pPr marL="457200" lvl="0" indent="-311150">
+              <a:spcBef>
+                <a:spcPts val="0"/>
+              </a:spcBef>
+              <a:spcAft>
+                <a:spcPts val="300"/>
+              </a:spcAft>
               <a:buSzPts val="1300"/>
               <a:buFont typeface="Google Sans Flex"/>
-              <a:buChar char="●"/>
+              <a:buNone/>
             </a:pPr>
             <a:r>
-              <a:rPr lang="en-US" sz="1300" dirty="0">
-                <a:latin typeface="Google Sans Flex"/>
-                <a:ea typeface="Google Sans Flex"/>
-                <a:cs typeface="Google Sans Flex"/>
-                <a:sym typeface="Google Sans Flex"/>
+              <a:rPr sz="1300" b="0" i="0">
+                <a:solidFill>
+                  <a:srgbClr val="1A1A1A"/>
+                </a:solidFill>
+                <a:latin typeface="Google Sans Flex Medium"/>
               </a:rPr>
               <a:t>USP of the proposed solution</a:t>
             </a:r>
           </a:p>
           <a:p>
-            <a:pPr marL="457200" lvl="0" indent="-311150" algn="l" rtl="0">
-              <a:spcBef>
-                <a:spcPts val="0"/>
-              </a:spcBef>
-              <a:spcAft>
-                <a:spcPts val="0"/>
-              </a:spcAft>
-              <a:buSzPts val="1300"/>
-              <a:buFont typeface="Google Sans Flex"/>
-              <a:buChar char="●"/>
-            </a:pPr>
-            <a:endParaRPr lang="en-GB" sz="1300" dirty="0">
-              <a:latin typeface="Google Sans Flex"/>
-              <a:ea typeface="Google Sans Flex"/>
-              <a:cs typeface="Google Sans Flex"/>
-              <a:sym typeface="Google Sans Flex"/>
-            </a:endParaRPr>
-          </a:p>
-          <a:p>
-            <a:pPr marL="457200" lvl="0" indent="-311150" algn="l" rtl="0">
-              <a:spcBef>
-                <a:spcPts val="0"/>
-              </a:spcBef>
-              <a:spcAft>
-                <a:spcPts val="0"/>
-              </a:spcAft>
-              <a:buSzPts val="1300"/>
-              <a:buFont typeface="Google Sans Flex"/>
-              <a:buChar char="●"/>
-            </a:pPr>
-            <a:endParaRPr lang="en-GB" sz="1300" dirty="0">
-              <a:latin typeface="Google Sans Flex"/>
-              <a:ea typeface="Google Sans Flex"/>
-              <a:cs typeface="Google Sans Flex"/>
-              <a:sym typeface="Google Sans Flex"/>
-            </a:endParaRPr>
-          </a:p>
-          <a:p>
-            <a:pPr marL="457200" lvl="0" indent="-311150">
-              <a:buSzPts val="1300"/>
-              <a:buFont typeface="Google Sans Flex"/>
-              <a:buChar char="●"/>
+            <a:pPr>
+              <a:spcBef>
+                <a:spcPts val="200"/>
+              </a:spcBef>
+              <a:spcAft>
+                <a:spcPts val="0"/>
+              </a:spcAft>
             </a:pPr>
             <a:r>
-              <a:rPr lang="en-GB" sz="1100" dirty="0">
-                <a:latin typeface="+mj-lt"/>
-                <a:ea typeface="Google Sans Flex"/>
-                <a:cs typeface="Google Sans Flex"/>
-                <a:sym typeface="Google Sans Flex"/>
+              <a:rPr sz="950" b="1" i="0">
+                <a:solidFill>
+                  <a:srgbClr val="1857B8"/>
+                </a:solidFill>
+                <a:latin typeface="Google Sans Flex"/>
               </a:rPr>
-              <a:t>What makes TerraGrid </a:t>
+              <a:t>USP #1: Phase Integration, Not a Point Solution</a:t>
             </a:r>
+          </a:p>
+          <a:p>
+            <a:pPr>
+              <a:spcBef>
+                <a:spcPts val="0"/>
+              </a:spcBef>
+              <a:spcAft>
+                <a:spcPts val="0"/>
+              </a:spcAft>
+            </a:pPr>
             <a:r>
-              <a:rPr lang="en-GB" sz="1100" dirty="0" err="1">
-                <a:latin typeface="+mj-lt"/>
-                <a:ea typeface="Google Sans Flex"/>
-                <a:cs typeface="Google Sans Flex"/>
-                <a:sym typeface="Google Sans Flex"/>
+              <a:rPr sz="880" b="0" i="0">
+                <a:solidFill>
+                  <a:srgbClr val="1A1A1A"/>
+                </a:solidFill>
+                <a:latin typeface="Google Sans Flex"/>
               </a:rPr>
-              <a:t>different?USP</a:t>
+              <a:t>    PREPARE + RESPONSE connected today; PREDICT + RECOVER next on the roadmap — working toward full-lifecycle coverage, not stopping at detection.</a:t>
             </a:r>
+          </a:p>
+          <a:p>
+            <a:pPr>
+              <a:spcBef>
+                <a:spcPts val="200"/>
+              </a:spcBef>
+              <a:spcAft>
+                <a:spcPts val="0"/>
+              </a:spcAft>
+            </a:pPr>
             <a:r>
-              <a:rPr lang="en-GB" sz="1100" dirty="0">
-                <a:latin typeface="+mj-lt"/>
-                <a:ea typeface="Google Sans Flex"/>
-                <a:cs typeface="Google Sans Flex"/>
-                <a:sym typeface="Google Sans Flex"/>
+              <a:rPr sz="950" b="1" i="0">
+                <a:solidFill>
+                  <a:srgbClr val="1857B8"/>
+                </a:solidFill>
+                <a:latin typeface="Google Sans Flex"/>
               </a:rPr>
-              <a:t> #1: Full Lifecycle Integration• ❌ Others: "We detect disasters"• ✅ TerraGrid: "We detect → </a:t>
+              <a:t>USP #2: AI That Recommends, Not Just Displays</a:t>
             </a:r>
+          </a:p>
+          <a:p>
+            <a:pPr>
+              <a:spcBef>
+                <a:spcPts val="0"/>
+              </a:spcBef>
+              <a:spcAft>
+                <a:spcPts val="0"/>
+              </a:spcAft>
+            </a:pPr>
             <a:r>
-              <a:rPr lang="en-GB" sz="1100" dirty="0" err="1">
-                <a:latin typeface="+mj-lt"/>
-                <a:ea typeface="Google Sans Flex"/>
-                <a:cs typeface="Google Sans Flex"/>
-                <a:sym typeface="Google Sans Flex"/>
+              <a:rPr sz="880" b="0" i="0">
+                <a:solidFill>
+                  <a:srgbClr val="1A1A1A"/>
+                </a:solidFill>
+                <a:latin typeface="Google Sans Flex"/>
               </a:rPr>
-              <a:t>analyze</a:t>
+              <a:t>    Gemini drafts a response plan, checklist, and agency alert — confidence-scored, human-reviewed before send.</a:t>
             </a:r>
+          </a:p>
+          <a:p>
+            <a:pPr>
+              <a:spcBef>
+                <a:spcPts val="200"/>
+              </a:spcBef>
+              <a:spcAft>
+                <a:spcPts val="0"/>
+              </a:spcAft>
+            </a:pPr>
             <a:r>
-              <a:rPr lang="en-GB" sz="1100" dirty="0">
-                <a:latin typeface="+mj-lt"/>
-                <a:ea typeface="Google Sans Flex"/>
-                <a:cs typeface="Google Sans Flex"/>
-                <a:sym typeface="Google Sans Flex"/>
+              <a:rPr sz="950" b="1" i="0">
+                <a:solidFill>
+                  <a:srgbClr val="1857B8"/>
+                </a:solidFill>
+                <a:latin typeface="Google Sans Flex"/>
               </a:rPr>
-              <a:t> → optimize response → learn → prevent"• Unique: Only platform with all 4 phases + closed feedback </a:t>
+              <a:t>USP #3: Auditable AI, Not a Black Box</a:t>
             </a:r>
+          </a:p>
+          <a:p>
+            <a:pPr>
+              <a:spcBef>
+                <a:spcPts val="0"/>
+              </a:spcBef>
+              <a:spcAft>
+                <a:spcPts val="0"/>
+              </a:spcAft>
+            </a:pPr>
             <a:r>
-              <a:rPr lang="en-GB" sz="1100" dirty="0" err="1">
-                <a:latin typeface="+mj-lt"/>
-                <a:ea typeface="Google Sans Flex"/>
-                <a:cs typeface="Google Sans Flex"/>
-                <a:sym typeface="Google Sans Flex"/>
+              <a:rPr sz="880" b="0" i="0">
+                <a:solidFill>
+                  <a:srgbClr val="1A1A1A"/>
+                </a:solidFill>
+                <a:latin typeface="Google Sans Flex"/>
               </a:rPr>
-              <a:t>loopUSP</a:t>
+              <a:t>    Every API fetch and Gemini response is logged to disk, folder-wise — the reasoning behind any recommendation can be checked against raw data.</a:t>
             </a:r>
+          </a:p>
+          <a:p>
+            <a:pPr>
+              <a:spcBef>
+                <a:spcPts val="200"/>
+              </a:spcBef>
+              <a:spcAft>
+                <a:spcPts val="0"/>
+              </a:spcAft>
+            </a:pPr>
             <a:r>
-              <a:rPr lang="en-GB" sz="1100" dirty="0">
-                <a:latin typeface="+mj-lt"/>
-                <a:ea typeface="Google Sans Flex"/>
-                <a:cs typeface="Google Sans Flex"/>
-                <a:sym typeface="Google Sans Flex"/>
+              <a:rPr sz="950" b="1" i="0">
+                <a:solidFill>
+                  <a:srgbClr val="1857B8"/>
+                </a:solidFill>
+                <a:latin typeface="Google Sans Flex"/>
               </a:rPr>
-              <a:t> #2: AI That Actually Recommends (Not Just Shows)• ❌ Others: Dashboard shows fire extent• ✅ TerraGrid: "Deploy 15 mobile clinics to zones B, C, F. Evacuate via Highway 3. This saves 15 min/person."• Unique: Actionable AI, not just data </a:t>
+              <a:t>USP #4: Resilient Data Pipeline</a:t>
             </a:r>
+          </a:p>
+          <a:p>
+            <a:pPr>
+              <a:spcBef>
+                <a:spcPts val="0"/>
+              </a:spcBef>
+              <a:spcAft>
+                <a:spcPts val="0"/>
+              </a:spcAft>
+            </a:pPr>
             <a:r>
-              <a:rPr lang="en-GB" sz="1100" dirty="0" err="1">
-                <a:latin typeface="+mj-lt"/>
-                <a:ea typeface="Google Sans Flex"/>
-                <a:cs typeface="Google Sans Flex"/>
-                <a:sym typeface="Google Sans Flex"/>
+              <a:rPr sz="880" b="0" i="0">
+                <a:solidFill>
+                  <a:srgbClr val="1A1A1A"/>
+                </a:solidFill>
+                <a:latin typeface="Google Sans Flex"/>
               </a:rPr>
-              <a:t>visualizationUSP</a:t>
+              <a:t>    Automatic retry + backoff + graceful fallback when any source fails — the dashboard degrades, it doesn't break.</a:t>
             </a:r>
+          </a:p>
+          <a:p>
+            <a:pPr>
+              <a:spcBef>
+                <a:spcPts val="200"/>
+              </a:spcBef>
+              <a:spcAft>
+                <a:spcPts val="0"/>
+              </a:spcAft>
+            </a:pPr>
             <a:r>
-              <a:rPr lang="en-GB" sz="1100" dirty="0">
-                <a:latin typeface="+mj-lt"/>
-                <a:ea typeface="Google Sans Flex"/>
-                <a:cs typeface="Google Sans Flex"/>
-                <a:sym typeface="Google Sans Flex"/>
+              <a:rPr sz="950" b="1" i="0">
+                <a:solidFill>
+                  <a:srgbClr val="1857B8"/>
+                </a:solidFill>
+                <a:latin typeface="Google Sans Flex"/>
               </a:rPr>
-              <a:t> #3: Reproducible Decision Lineage• ❌ Others: "We sent an alert"• ✅ TerraGrid: "We sent alert based on [data]. Post-event validation: prediction was 92% accurate."• Unique: Teams learn from every disaster; improvement is </a:t>
+              <a:t>USP #5: Google Cloud Native Stack</a:t>
             </a:r>
+          </a:p>
+          <a:p>
+            <a:pPr>
+              <a:spcBef>
+                <a:spcPts val="0"/>
+              </a:spcBef>
+              <a:spcAft>
+                <a:spcPts val="0"/>
+              </a:spcAft>
+            </a:pPr>
             <a:r>
-              <a:rPr lang="en-GB" sz="1100" dirty="0" err="1">
-                <a:latin typeface="+mj-lt"/>
-                <a:ea typeface="Google Sans Flex"/>
-                <a:cs typeface="Google Sans Flex"/>
-                <a:sym typeface="Google Sans Flex"/>
+              <a:rPr sz="880" b="0" i="0">
+                <a:solidFill>
+                  <a:srgbClr val="1A1A1A"/>
+                </a:solidFill>
+                <a:latin typeface="Google Sans Flex"/>
               </a:rPr>
-              <a:t>measurableUSP</a:t>
+              <a:t>    Vertex AI (Gemini) + Earth Engine (Sentinel-1 SAR); deployment target is Cloud Run, not yet deployed at submission time.</a:t>
             </a:r>
-            <a:r>
-              <a:rPr lang="en-GB" sz="1100" dirty="0">
-                <a:latin typeface="+mj-lt"/>
-                <a:ea typeface="Google Sans Flex"/>
-                <a:cs typeface="Google Sans Flex"/>
-                <a:sym typeface="Google Sans Flex"/>
-              </a:rPr>
-              <a:t> #4: Real-Time Dynamic Optimization• ❌ Others: Static routes, pre-planned scenarios• ✅ TerraGrid: Routes recalculate every 30 sec as hazard extent changes• Unique: Responders always have latest info, not yesterday's </a:t>
-            </a:r>
-            <a:r>
-              <a:rPr lang="en-GB" sz="1100" dirty="0" err="1">
-                <a:latin typeface="+mj-lt"/>
-                <a:ea typeface="Google Sans Flex"/>
-                <a:cs typeface="Google Sans Flex"/>
-                <a:sym typeface="Google Sans Flex"/>
-              </a:rPr>
-              <a:t>planUSP</a:t>
-            </a:r>
-            <a:r>
-              <a:rPr lang="en-GB" sz="1100" dirty="0">
-                <a:latin typeface="+mj-lt"/>
-                <a:ea typeface="Google Sans Flex"/>
-                <a:cs typeface="Google Sans Flex"/>
-                <a:sym typeface="Google Sans Flex"/>
-              </a:rPr>
-              <a:t> #5: Role-Adaptive Intelligence• ❌ Others: Complex dashboards (meteorologist-centric)• ✅ TerraGrid: Each role sees their phase (meteorologist sees PREDICT, planner sees PREPARE, responder sees RESPONSE)• Unique: No learning curve; intuitive for diverse </a:t>
-            </a:r>
-            <a:r>
-              <a:rPr lang="en-GB" sz="1100" dirty="0" err="1">
-                <a:latin typeface="+mj-lt"/>
-                <a:ea typeface="Google Sans Flex"/>
-                <a:cs typeface="Google Sans Flex"/>
-                <a:sym typeface="Google Sans Flex"/>
-              </a:rPr>
-              <a:t>teamsUSP</a:t>
-            </a:r>
-            <a:r>
-              <a:rPr lang="en-GB" sz="1100" dirty="0">
-                <a:latin typeface="+mj-lt"/>
-                <a:ea typeface="Google Sans Flex"/>
-                <a:cs typeface="Google Sans Flex"/>
-                <a:sym typeface="Google Sans Flex"/>
-              </a:rPr>
-              <a:t> #6: Built on Google Cloud Native Stack• ❌ Others: Custom geospatial processing (slow, expensive)• ✅ TerraGrid: Vertex AI + Earth Engine + OR-Tools + Cloud Run (fast, scalable, proof-of-concept ready)• Unique: Leverages Google's infrastructure; production-ready out-of-box────────────────────Quick Comparison Table:┌────────────────────────┬────────────────────┬───────────┐│ Feature                │ Existing Solutions │ TerraGrid │├────────────────────────┼────────────────────┼───────────┤│ All 4 phases connected │ ❌ No              │ ✅ Yes    │├────────────────────────┼────────────────────┼───────────┤│ AI recommendations     │ ❌ No              │ ✅ Yes    │├────────────────────────┼────────────────────┼───────────┤│ Decision lineage       │ ❌ No              │ ✅ Yes    │├────────────────────────┼────────────────────┼───────────┤│ Real-time optimization │ ❌ No              │ ✅ Yes    │├────────────────────────┼────────────────────┼───────────┤│ Multi-role interface   │ ❌ No              │ ✅ Yes    │├────────────────────────┼────────────────────┼───────────┤│ Field-ready            │ ❌ No              │ ✅ Yes    │├────────────────────────┼────────────────────┼───────────┤│ Google Cloud native    │ ❌ No              │ ✅ Yes    │└────────────────────────┴────────────────────┴───────────┘</a:t>
-            </a:r>
-          </a:p>
-          <a:p>
-            <a:pPr marL="457200" lvl="0" indent="-311150" algn="l" rtl="0">
-              <a:spcBef>
-                <a:spcPts val="0"/>
-              </a:spcBef>
-              <a:spcAft>
-                <a:spcPts val="0"/>
-              </a:spcAft>
-              <a:buSzPts val="1300"/>
-              <a:buFont typeface="Google Sans Flex"/>
-              <a:buChar char="●"/>
-            </a:pPr>
-            <a:endParaRPr lang="en-GB" sz="1300" dirty="0">
-              <a:latin typeface="Google Sans Flex"/>
-              <a:ea typeface="Google Sans Flex"/>
-              <a:cs typeface="Google Sans Flex"/>
-              <a:sym typeface="Google Sans Flex"/>
-            </a:endParaRPr>
-          </a:p>
-          <a:p>
-            <a:pPr marL="457200" lvl="0" indent="-311150" algn="l" rtl="0">
-              <a:spcBef>
-                <a:spcPts val="0"/>
-              </a:spcBef>
-              <a:spcAft>
-                <a:spcPts val="0"/>
-              </a:spcAft>
-              <a:buSzPts val="1300"/>
-              <a:buFont typeface="Google Sans Flex"/>
-              <a:buChar char="●"/>
-            </a:pPr>
-            <a:endParaRPr lang="en-GB" sz="1300" dirty="0">
-              <a:latin typeface="Google Sans Flex"/>
-              <a:ea typeface="Google Sans Flex"/>
-              <a:cs typeface="Google Sans Flex"/>
-              <a:sym typeface="Google Sans Flex"/>
-            </a:endParaRPr>
-          </a:p>
-          <a:p>
-            <a:pPr marL="457200" lvl="0" indent="-311150" algn="l" rtl="0">
-              <a:spcBef>
-                <a:spcPts val="0"/>
-              </a:spcBef>
-              <a:spcAft>
-                <a:spcPts val="0"/>
-              </a:spcAft>
-              <a:buSzPts val="1300"/>
-              <a:buFont typeface="Google Sans Flex"/>
-              <a:buChar char="●"/>
-            </a:pPr>
-            <a:endParaRPr lang="en-GB" sz="1300" dirty="0">
-              <a:latin typeface="Google Sans Flex"/>
-              <a:ea typeface="Google Sans Flex"/>
-              <a:cs typeface="Google Sans Flex"/>
-              <a:sym typeface="Google Sans Flex"/>
-            </a:endParaRPr>
-          </a:p>
-          <a:p>
-            <a:pPr marL="457200" lvl="0" indent="-311150" algn="l" rtl="0">
-              <a:spcBef>
-                <a:spcPts val="0"/>
-              </a:spcBef>
-              <a:spcAft>
-                <a:spcPts val="0"/>
-              </a:spcAft>
-              <a:buSzPts val="1300"/>
-              <a:buFont typeface="Google Sans Flex"/>
-              <a:buChar char="●"/>
-            </a:pPr>
-            <a:endParaRPr lang="en-GB" sz="1300" dirty="0">
-              <a:latin typeface="Google Sans Flex"/>
-              <a:ea typeface="Google Sans Flex"/>
-              <a:cs typeface="Google Sans Flex"/>
-              <a:sym typeface="Google Sans Flex"/>
-            </a:endParaRPr>
-          </a:p>
-          <a:p>
-            <a:pPr marL="457200" lvl="0" indent="-311150" algn="l" rtl="0">
-              <a:spcBef>
-                <a:spcPts val="0"/>
-              </a:spcBef>
-              <a:spcAft>
-                <a:spcPts val="0"/>
-              </a:spcAft>
-              <a:buSzPts val="1300"/>
-              <a:buFont typeface="Google Sans Flex"/>
-              <a:buChar char="●"/>
-            </a:pPr>
-            <a:endParaRPr lang="en-GB" sz="1300" dirty="0">
-              <a:latin typeface="Google Sans Flex"/>
-              <a:ea typeface="Google Sans Flex"/>
-              <a:cs typeface="Google Sans Flex"/>
-              <a:sym typeface="Google Sans Flex"/>
-            </a:endParaRPr>
-          </a:p>
-          <a:p>
-            <a:pPr marL="457200" lvl="0" indent="-311150" algn="l" rtl="0">
-              <a:spcBef>
-                <a:spcPts val="0"/>
-              </a:spcBef>
-              <a:spcAft>
-                <a:spcPts val="0"/>
-              </a:spcAft>
-              <a:buSzPts val="1300"/>
-              <a:buFont typeface="Google Sans Flex"/>
-              <a:buChar char="●"/>
-            </a:pPr>
-            <a:endParaRPr lang="en-GB" sz="1300" dirty="0">
-              <a:latin typeface="Google Sans Flex"/>
-              <a:ea typeface="Google Sans Flex"/>
-              <a:cs typeface="Google Sans Flex"/>
-              <a:sym typeface="Google Sans Flex"/>
-            </a:endParaRPr>
-          </a:p>
-          <a:p>
-            <a:pPr marL="457200" lvl="0" indent="-311150" algn="l" rtl="0">
-              <a:spcBef>
-                <a:spcPts val="0"/>
-              </a:spcBef>
-              <a:spcAft>
-                <a:spcPts val="0"/>
-              </a:spcAft>
-              <a:buSzPts val="1300"/>
-              <a:buFont typeface="Google Sans Flex"/>
-              <a:buChar char="●"/>
-            </a:pPr>
-            <a:endParaRPr lang="en-GB" sz="1300" dirty="0">
-              <a:latin typeface="Google Sans Flex"/>
-              <a:ea typeface="Google Sans Flex"/>
-              <a:cs typeface="Google Sans Flex"/>
-              <a:sym typeface="Google Sans Flex"/>
-            </a:endParaRPr>
-          </a:p>
-          <a:p>
-            <a:pPr marL="457200" lvl="0" indent="-311150" algn="l" rtl="0">
-              <a:spcBef>
-                <a:spcPts val="0"/>
-              </a:spcBef>
-              <a:spcAft>
-                <a:spcPts val="0"/>
-              </a:spcAft>
-              <a:buSzPts val="1300"/>
-              <a:buFont typeface="Google Sans Flex"/>
-              <a:buChar char="●"/>
-            </a:pPr>
-            <a:endParaRPr lang="en-GB" sz="1300" dirty="0">
-              <a:latin typeface="Google Sans Flex"/>
-              <a:ea typeface="Google Sans Flex"/>
-              <a:cs typeface="Google Sans Flex"/>
-              <a:sym typeface="Google Sans Flex"/>
-            </a:endParaRPr>
-          </a:p>
-          <a:p>
-            <a:pPr marL="457200" lvl="0" indent="-311150" algn="l" rtl="0">
-              <a:spcBef>
-                <a:spcPts val="0"/>
-              </a:spcBef>
-              <a:spcAft>
-                <a:spcPts val="0"/>
-              </a:spcAft>
-              <a:buSzPts val="1300"/>
-              <a:buFont typeface="Google Sans Flex"/>
-              <a:buChar char="●"/>
-            </a:pPr>
-            <a:endParaRPr lang="en-GB" sz="1300" dirty="0">
-              <a:latin typeface="Google Sans Flex"/>
-              <a:ea typeface="Google Sans Flex"/>
-              <a:cs typeface="Google Sans Flex"/>
-              <a:sym typeface="Google Sans Flex"/>
-            </a:endParaRPr>
-          </a:p>
-          <a:p>
-            <a:pPr marL="457200" lvl="0" indent="-311150" algn="l" rtl="0">
-              <a:spcBef>
-                <a:spcPts val="0"/>
-              </a:spcBef>
-              <a:spcAft>
-                <a:spcPts val="0"/>
-              </a:spcAft>
-              <a:buSzPts val="1300"/>
-              <a:buFont typeface="Google Sans Flex"/>
-              <a:buChar char="●"/>
-            </a:pPr>
-            <a:endParaRPr lang="en-GB" sz="1300" dirty="0">
-              <a:latin typeface="Google Sans Flex"/>
-              <a:ea typeface="Google Sans Flex"/>
-              <a:cs typeface="Google Sans Flex"/>
-              <a:sym typeface="Google Sans Flex"/>
-            </a:endParaRPr>
-          </a:p>
-          <a:p>
-            <a:pPr marL="457200" lvl="0" indent="-311150" algn="l" rtl="0">
-              <a:spcBef>
-                <a:spcPts val="0"/>
-              </a:spcBef>
-              <a:spcAft>
-                <a:spcPts val="0"/>
-              </a:spcAft>
-              <a:buSzPts val="1300"/>
-              <a:buFont typeface="Google Sans Flex"/>
-              <a:buChar char="●"/>
-            </a:pPr>
-            <a:endParaRPr lang="en-GB" sz="1300" dirty="0">
-              <a:latin typeface="Google Sans Flex"/>
-              <a:ea typeface="Google Sans Flex"/>
-              <a:cs typeface="Google Sans Flex"/>
-              <a:sym typeface="Google Sans Flex"/>
-            </a:endParaRPr>
-          </a:p>
-          <a:p>
-            <a:pPr marL="457200" lvl="0" indent="-311150" algn="l" rtl="0">
-              <a:spcBef>
-                <a:spcPts val="0"/>
-              </a:spcBef>
-              <a:spcAft>
-                <a:spcPts val="0"/>
-              </a:spcAft>
-              <a:buSzPts val="1300"/>
-              <a:buFont typeface="Google Sans Flex"/>
-              <a:buChar char="●"/>
-            </a:pPr>
-            <a:endParaRPr lang="en-GB" sz="1300" dirty="0">
-              <a:latin typeface="Google Sans Flex"/>
-              <a:ea typeface="Google Sans Flex"/>
-              <a:cs typeface="Google Sans Flex"/>
-              <a:sym typeface="Google Sans Flex"/>
-            </a:endParaRPr>
-          </a:p>
-          <a:p>
-            <a:pPr marL="457200" lvl="0" indent="-311150" algn="l" rtl="0">
-              <a:spcBef>
-                <a:spcPts val="0"/>
-              </a:spcBef>
-              <a:spcAft>
-                <a:spcPts val="0"/>
-              </a:spcAft>
-              <a:buSzPts val="1300"/>
-              <a:buFont typeface="Google Sans Flex"/>
-              <a:buChar char="●"/>
-            </a:pPr>
-            <a:endParaRPr lang="en-GB" sz="1300" dirty="0">
-              <a:latin typeface="Google Sans Flex"/>
-              <a:ea typeface="Google Sans Flex"/>
-              <a:cs typeface="Google Sans Flex"/>
-              <a:sym typeface="Google Sans Flex"/>
-            </a:endParaRPr>
-          </a:p>
-          <a:p>
-            <a:pPr marL="457200" lvl="0" indent="-311150" algn="l" rtl="0">
-              <a:spcBef>
-                <a:spcPts val="0"/>
-              </a:spcBef>
-              <a:spcAft>
-                <a:spcPts val="0"/>
-              </a:spcAft>
-              <a:buSzPts val="1300"/>
-              <a:buFont typeface="Google Sans Flex"/>
-              <a:buChar char="●"/>
-            </a:pPr>
-            <a:endParaRPr lang="en-GB" sz="1300" dirty="0">
-              <a:latin typeface="Google Sans Flex"/>
-              <a:ea typeface="Google Sans Flex"/>
-              <a:cs typeface="Google Sans Flex"/>
-              <a:sym typeface="Google Sans Flex"/>
-            </a:endParaRPr>
-          </a:p>
-          <a:p>
-            <a:pPr marL="457200" lvl="0" indent="-311150" algn="l" rtl="0">
-              <a:spcBef>
-                <a:spcPts val="0"/>
-              </a:spcBef>
-              <a:spcAft>
-                <a:spcPts val="0"/>
-              </a:spcAft>
-              <a:buSzPts val="1300"/>
-              <a:buFont typeface="Google Sans Flex"/>
-              <a:buChar char="●"/>
-            </a:pPr>
-            <a:endParaRPr lang="en-GB" sz="1300" dirty="0">
-              <a:latin typeface="Google Sans Flex"/>
-              <a:ea typeface="Google Sans Flex"/>
-              <a:cs typeface="Google Sans Flex"/>
-              <a:sym typeface="Google Sans Flex"/>
-            </a:endParaRPr>
-          </a:p>
-          <a:p>
-            <a:pPr marL="457200" lvl="0" indent="-311150" algn="l" rtl="0">
-              <a:spcBef>
-                <a:spcPts val="0"/>
-              </a:spcBef>
-              <a:spcAft>
-                <a:spcPts val="0"/>
-              </a:spcAft>
-              <a:buSzPts val="1300"/>
-              <a:buFont typeface="Google Sans Flex"/>
-              <a:buChar char="●"/>
-            </a:pPr>
-            <a:endParaRPr lang="en-GB" sz="1300" dirty="0">
-              <a:latin typeface="Google Sans Flex"/>
-              <a:ea typeface="Google Sans Flex"/>
-              <a:cs typeface="Google Sans Flex"/>
-              <a:sym typeface="Google Sans Flex"/>
-            </a:endParaRPr>
-          </a:p>
-          <a:p>
-            <a:pPr marL="457200" lvl="0" indent="-311150" algn="l" rtl="0">
-              <a:spcBef>
-                <a:spcPts val="0"/>
-              </a:spcBef>
-              <a:spcAft>
-                <a:spcPts val="0"/>
-              </a:spcAft>
-              <a:buSzPts val="1300"/>
-              <a:buFont typeface="Google Sans Flex"/>
-              <a:buChar char="●"/>
-            </a:pPr>
-            <a:endParaRPr lang="en-GB" sz="1300" dirty="0">
-              <a:latin typeface="Google Sans Flex"/>
-              <a:ea typeface="Google Sans Flex"/>
-              <a:cs typeface="Google Sans Flex"/>
-              <a:sym typeface="Google Sans Flex"/>
-            </a:endParaRPr>
-          </a:p>
-          <a:p>
-            <a:pPr marL="457200" lvl="0" indent="-311150" algn="l" rtl="0">
-              <a:spcBef>
-                <a:spcPts val="0"/>
-              </a:spcBef>
-              <a:spcAft>
-                <a:spcPts val="0"/>
-              </a:spcAft>
-              <a:buSzPts val="1300"/>
-              <a:buFont typeface="Google Sans Flex"/>
-              <a:buChar char="●"/>
-            </a:pPr>
-            <a:endParaRPr lang="en-GB" sz="1300" dirty="0">
-              <a:latin typeface="Google Sans Flex"/>
-              <a:ea typeface="Google Sans Flex"/>
-              <a:cs typeface="Google Sans Flex"/>
-              <a:sym typeface="Google Sans Flex"/>
-            </a:endParaRPr>
-          </a:p>
-          <a:p>
-            <a:pPr marL="457200" lvl="0" indent="-311150" algn="l" rtl="0">
-              <a:spcBef>
-                <a:spcPts val="0"/>
-              </a:spcBef>
-              <a:spcAft>
-                <a:spcPts val="0"/>
-              </a:spcAft>
-              <a:buSzPts val="1300"/>
-              <a:buFont typeface="Google Sans Flex"/>
-              <a:buChar char="●"/>
-            </a:pPr>
-            <a:endParaRPr lang="en-GB" sz="1300" dirty="0">
-              <a:latin typeface="Google Sans Flex"/>
-              <a:ea typeface="Google Sans Flex"/>
-              <a:cs typeface="Google Sans Flex"/>
-              <a:sym typeface="Google Sans Flex"/>
-            </a:endParaRPr>
-          </a:p>
-          <a:p>
-            <a:pPr marL="457200" lvl="0" indent="-311150" algn="l" rtl="0">
-              <a:spcBef>
-                <a:spcPts val="0"/>
-              </a:spcBef>
-              <a:spcAft>
-                <a:spcPts val="0"/>
-              </a:spcAft>
-              <a:buSzPts val="1300"/>
-              <a:buFont typeface="Google Sans Flex"/>
-              <a:buChar char="●"/>
-            </a:pPr>
-            <a:endParaRPr lang="en-GB" sz="1300" dirty="0">
-              <a:latin typeface="Google Sans Flex"/>
-              <a:ea typeface="Google Sans Flex"/>
-              <a:cs typeface="Google Sans Flex"/>
-              <a:sym typeface="Google Sans Flex"/>
-            </a:endParaRPr>
-          </a:p>
-          <a:p>
-            <a:pPr marL="0" lvl="0" indent="0" algn="l" rtl="0">
-              <a:spcBef>
-                <a:spcPts val="0"/>
-              </a:spcBef>
-              <a:spcAft>
-                <a:spcPts val="0"/>
-              </a:spcAft>
-              <a:buNone/>
-            </a:pPr>
-            <a:endParaRPr sz="1600" dirty="0">
-              <a:latin typeface="Google Sans Flex Medium"/>
-              <a:ea typeface="Google Sans Flex Medium"/>
-              <a:cs typeface="Google Sans Flex Medium"/>
-              <a:sym typeface="Google Sans Flex Medium"/>
-            </a:endParaRPr>
-          </a:p>
-          <a:p>
-            <a:pPr marL="0" lvl="0" indent="0" algn="l" rtl="0">
-              <a:spcBef>
-                <a:spcPts val="0"/>
-              </a:spcBef>
-              <a:spcAft>
-                <a:spcPts val="0"/>
-              </a:spcAft>
-              <a:buNone/>
-            </a:pPr>
-            <a:endParaRPr sz="1600" dirty="0">
-              <a:latin typeface="Google Sans Flex Medium"/>
-              <a:ea typeface="Google Sans Flex Medium"/>
-              <a:cs typeface="Google Sans Flex Medium"/>
-              <a:sym typeface="Google Sans Flex Medium"/>
-            </a:endParaRPr>
           </a:p>
         </p:txBody>
       </p:sp>
+      <p:graphicFrame>
+        <p:nvGraphicFramePr>
+          <p:cNvPr id="80" name="Table 79"/>
+          <p:cNvGraphicFramePr>
+            <a:graphicFrameLocks noGrp="1"/>
+          </p:cNvGraphicFramePr>
+          <p:nvPr/>
+        </p:nvGraphicFramePr>
+        <p:xfrm>
+          <a:off x="317602" y="3150000"/>
+          <a:ext cx="8508796" cy="1790000"/>
+        </p:xfrm>
+        <a:graphic>
+          <a:graphicData uri="http://schemas.openxmlformats.org/drawingml/2006/table">
+            <a:tbl>
+              <a:tblPr firstRow="1" bandRow="1">
+                <a:tableStyleId>{5C22544A-7EE6-4342-B048-85BDC9FD1C3A}</a:tableStyleId>
+              </a:tblPr>
+              <a:tblGrid>
+                <a:gridCol w="3200000"/>
+                <a:gridCol w="2400000"/>
+                <a:gridCol w="2908796"/>
+              </a:tblGrid>
+              <a:tr h="230000">
+                <a:tc>
+                  <a:txBody>
+                    <a:bodyPr wrap="square"/>
+                    <a:lstStyle/>
+                    <a:p>
+                      <a:pPr algn="l"/>
+                      <a:r>
+                        <a:rPr sz="850" b="1">
+                          <a:solidFill>
+                            <a:srgbClr val="FFFFFF"/>
+                          </a:solidFill>
+                          <a:latin typeface="Google Sans Flex Medium"/>
+                        </a:rPr>
+                        <a:t>Feature</a:t>
+                      </a:r>
+                    </a:p>
+                  </a:txBody>
+                  <a:tcPr marL="45700" marR="45700" marT="18000" marB="18000" anchor="ctr">
+                    <a:solidFill>
+                      <a:srgbClr val="1A1A1A"/>
+                    </a:solidFill>
+                  </a:tcPr>
+                </a:tc>
+                <a:tc>
+                  <a:txBody>
+                    <a:bodyPr wrap="square"/>
+                    <a:lstStyle/>
+                    <a:p>
+                      <a:pPr algn="l"/>
+                      <a:r>
+                        <a:rPr sz="850" b="1">
+                          <a:solidFill>
+                            <a:srgbClr val="FFFFFF"/>
+                          </a:solidFill>
+                          <a:latin typeface="Google Sans Flex Medium"/>
+                        </a:rPr>
+                        <a:t>Existing Solutions</a:t>
+                      </a:r>
+                    </a:p>
+                  </a:txBody>
+                  <a:tcPr marL="45700" marR="45700" marT="18000" marB="18000" anchor="ctr">
+                    <a:solidFill>
+                      <a:srgbClr val="1A1A1A"/>
+                    </a:solidFill>
+                  </a:tcPr>
+                </a:tc>
+                <a:tc>
+                  <a:txBody>
+                    <a:bodyPr wrap="square"/>
+                    <a:lstStyle/>
+                    <a:p>
+                      <a:pPr algn="l"/>
+                      <a:r>
+                        <a:rPr sz="850" b="1">
+                          <a:solidFill>
+                            <a:srgbClr val="FFFFFF"/>
+                          </a:solidFill>
+                          <a:latin typeface="Google Sans Flex Medium"/>
+                        </a:rPr>
+                        <a:t>TerraGrid</a:t>
+                      </a:r>
+                    </a:p>
+                  </a:txBody>
+                  <a:tcPr marL="45700" marR="45700" marT="18000" marB="18000" anchor="ctr">
+                    <a:solidFill>
+                      <a:srgbClr val="1A1A1A"/>
+                    </a:solidFill>
+                  </a:tcPr>
+                </a:tc>
+              </a:tr>
+              <a:tr h="260000">
+                <a:tc>
+                  <a:txBody>
+                    <a:bodyPr wrap="square"/>
+                    <a:lstStyle/>
+                    <a:p>
+                      <a:pPr algn="l"/>
+                      <a:r>
+                        <a:rPr sz="800" b="1">
+                          <a:solidFill>
+                            <a:srgbClr val="1A1A1A"/>
+                          </a:solidFill>
+                          <a:latin typeface="Google Sans Flex"/>
+                        </a:rPr>
+                        <a:t>Multi-phase workflow</a:t>
+                      </a:r>
+                    </a:p>
+                  </a:txBody>
+                  <a:tcPr marL="45700" marR="45700" marT="18000" marB="18000" anchor="ctr">
+                    <a:solidFill>
+                      <a:srgbClr val="FFFFFF"/>
+                    </a:solidFill>
+                  </a:tcPr>
+                </a:tc>
+                <a:tc>
+                  <a:txBody>
+                    <a:bodyPr wrap="square"/>
+                    <a:lstStyle/>
+                    <a:p>
+                      <a:pPr algn="l"/>
+                      <a:r>
+                        <a:rPr sz="800" b="0">
+                          <a:solidFill>
+                            <a:srgbClr val="C03030"/>
+                          </a:solidFill>
+                          <a:latin typeface="Google Sans Flex"/>
+                        </a:rPr>
+                        <a:t>No</a:t>
+                      </a:r>
+                    </a:p>
+                  </a:txBody>
+                  <a:tcPr marL="45700" marR="45700" marT="18000" marB="18000" anchor="ctr">
+                    <a:solidFill>
+                      <a:srgbClr val="FFFFFF"/>
+                    </a:solidFill>
+                  </a:tcPr>
+                </a:tc>
+                <a:tc>
+                  <a:txBody>
+                    <a:bodyPr wrap="square"/>
+                    <a:lstStyle/>
+                    <a:p>
+                      <a:pPr algn="l"/>
+                      <a:r>
+                        <a:rPr sz="800" b="0">
+                          <a:solidFill>
+                            <a:srgbClr val="1E8E3E"/>
+                          </a:solidFill>
+                          <a:latin typeface="Google Sans Flex"/>
+                        </a:rPr>
+                        <a:t>2 of 4 phases live, 2 roadmapped</a:t>
+                      </a:r>
+                    </a:p>
+                  </a:txBody>
+                  <a:tcPr marL="45700" marR="45700" marT="18000" marB="18000" anchor="ctr">
+                    <a:solidFill>
+                      <a:srgbClr val="FFFFFF"/>
+                    </a:solidFill>
+                  </a:tcPr>
+                </a:tc>
+              </a:tr>
+              <a:tr h="260000">
+                <a:tc>
+                  <a:txBody>
+                    <a:bodyPr wrap="square"/>
+                    <a:lstStyle/>
+                    <a:p>
+                      <a:pPr algn="l"/>
+                      <a:r>
+                        <a:rPr sz="800" b="1">
+                          <a:solidFill>
+                            <a:srgbClr val="1A1A1A"/>
+                          </a:solidFill>
+                          <a:latin typeface="Google Sans Flex"/>
+                        </a:rPr>
+                        <a:t>AI-drafted recommendations</a:t>
+                      </a:r>
+                    </a:p>
+                  </a:txBody>
+                  <a:tcPr marL="45700" marR="45700" marT="18000" marB="18000" anchor="ctr">
+                    <a:solidFill>
+                      <a:srgbClr val="F2F2F2"/>
+                    </a:solidFill>
+                  </a:tcPr>
+                </a:tc>
+                <a:tc>
+                  <a:txBody>
+                    <a:bodyPr wrap="square"/>
+                    <a:lstStyle/>
+                    <a:p>
+                      <a:pPr algn="l"/>
+                      <a:r>
+                        <a:rPr sz="800" b="0">
+                          <a:solidFill>
+                            <a:srgbClr val="C03030"/>
+                          </a:solidFill>
+                          <a:latin typeface="Google Sans Flex"/>
+                        </a:rPr>
+                        <a:t>No</a:t>
+                      </a:r>
+                    </a:p>
+                  </a:txBody>
+                  <a:tcPr marL="45700" marR="45700" marT="18000" marB="18000" anchor="ctr">
+                    <a:solidFill>
+                      <a:srgbClr val="F2F2F2"/>
+                    </a:solidFill>
+                  </a:tcPr>
+                </a:tc>
+                <a:tc>
+                  <a:txBody>
+                    <a:bodyPr wrap="square"/>
+                    <a:lstStyle/>
+                    <a:p>
+                      <a:pPr algn="l"/>
+                      <a:r>
+                        <a:rPr sz="800" b="0">
+                          <a:solidFill>
+                            <a:srgbClr val="1E8E3E"/>
+                          </a:solidFill>
+                          <a:latin typeface="Google Sans Flex"/>
+                        </a:rPr>
+                        <a:t>Yes</a:t>
+                      </a:r>
+                    </a:p>
+                  </a:txBody>
+                  <a:tcPr marL="45700" marR="45700" marT="18000" marB="18000" anchor="ctr">
+                    <a:solidFill>
+                      <a:srgbClr val="F2F2F2"/>
+                    </a:solidFill>
+                  </a:tcPr>
+                </a:tc>
+              </a:tr>
+              <a:tr h="260000">
+                <a:tc>
+                  <a:txBody>
+                    <a:bodyPr wrap="square"/>
+                    <a:lstStyle/>
+                    <a:p>
+                      <a:pPr algn="l"/>
+                      <a:r>
+                        <a:rPr sz="800" b="1">
+                          <a:solidFill>
+                            <a:srgbClr val="1A1A1A"/>
+                          </a:solidFill>
+                          <a:latin typeface="Google Sans Flex"/>
+                        </a:rPr>
+                        <a:t>Auditable AI input/output</a:t>
+                      </a:r>
+                    </a:p>
+                  </a:txBody>
+                  <a:tcPr marL="45700" marR="45700" marT="18000" marB="18000" anchor="ctr">
+                    <a:solidFill>
+                      <a:srgbClr val="FFFFFF"/>
+                    </a:solidFill>
+                  </a:tcPr>
+                </a:tc>
+                <a:tc>
+                  <a:txBody>
+                    <a:bodyPr wrap="square"/>
+                    <a:lstStyle/>
+                    <a:p>
+                      <a:pPr algn="l"/>
+                      <a:r>
+                        <a:rPr sz="800" b="0">
+                          <a:solidFill>
+                            <a:srgbClr val="C03030"/>
+                          </a:solidFill>
+                          <a:latin typeface="Google Sans Flex"/>
+                        </a:rPr>
+                        <a:t>No</a:t>
+                      </a:r>
+                    </a:p>
+                  </a:txBody>
+                  <a:tcPr marL="45700" marR="45700" marT="18000" marB="18000" anchor="ctr">
+                    <a:solidFill>
+                      <a:srgbClr val="FFFFFF"/>
+                    </a:solidFill>
+                  </a:tcPr>
+                </a:tc>
+                <a:tc>
+                  <a:txBody>
+                    <a:bodyPr wrap="square"/>
+                    <a:lstStyle/>
+                    <a:p>
+                      <a:pPr algn="l"/>
+                      <a:r>
+                        <a:rPr sz="800" b="0">
+                          <a:solidFill>
+                            <a:srgbClr val="1E8E3E"/>
+                          </a:solidFill>
+                          <a:latin typeface="Google Sans Flex"/>
+                        </a:rPr>
+                        <a:t>Yes</a:t>
+                      </a:r>
+                    </a:p>
+                  </a:txBody>
+                  <a:tcPr marL="45700" marR="45700" marT="18000" marB="18000" anchor="ctr">
+                    <a:solidFill>
+                      <a:srgbClr val="FFFFFF"/>
+                    </a:solidFill>
+                  </a:tcPr>
+                </a:tc>
+              </a:tr>
+              <a:tr h="260000">
+                <a:tc>
+                  <a:txBody>
+                    <a:bodyPr wrap="square"/>
+                    <a:lstStyle/>
+                    <a:p>
+                      <a:pPr algn="l"/>
+                      <a:r>
+                        <a:rPr sz="800" b="1">
+                          <a:solidFill>
+                            <a:srgbClr val="1A1A1A"/>
+                          </a:solidFill>
+                          <a:latin typeface="Google Sans Flex"/>
+                        </a:rPr>
+                        <a:t>Resilient to source failure</a:t>
+                      </a:r>
+                    </a:p>
+                  </a:txBody>
+                  <a:tcPr marL="45700" marR="45700" marT="18000" marB="18000" anchor="ctr">
+                    <a:solidFill>
+                      <a:srgbClr val="F2F2F2"/>
+                    </a:solidFill>
+                  </a:tcPr>
+                </a:tc>
+                <a:tc>
+                  <a:txBody>
+                    <a:bodyPr wrap="square"/>
+                    <a:lstStyle/>
+                    <a:p>
+                      <a:pPr algn="l"/>
+                      <a:r>
+                        <a:rPr sz="800" b="0">
+                          <a:solidFill>
+                            <a:srgbClr val="B86E00"/>
+                          </a:solidFill>
+                          <a:latin typeface="Google Sans Flex"/>
+                        </a:rPr>
+                        <a:t>Varies</a:t>
+                      </a:r>
+                    </a:p>
+                  </a:txBody>
+                  <a:tcPr marL="45700" marR="45700" marT="18000" marB="18000" anchor="ctr">
+                    <a:solidFill>
+                      <a:srgbClr val="F2F2F2"/>
+                    </a:solidFill>
+                  </a:tcPr>
+                </a:tc>
+                <a:tc>
+                  <a:txBody>
+                    <a:bodyPr wrap="square"/>
+                    <a:lstStyle/>
+                    <a:p>
+                      <a:pPr algn="l"/>
+                      <a:r>
+                        <a:rPr sz="800" b="0">
+                          <a:solidFill>
+                            <a:srgbClr val="1E8E3E"/>
+                          </a:solidFill>
+                          <a:latin typeface="Google Sans Flex"/>
+                        </a:rPr>
+                        <a:t>Yes</a:t>
+                      </a:r>
+                    </a:p>
+                  </a:txBody>
+                  <a:tcPr marL="45700" marR="45700" marT="18000" marB="18000" anchor="ctr">
+                    <a:solidFill>
+                      <a:srgbClr val="F2F2F2"/>
+                    </a:solidFill>
+                  </a:tcPr>
+                </a:tc>
+              </a:tr>
+              <a:tr h="260000">
+                <a:tc>
+                  <a:txBody>
+                    <a:bodyPr wrap="square"/>
+                    <a:lstStyle/>
+                    <a:p>
+                      <a:pPr algn="l"/>
+                      <a:r>
+                        <a:rPr sz="800" b="1">
+                          <a:solidFill>
+                            <a:srgbClr val="1A1A1A"/>
+                          </a:solidFill>
+                          <a:latin typeface="Google Sans Flex"/>
+                        </a:rPr>
+                        <a:t>Multi-channel alerting</a:t>
+                      </a:r>
+                    </a:p>
+                  </a:txBody>
+                  <a:tcPr marL="45700" marR="45700" marT="18000" marB="18000" anchor="ctr">
+                    <a:solidFill>
+                      <a:srgbClr val="FFFFFF"/>
+                    </a:solidFill>
+                  </a:tcPr>
+                </a:tc>
+                <a:tc>
+                  <a:txBody>
+                    <a:bodyPr wrap="square"/>
+                    <a:lstStyle/>
+                    <a:p>
+                      <a:pPr algn="l"/>
+                      <a:r>
+                        <a:rPr sz="800" b="0">
+                          <a:solidFill>
+                            <a:srgbClr val="B86E00"/>
+                          </a:solidFill>
+                          <a:latin typeface="Google Sans Flex"/>
+                        </a:rPr>
+                        <a:t>Varies</a:t>
+                      </a:r>
+                    </a:p>
+                  </a:txBody>
+                  <a:tcPr marL="45700" marR="45700" marT="18000" marB="18000" anchor="ctr">
+                    <a:solidFill>
+                      <a:srgbClr val="FFFFFF"/>
+                    </a:solidFill>
+                  </a:tcPr>
+                </a:tc>
+                <a:tc>
+                  <a:txBody>
+                    <a:bodyPr wrap="square"/>
+                    <a:lstStyle/>
+                    <a:p>
+                      <a:pPr algn="l"/>
+                      <a:r>
+                        <a:rPr sz="800" b="0">
+                          <a:solidFill>
+                            <a:srgbClr val="1E8E3E"/>
+                          </a:solidFill>
+                          <a:latin typeface="Google Sans Flex"/>
+                        </a:rPr>
+                        <a:t>WhatsApp + Email</a:t>
+                      </a:r>
+                    </a:p>
+                  </a:txBody>
+                  <a:tcPr marL="45700" marR="45700" marT="18000" marB="18000" anchor="ctr">
+                    <a:solidFill>
+                      <a:srgbClr val="FFFFFF"/>
+                    </a:solidFill>
+                  </a:tcPr>
+                </a:tc>
+              </a:tr>
+              <a:tr h="260000">
+                <a:tc>
+                  <a:txBody>
+                    <a:bodyPr wrap="square"/>
+                    <a:lstStyle/>
+                    <a:p>
+                      <a:pPr algn="l"/>
+                      <a:r>
+                        <a:rPr sz="800" b="1">
+                          <a:solidFill>
+                            <a:srgbClr val="1A1A1A"/>
+                          </a:solidFill>
+                          <a:latin typeface="Google Sans Flex"/>
+                        </a:rPr>
+                        <a:t>Google Cloud AI native</a:t>
+                      </a:r>
+                    </a:p>
+                  </a:txBody>
+                  <a:tcPr marL="45700" marR="45700" marT="18000" marB="18000" anchor="ctr">
+                    <a:solidFill>
+                      <a:srgbClr val="F2F2F2"/>
+                    </a:solidFill>
+                  </a:tcPr>
+                </a:tc>
+                <a:tc>
+                  <a:txBody>
+                    <a:bodyPr wrap="square"/>
+                    <a:lstStyle/>
+                    <a:p>
+                      <a:pPr algn="l"/>
+                      <a:r>
+                        <a:rPr sz="800" b="0">
+                          <a:solidFill>
+                            <a:srgbClr val="C03030"/>
+                          </a:solidFill>
+                          <a:latin typeface="Google Sans Flex"/>
+                        </a:rPr>
+                        <a:t>No</a:t>
+                      </a:r>
+                    </a:p>
+                  </a:txBody>
+                  <a:tcPr marL="45700" marR="45700" marT="18000" marB="18000" anchor="ctr">
+                    <a:solidFill>
+                      <a:srgbClr val="F2F2F2"/>
+                    </a:solidFill>
+                  </a:tcPr>
+                </a:tc>
+                <a:tc>
+                  <a:txBody>
+                    <a:bodyPr wrap="square"/>
+                    <a:lstStyle/>
+                    <a:p>
+                      <a:pPr algn="l"/>
+                      <a:r>
+                        <a:rPr sz="800" b="0">
+                          <a:solidFill>
+                            <a:srgbClr val="1E8E3E"/>
+                          </a:solidFill>
+                          <a:latin typeface="Google Sans Flex"/>
+                        </a:rPr>
+                        <a:t>Yes</a:t>
+                      </a:r>
+                    </a:p>
+                  </a:txBody>
+                  <a:tcPr marL="45700" marR="45700" marT="18000" marB="18000" anchor="ctr">
+                    <a:solidFill>
+                      <a:srgbClr val="F2F2F2"/>
+                    </a:solidFill>
+                  </a:tcPr>
+                </a:tc>
+              </a:tr>
+            </a:tbl>
+          </a:graphicData>
+        </a:graphic>
+      </p:graphicFrame>
     </p:spTree>
     <p:extLst>
       <p:ext uri="{BB962C8B-B14F-4D97-AF65-F5344CB8AC3E}">

--- a/docs/PPT/TERRAGRID _ AI Builder Cup.pptx
+++ b/docs/PPT/TERRAGRID _ AI Builder Cup.pptx
@@ -30,26 +30,19 @@
   <p:notesSz cx="6858000" cy="9144000"/>
   <p:embeddedFontLst>
     <p:embeddedFont>
-      <p:font typeface="Consolas" panose="020B0609020204030204" pitchFamily="49" charset="0"/>
+      <p:font typeface="Google Sans Flex" panose="020B0604020202020204" charset="0"/>
       <p:regular r:id="rId20"/>
       <p:bold r:id="rId21"/>
-      <p:italic r:id="rId22"/>
-      <p:boldItalic r:id="rId23"/>
-    </p:embeddedFont>
-    <p:embeddedFont>
-      <p:font typeface="Google Sans Flex" panose="020B0604020202020204" charset="0"/>
-      <p:regular r:id="rId24"/>
-      <p:bold r:id="rId25"/>
     </p:embeddedFont>
     <p:embeddedFont>
       <p:font typeface="Google Sans Flex Medium" panose="020B0604020202020204" charset="0"/>
-      <p:regular r:id="rId26"/>
-      <p:bold r:id="rId27"/>
+      <p:regular r:id="rId22"/>
+      <p:bold r:id="rId23"/>
     </p:embeddedFont>
     <p:embeddedFont>
       <p:font typeface="Google Sans Flex SemiBold" panose="020B0604020202020204" charset="0"/>
-      <p:regular r:id="rId28"/>
-      <p:bold r:id="rId29"/>
+      <p:regular r:id="rId24"/>
+      <p:bold r:id="rId25"/>
     </p:embeddedFont>
   </p:embeddedFontLst>
   <p:defaultTextStyle>
@@ -9664,7 +9657,7 @@
         <p:spPr>
           <a:xfrm>
             <a:off x="317602" y="578917"/>
-            <a:ext cx="8943000" cy="2050000"/>
+            <a:ext cx="8943000" cy="1385019"/>
           </a:xfrm>
           <a:prstGeom prst="rect">
             <a:avLst/>
@@ -9691,7 +9684,7 @@
               <a:buNone/>
             </a:pPr>
             <a:r>
-              <a:rPr sz="1300" b="0" i="0">
+              <a:rPr sz="1300" b="0" i="0" dirty="0">
                 <a:solidFill>
                   <a:srgbClr val="1A1A1A"/>
                 </a:solidFill>
@@ -9716,7 +9709,7 @@
               </a:spcAft>
             </a:pPr>
             <a:r>
-              <a:rPr sz="1050" b="1" i="0">
+              <a:rPr sz="1050" b="1" i="0" dirty="0">
                 <a:solidFill>
                   <a:srgbClr val="1A1A1A"/>
                 </a:solidFill>
@@ -9735,7 +9728,7 @@
               </a:spcAft>
             </a:pPr>
             <a:r>
-              <a:rPr sz="900" b="0" i="0">
+              <a:rPr sz="900" b="0" i="0" dirty="0">
                 <a:solidFill>
                   <a:srgbClr val="1A1A1A"/>
                 </a:solidFill>
@@ -9754,7 +9747,7 @@
               </a:spcAft>
             </a:pPr>
             <a:r>
-              <a:rPr sz="900" b="0" i="0">
+              <a:rPr sz="900" b="0" i="0" dirty="0">
                 <a:solidFill>
                   <a:srgbClr val="1A1A1A"/>
                 </a:solidFill>
@@ -9773,7 +9766,7 @@
               </a:spcAft>
             </a:pPr>
             <a:r>
-              <a:rPr sz="900" b="0" i="0">
+              <a:rPr sz="900" b="0" i="0" dirty="0">
                 <a:solidFill>
                   <a:srgbClr val="1A1A1A"/>
                 </a:solidFill>
@@ -9792,7 +9785,7 @@
               </a:spcAft>
             </a:pPr>
             <a:r>
-              <a:rPr sz="900" b="0" i="0">
+              <a:rPr sz="900" b="0" i="0" dirty="0">
                 <a:solidFill>
                   <a:srgbClr val="1A1A1A"/>
                 </a:solidFill>
@@ -9822,14 +9815,32 @@
                 <a:tableStyleId>{5C22544A-7EE6-4342-B048-85BDC9FD1C3A}</a:tableStyleId>
               </a:tblPr>
               <a:tblGrid>
-                <a:gridCol w="1500000"/>
-                <a:gridCol w="3300000"/>
-                <a:gridCol w="3708796"/>
+                <a:gridCol w="1500000">
+                  <a:extLst>
+                    <a:ext uri="{9D8B030D-6E8A-4147-A177-3AD203B41FA5}">
+                      <a16:colId xmlns:a16="http://schemas.microsoft.com/office/drawing/2014/main" val="20000"/>
+                    </a:ext>
+                  </a:extLst>
+                </a:gridCol>
+                <a:gridCol w="3300000">
+                  <a:extLst>
+                    <a:ext uri="{9D8B030D-6E8A-4147-A177-3AD203B41FA5}">
+                      <a16:colId xmlns:a16="http://schemas.microsoft.com/office/drawing/2014/main" val="20001"/>
+                    </a:ext>
+                  </a:extLst>
+                </a:gridCol>
+                <a:gridCol w="3708796">
+                  <a:extLst>
+                    <a:ext uri="{9D8B030D-6E8A-4147-A177-3AD203B41FA5}">
+                      <a16:colId xmlns:a16="http://schemas.microsoft.com/office/drawing/2014/main" val="20002"/>
+                    </a:ext>
+                  </a:extLst>
+                </a:gridCol>
               </a:tblGrid>
               <a:tr h="260000">
                 <a:tc>
                   <a:txBody>
-                    <a:bodyPr wrap="square"/>
+                    <a:bodyPr/>
                     <a:lstStyle/>
                     <a:p>
                       <a:pPr algn="l"/>
@@ -9852,7 +9863,7 @@
                 </a:tc>
                 <a:tc>
                   <a:txBody>
-                    <a:bodyPr wrap="square"/>
+                    <a:bodyPr/>
                     <a:lstStyle/>
                     <a:p>
                       <a:pPr algn="l"/>
@@ -9875,7 +9886,7 @@
                 </a:tc>
                 <a:tc>
                   <a:txBody>
-                    <a:bodyPr wrap="square"/>
+                    <a:bodyPr/>
                     <a:lstStyle/>
                     <a:p>
                       <a:pPr algn="l"/>
@@ -9896,11 +9907,16 @@
                     </a:solidFill>
                   </a:tcPr>
                 </a:tc>
+                <a:extLst>
+                  <a:ext uri="{0D108BD9-81ED-4DB2-BD59-A6C34878D82A}">
+                    <a16:rowId xmlns:a16="http://schemas.microsoft.com/office/drawing/2014/main" val="10000"/>
+                  </a:ext>
+                </a:extLst>
               </a:tr>
               <a:tr h="315000">
                 <a:tc>
                   <a:txBody>
-                    <a:bodyPr wrap="square"/>
+                    <a:bodyPr/>
                     <a:lstStyle/>
                     <a:p>
                       <a:pPr algn="l"/>
@@ -9923,7 +9939,7 @@
                 </a:tc>
                 <a:tc>
                   <a:txBody>
-                    <a:bodyPr wrap="square"/>
+                    <a:bodyPr/>
                     <a:lstStyle/>
                     <a:p>
                       <a:pPr algn="l"/>
@@ -9946,7 +9962,7 @@
                 </a:tc>
                 <a:tc>
                   <a:txBody>
-                    <a:bodyPr wrap="square"/>
+                    <a:bodyPr/>
                     <a:lstStyle/>
                     <a:p>
                       <a:pPr algn="l"/>
@@ -9967,11 +9983,16 @@
                     </a:solidFill>
                   </a:tcPr>
                 </a:tc>
+                <a:extLst>
+                  <a:ext uri="{0D108BD9-81ED-4DB2-BD59-A6C34878D82A}">
+                    <a16:rowId xmlns:a16="http://schemas.microsoft.com/office/drawing/2014/main" val="10001"/>
+                  </a:ext>
+                </a:extLst>
               </a:tr>
               <a:tr h="315000">
                 <a:tc>
                   <a:txBody>
-                    <a:bodyPr wrap="square"/>
+                    <a:bodyPr/>
                     <a:lstStyle/>
                     <a:p>
                       <a:pPr algn="l"/>
@@ -9994,7 +10015,7 @@
                 </a:tc>
                 <a:tc>
                   <a:txBody>
-                    <a:bodyPr wrap="square"/>
+                    <a:bodyPr/>
                     <a:lstStyle/>
                     <a:p>
                       <a:pPr algn="l"/>
@@ -10017,7 +10038,7 @@
                 </a:tc>
                 <a:tc>
                   <a:txBody>
-                    <a:bodyPr wrap="square"/>
+                    <a:bodyPr/>
                     <a:lstStyle/>
                     <a:p>
                       <a:pPr algn="l"/>
@@ -10038,11 +10059,16 @@
                     </a:solidFill>
                   </a:tcPr>
                 </a:tc>
+                <a:extLst>
+                  <a:ext uri="{0D108BD9-81ED-4DB2-BD59-A6C34878D82A}">
+                    <a16:rowId xmlns:a16="http://schemas.microsoft.com/office/drawing/2014/main" val="10002"/>
+                  </a:ext>
+                </a:extLst>
               </a:tr>
               <a:tr h="315000">
                 <a:tc>
                   <a:txBody>
-                    <a:bodyPr wrap="square"/>
+                    <a:bodyPr/>
                     <a:lstStyle/>
                     <a:p>
                       <a:pPr algn="l"/>
@@ -10065,7 +10091,7 @@
                 </a:tc>
                 <a:tc>
                   <a:txBody>
-                    <a:bodyPr wrap="square"/>
+                    <a:bodyPr/>
                     <a:lstStyle/>
                     <a:p>
                       <a:pPr algn="l"/>
@@ -10088,7 +10114,7 @@
                 </a:tc>
                 <a:tc>
                   <a:txBody>
-                    <a:bodyPr wrap="square"/>
+                    <a:bodyPr/>
                     <a:lstStyle/>
                     <a:p>
                       <a:pPr algn="l"/>
@@ -10109,11 +10135,16 @@
                     </a:solidFill>
                   </a:tcPr>
                 </a:tc>
+                <a:extLst>
+                  <a:ext uri="{0D108BD9-81ED-4DB2-BD59-A6C34878D82A}">
+                    <a16:rowId xmlns:a16="http://schemas.microsoft.com/office/drawing/2014/main" val="10003"/>
+                  </a:ext>
+                </a:extLst>
               </a:tr>
               <a:tr h="315000">
                 <a:tc>
                   <a:txBody>
-                    <a:bodyPr wrap="square"/>
+                    <a:bodyPr/>
                     <a:lstStyle/>
                     <a:p>
                       <a:pPr algn="l"/>
@@ -10136,7 +10167,7 @@
                 </a:tc>
                 <a:tc>
                   <a:txBody>
-                    <a:bodyPr wrap="square"/>
+                    <a:bodyPr/>
                     <a:lstStyle/>
                     <a:p>
                       <a:pPr algn="l"/>
@@ -10159,7 +10190,7 @@
                 </a:tc>
                 <a:tc>
                   <a:txBody>
-                    <a:bodyPr wrap="square"/>
+                    <a:bodyPr/>
                     <a:lstStyle/>
                     <a:p>
                       <a:pPr algn="l"/>
@@ -10180,11 +10211,16 @@
                     </a:solidFill>
                   </a:tcPr>
                 </a:tc>
+                <a:extLst>
+                  <a:ext uri="{0D108BD9-81ED-4DB2-BD59-A6C34878D82A}">
+                    <a16:rowId xmlns:a16="http://schemas.microsoft.com/office/drawing/2014/main" val="10004"/>
+                  </a:ext>
+                </a:extLst>
               </a:tr>
               <a:tr h="315000">
                 <a:tc>
                   <a:txBody>
-                    <a:bodyPr wrap="square"/>
+                    <a:bodyPr/>
                     <a:lstStyle/>
                     <a:p>
                       <a:pPr algn="l"/>
@@ -10207,7 +10243,7 @@
                 </a:tc>
                 <a:tc>
                   <a:txBody>
-                    <a:bodyPr wrap="square"/>
+                    <a:bodyPr/>
                     <a:lstStyle/>
                     <a:p>
                       <a:pPr algn="l"/>
@@ -10230,7 +10266,7 @@
                 </a:tc>
                 <a:tc>
                   <a:txBody>
-                    <a:bodyPr wrap="square"/>
+                    <a:bodyPr/>
                     <a:lstStyle/>
                     <a:p>
                       <a:pPr algn="l"/>
@@ -10251,11 +10287,16 @@
                     </a:solidFill>
                   </a:tcPr>
                 </a:tc>
+                <a:extLst>
+                  <a:ext uri="{0D108BD9-81ED-4DB2-BD59-A6C34878D82A}">
+                    <a16:rowId xmlns:a16="http://schemas.microsoft.com/office/drawing/2014/main" val="10005"/>
+                  </a:ext>
+                </a:extLst>
               </a:tr>
               <a:tr h="315000">
                 <a:tc>
                   <a:txBody>
-                    <a:bodyPr wrap="square"/>
+                    <a:bodyPr/>
                     <a:lstStyle/>
                     <a:p>
                       <a:pPr algn="l"/>
@@ -10278,7 +10319,7 @@
                 </a:tc>
                 <a:tc>
                   <a:txBody>
-                    <a:bodyPr wrap="square"/>
+                    <a:bodyPr/>
                     <a:lstStyle/>
                     <a:p>
                       <a:pPr algn="l"/>
@@ -10301,7 +10342,7 @@
                 </a:tc>
                 <a:tc>
                   <a:txBody>
-                    <a:bodyPr wrap="square"/>
+                    <a:bodyPr/>
                     <a:lstStyle/>
                     <a:p>
                       <a:pPr algn="l"/>
@@ -10322,6 +10363,11 @@
                     </a:solidFill>
                   </a:tcPr>
                 </a:tc>
+                <a:extLst>
+                  <a:ext uri="{0D108BD9-81ED-4DB2-BD59-A6C34878D82A}">
+                    <a16:rowId xmlns:a16="http://schemas.microsoft.com/office/drawing/2014/main" val="10006"/>
+                  </a:ext>
+                </a:extLst>
               </a:tr>
             </a:tbl>
           </a:graphicData>
@@ -11235,14 +11281,32 @@
                 <a:tableStyleId>{5C22544A-7EE6-4342-B048-85BDC9FD1C3A}</a:tableStyleId>
               </a:tblPr>
               <a:tblGrid>
-                <a:gridCol w="3200000"/>
-                <a:gridCol w="2400000"/>
-                <a:gridCol w="2908796"/>
+                <a:gridCol w="3200000">
+                  <a:extLst>
+                    <a:ext uri="{9D8B030D-6E8A-4147-A177-3AD203B41FA5}">
+                      <a16:colId xmlns:a16="http://schemas.microsoft.com/office/drawing/2014/main" val="20000"/>
+                    </a:ext>
+                  </a:extLst>
+                </a:gridCol>
+                <a:gridCol w="2400000">
+                  <a:extLst>
+                    <a:ext uri="{9D8B030D-6E8A-4147-A177-3AD203B41FA5}">
+                      <a16:colId xmlns:a16="http://schemas.microsoft.com/office/drawing/2014/main" val="20001"/>
+                    </a:ext>
+                  </a:extLst>
+                </a:gridCol>
+                <a:gridCol w="2908796">
+                  <a:extLst>
+                    <a:ext uri="{9D8B030D-6E8A-4147-A177-3AD203B41FA5}">
+                      <a16:colId xmlns:a16="http://schemas.microsoft.com/office/drawing/2014/main" val="20002"/>
+                    </a:ext>
+                  </a:extLst>
+                </a:gridCol>
               </a:tblGrid>
               <a:tr h="230000">
                 <a:tc>
                   <a:txBody>
-                    <a:bodyPr wrap="square"/>
+                    <a:bodyPr/>
                     <a:lstStyle/>
                     <a:p>
                       <a:pPr algn="l"/>
@@ -11265,7 +11329,7 @@
                 </a:tc>
                 <a:tc>
                   <a:txBody>
-                    <a:bodyPr wrap="square"/>
+                    <a:bodyPr/>
                     <a:lstStyle/>
                     <a:p>
                       <a:pPr algn="l"/>
@@ -11288,7 +11352,7 @@
                 </a:tc>
                 <a:tc>
                   <a:txBody>
-                    <a:bodyPr wrap="square"/>
+                    <a:bodyPr/>
                     <a:lstStyle/>
                     <a:p>
                       <a:pPr algn="l"/>
@@ -11309,11 +11373,16 @@
                     </a:solidFill>
                   </a:tcPr>
                 </a:tc>
+                <a:extLst>
+                  <a:ext uri="{0D108BD9-81ED-4DB2-BD59-A6C34878D82A}">
+                    <a16:rowId xmlns:a16="http://schemas.microsoft.com/office/drawing/2014/main" val="10000"/>
+                  </a:ext>
+                </a:extLst>
               </a:tr>
               <a:tr h="260000">
                 <a:tc>
                   <a:txBody>
-                    <a:bodyPr wrap="square"/>
+                    <a:bodyPr/>
                     <a:lstStyle/>
                     <a:p>
                       <a:pPr algn="l"/>
@@ -11336,7 +11405,7 @@
                 </a:tc>
                 <a:tc>
                   <a:txBody>
-                    <a:bodyPr wrap="square"/>
+                    <a:bodyPr/>
                     <a:lstStyle/>
                     <a:p>
                       <a:pPr algn="l"/>
@@ -11359,7 +11428,7 @@
                 </a:tc>
                 <a:tc>
                   <a:txBody>
-                    <a:bodyPr wrap="square"/>
+                    <a:bodyPr/>
                     <a:lstStyle/>
                     <a:p>
                       <a:pPr algn="l"/>
@@ -11380,11 +11449,16 @@
                     </a:solidFill>
                   </a:tcPr>
                 </a:tc>
+                <a:extLst>
+                  <a:ext uri="{0D108BD9-81ED-4DB2-BD59-A6C34878D82A}">
+                    <a16:rowId xmlns:a16="http://schemas.microsoft.com/office/drawing/2014/main" val="10001"/>
+                  </a:ext>
+                </a:extLst>
               </a:tr>
               <a:tr h="260000">
                 <a:tc>
                   <a:txBody>
-                    <a:bodyPr wrap="square"/>
+                    <a:bodyPr/>
                     <a:lstStyle/>
                     <a:p>
                       <a:pPr algn="l"/>
@@ -11407,7 +11481,7 @@
                 </a:tc>
                 <a:tc>
                   <a:txBody>
-                    <a:bodyPr wrap="square"/>
+                    <a:bodyPr/>
                     <a:lstStyle/>
                     <a:p>
                       <a:pPr algn="l"/>
@@ -11430,7 +11504,7 @@
                 </a:tc>
                 <a:tc>
                   <a:txBody>
-                    <a:bodyPr wrap="square"/>
+                    <a:bodyPr/>
                     <a:lstStyle/>
                     <a:p>
                       <a:pPr algn="l"/>
@@ -11451,11 +11525,16 @@
                     </a:solidFill>
                   </a:tcPr>
                 </a:tc>
+                <a:extLst>
+                  <a:ext uri="{0D108BD9-81ED-4DB2-BD59-A6C34878D82A}">
+                    <a16:rowId xmlns:a16="http://schemas.microsoft.com/office/drawing/2014/main" val="10002"/>
+                  </a:ext>
+                </a:extLst>
               </a:tr>
               <a:tr h="260000">
                 <a:tc>
                   <a:txBody>
-                    <a:bodyPr wrap="square"/>
+                    <a:bodyPr/>
                     <a:lstStyle/>
                     <a:p>
                       <a:pPr algn="l"/>
@@ -11478,7 +11557,7 @@
                 </a:tc>
                 <a:tc>
                   <a:txBody>
-                    <a:bodyPr wrap="square"/>
+                    <a:bodyPr/>
                     <a:lstStyle/>
                     <a:p>
                       <a:pPr algn="l"/>
@@ -11501,7 +11580,7 @@
                 </a:tc>
                 <a:tc>
                   <a:txBody>
-                    <a:bodyPr wrap="square"/>
+                    <a:bodyPr/>
                     <a:lstStyle/>
                     <a:p>
                       <a:pPr algn="l"/>
@@ -11522,11 +11601,16 @@
                     </a:solidFill>
                   </a:tcPr>
                 </a:tc>
+                <a:extLst>
+                  <a:ext uri="{0D108BD9-81ED-4DB2-BD59-A6C34878D82A}">
+                    <a16:rowId xmlns:a16="http://schemas.microsoft.com/office/drawing/2014/main" val="10003"/>
+                  </a:ext>
+                </a:extLst>
               </a:tr>
               <a:tr h="260000">
                 <a:tc>
                   <a:txBody>
-                    <a:bodyPr wrap="square"/>
+                    <a:bodyPr/>
                     <a:lstStyle/>
                     <a:p>
                       <a:pPr algn="l"/>
@@ -11549,7 +11633,7 @@
                 </a:tc>
                 <a:tc>
                   <a:txBody>
-                    <a:bodyPr wrap="square"/>
+                    <a:bodyPr/>
                     <a:lstStyle/>
                     <a:p>
                       <a:pPr algn="l"/>
@@ -11572,7 +11656,7 @@
                 </a:tc>
                 <a:tc>
                   <a:txBody>
-                    <a:bodyPr wrap="square"/>
+                    <a:bodyPr/>
                     <a:lstStyle/>
                     <a:p>
                       <a:pPr algn="l"/>
@@ -11593,11 +11677,16 @@
                     </a:solidFill>
                   </a:tcPr>
                 </a:tc>
+                <a:extLst>
+                  <a:ext uri="{0D108BD9-81ED-4DB2-BD59-A6C34878D82A}">
+                    <a16:rowId xmlns:a16="http://schemas.microsoft.com/office/drawing/2014/main" val="10004"/>
+                  </a:ext>
+                </a:extLst>
               </a:tr>
               <a:tr h="260000">
                 <a:tc>
                   <a:txBody>
-                    <a:bodyPr wrap="square"/>
+                    <a:bodyPr/>
                     <a:lstStyle/>
                     <a:p>
                       <a:pPr algn="l"/>
@@ -11620,7 +11709,7 @@
                 </a:tc>
                 <a:tc>
                   <a:txBody>
-                    <a:bodyPr wrap="square"/>
+                    <a:bodyPr/>
                     <a:lstStyle/>
                     <a:p>
                       <a:pPr algn="l"/>
@@ -11643,7 +11732,7 @@
                 </a:tc>
                 <a:tc>
                   <a:txBody>
-                    <a:bodyPr wrap="square"/>
+                    <a:bodyPr/>
                     <a:lstStyle/>
                     <a:p>
                       <a:pPr algn="l"/>
@@ -11664,11 +11753,16 @@
                     </a:solidFill>
                   </a:tcPr>
                 </a:tc>
+                <a:extLst>
+                  <a:ext uri="{0D108BD9-81ED-4DB2-BD59-A6C34878D82A}">
+                    <a16:rowId xmlns:a16="http://schemas.microsoft.com/office/drawing/2014/main" val="10005"/>
+                  </a:ext>
+                </a:extLst>
               </a:tr>
               <a:tr h="260000">
                 <a:tc>
                   <a:txBody>
-                    <a:bodyPr wrap="square"/>
+                    <a:bodyPr/>
                     <a:lstStyle/>
                     <a:p>
                       <a:pPr algn="l"/>
@@ -11691,7 +11785,7 @@
                 </a:tc>
                 <a:tc>
                   <a:txBody>
-                    <a:bodyPr wrap="square"/>
+                    <a:bodyPr/>
                     <a:lstStyle/>
                     <a:p>
                       <a:pPr algn="l"/>
@@ -11714,7 +11808,7 @@
                 </a:tc>
                 <a:tc>
                   <a:txBody>
-                    <a:bodyPr wrap="square"/>
+                    <a:bodyPr/>
                     <a:lstStyle/>
                     <a:p>
                       <a:pPr algn="l"/>
@@ -11735,6 +11829,11 @@
                     </a:solidFill>
                   </a:tcPr>
                 </a:tc>
+                <a:extLst>
+                  <a:ext uri="{0D108BD9-81ED-4DB2-BD59-A6C34878D82A}">
+                    <a16:rowId xmlns:a16="http://schemas.microsoft.com/office/drawing/2014/main" val="10006"/>
+                  </a:ext>
+                </a:extLst>
               </a:tr>
             </a:tbl>
           </a:graphicData>
@@ -11948,7 +12047,7 @@
               </a:spcAft>
             </a:pPr>
             <a:r>
-              <a:rPr sz="1100" b="1" i="0">
+              <a:rPr sz="1100" b="1" i="0" dirty="0">
                 <a:solidFill>
                   <a:srgbClr val="1E8E3E"/>
                 </a:solidFill>
@@ -11967,7 +12066,7 @@
               </a:spcAft>
             </a:pPr>
             <a:r>
-              <a:rPr sz="900" b="0" i="0">
+              <a:rPr sz="900" b="0" i="0" dirty="0">
                 <a:solidFill>
                   <a:srgbClr val="1A1A1A"/>
                 </a:solidFill>
@@ -11986,7 +12085,7 @@
               </a:spcAft>
             </a:pPr>
             <a:r>
-              <a:rPr sz="900" b="0" i="0">
+              <a:rPr sz="900" b="0" i="0" dirty="0">
                 <a:solidFill>
                   <a:srgbClr val="1A1A1A"/>
                 </a:solidFill>
@@ -12005,7 +12104,7 @@
               </a:spcAft>
             </a:pPr>
             <a:r>
-              <a:rPr sz="900" b="0" i="0">
+              <a:rPr sz="900" b="0" i="0" dirty="0">
                 <a:solidFill>
                   <a:srgbClr val="1A1A1A"/>
                 </a:solidFill>
@@ -12024,7 +12123,7 @@
               </a:spcAft>
             </a:pPr>
             <a:r>
-              <a:rPr sz="900" b="0" i="0">
+              <a:rPr sz="900" b="0" i="0" dirty="0">
                 <a:solidFill>
                   <a:srgbClr val="1A1A1A"/>
                 </a:solidFill>
@@ -12043,7 +12142,7 @@
               </a:spcAft>
             </a:pPr>
             <a:r>
-              <a:rPr sz="900" b="0" i="0">
+              <a:rPr sz="900" b="0" i="0" dirty="0">
                 <a:solidFill>
                   <a:srgbClr val="1A1A1A"/>
                 </a:solidFill>
@@ -12062,7 +12161,7 @@
               </a:spcAft>
             </a:pPr>
             <a:r>
-              <a:rPr sz="900" b="0" i="0">
+              <a:rPr sz="900" b="0" i="0" dirty="0">
                 <a:solidFill>
                   <a:srgbClr val="1A1A1A"/>
                 </a:solidFill>
@@ -12081,7 +12180,7 @@
               </a:spcAft>
             </a:pPr>
             <a:r>
-              <a:rPr sz="900" b="0" i="0">
+              <a:rPr sz="900" b="0" i="0" dirty="0">
                 <a:solidFill>
                   <a:srgbClr val="1A1A1A"/>
                 </a:solidFill>
@@ -12100,7 +12199,7 @@
               </a:spcAft>
             </a:pPr>
             <a:r>
-              <a:rPr sz="1100" b="1" i="0">
+              <a:rPr sz="1100" b="1" i="0" dirty="0">
                 <a:solidFill>
                   <a:srgbClr val="1E8E3E"/>
                 </a:solidFill>
@@ -12119,13 +12218,31 @@
               </a:spcAft>
             </a:pPr>
             <a:r>
-              <a:rPr sz="900" b="0" i="0">
+              <a:rPr sz="900" b="0" i="0" dirty="0">
                 <a:solidFill>
                   <a:srgbClr val="1A1A1A"/>
                 </a:solidFill>
                 <a:latin typeface="Google Sans Flex"/>
               </a:rPr>
-              <a:t>•  7-day risk escalation forecast across 8 monitored cities (OpenWeatherMap)</a:t>
+              <a:t>•  7-day risk escalation forecast across 8 monitored cities (</a:t>
+            </a:r>
+            <a:r>
+              <a:rPr sz="900" b="0" i="0" dirty="0" err="1">
+                <a:solidFill>
+                  <a:srgbClr val="1A1A1A"/>
+                </a:solidFill>
+                <a:latin typeface="Google Sans Flex"/>
+              </a:rPr>
+              <a:t>OpenWeatherMap</a:t>
+            </a:r>
+            <a:r>
+              <a:rPr sz="900" b="0" i="0" dirty="0">
+                <a:solidFill>
+                  <a:srgbClr val="1A1A1A"/>
+                </a:solidFill>
+                <a:latin typeface="Google Sans Flex"/>
+              </a:rPr>
+              <a:t>)</a:t>
             </a:r>
           </a:p>
           <a:p>
@@ -12138,7 +12255,7 @@
               </a:spcAft>
             </a:pPr>
             <a:r>
-              <a:rPr sz="900" b="0" i="0">
+              <a:rPr sz="900" b="0" i="0" dirty="0">
                 <a:solidFill>
                   <a:srgbClr val="1A1A1A"/>
                 </a:solidFill>
@@ -12157,7 +12274,7 @@
               </a:spcAft>
             </a:pPr>
             <a:r>
-              <a:rPr sz="900" b="0" i="0">
+              <a:rPr sz="900" b="0" i="0" dirty="0">
                 <a:solidFill>
                   <a:srgbClr val="1A1A1A"/>
                 </a:solidFill>
@@ -12176,7 +12293,7 @@
               </a:spcAft>
             </a:pPr>
             <a:r>
-              <a:rPr sz="900" b="0" i="0">
+              <a:rPr sz="900" b="0" i="0" dirty="0">
                 <a:solidFill>
                   <a:srgbClr val="1A1A1A"/>
                 </a:solidFill>
@@ -12195,7 +12312,7 @@
               </a:spcAft>
             </a:pPr>
             <a:r>
-              <a:rPr sz="900" b="0" i="0">
+              <a:rPr sz="900" b="0" i="0" dirty="0">
                 <a:solidFill>
                   <a:srgbClr val="1A1A1A"/>
                 </a:solidFill>
@@ -12214,7 +12331,7 @@
               </a:spcAft>
             </a:pPr>
             <a:r>
-              <a:rPr sz="1100" b="1" i="0">
+              <a:rPr sz="1100" b="1" i="0" dirty="0">
                 <a:solidFill>
                   <a:srgbClr val="1857B8"/>
                 </a:solidFill>
@@ -12233,7 +12350,7 @@
               </a:spcAft>
             </a:pPr>
             <a:r>
-              <a:rPr sz="900" b="0" i="0">
+              <a:rPr sz="900" b="0" i="0" dirty="0">
                 <a:solidFill>
                   <a:srgbClr val="1A1A1A"/>
                 </a:solidFill>
@@ -12252,7 +12369,7 @@
               </a:spcAft>
             </a:pPr>
             <a:r>
-              <a:rPr sz="900" b="0" i="0">
+              <a:rPr sz="900" b="0" i="0" dirty="0">
                 <a:solidFill>
                   <a:srgbClr val="1A1A1A"/>
                 </a:solidFill>
@@ -12271,7 +12388,7 @@
               </a:spcAft>
             </a:pPr>
             <a:r>
-              <a:rPr sz="1100" b="1" i="0">
+              <a:rPr sz="1100" b="1" i="0" dirty="0">
                 <a:solidFill>
                   <a:srgbClr val="B86E00"/>
                 </a:solidFill>
@@ -12290,7 +12407,7 @@
               </a:spcAft>
             </a:pPr>
             <a:r>
-              <a:rPr sz="900" b="0" i="0">
+              <a:rPr sz="900" b="0" i="0" dirty="0">
                 <a:solidFill>
                   <a:srgbClr val="1A1A1A"/>
                 </a:solidFill>
@@ -12309,7 +12426,7 @@
               </a:spcAft>
             </a:pPr>
             <a:r>
-              <a:rPr sz="900" b="0" i="0">
+              <a:rPr sz="900" b="0" i="0" dirty="0">
                 <a:solidFill>
                   <a:srgbClr val="1A1A1A"/>
                 </a:solidFill>
@@ -12492,102 +12609,36 @@
           </a:p>
         </p:txBody>
       </p:sp>
-      <p:sp>
-        <p:nvSpPr>
-          <p:cNvPr id="96" name="TextBox 95"/>
-          <p:cNvSpPr txBox="1"/>
+      <p:pic>
+        <p:nvPicPr>
+          <p:cNvPr id="3" name="Picture 2">
+            <a:extLst>
+              <a:ext uri="{FF2B5EF4-FFF2-40B4-BE49-F238E27FC236}">
+                <a16:creationId xmlns:a16="http://schemas.microsoft.com/office/drawing/2014/main" id="{6DEE5C0A-4F6A-2008-2DA9-A7FB65808716}"/>
+              </a:ext>
+            </a:extLst>
+          </p:cNvPr>
+          <p:cNvPicPr>
+            <a:picLocks noChangeAspect="1"/>
+          </p:cNvPicPr>
           <p:nvPr/>
-        </p:nvSpPr>
+        </p:nvPicPr>
+        <p:blipFill>
+          <a:blip r:embed="rId5"/>
+          <a:stretch>
+            <a:fillRect/>
+          </a:stretch>
+        </p:blipFill>
         <p:spPr>
           <a:xfrm>
-            <a:off x="265350" y="1150000"/>
-            <a:ext cx="8613300" cy="3920000"/>
+            <a:off x="404950" y="217868"/>
+            <a:ext cx="7922622" cy="5143500"/>
           </a:xfrm>
           <a:prstGeom prst="rect">
             <a:avLst/>
           </a:prstGeom>
-          <a:noFill/>
         </p:spPr>
-        <p:txBody>
-          <a:bodyPr wrap="square">
-            <a:spAutoFit/>
-          </a:bodyPr>
-          <a:lstStyle/>
-          <a:p>
-            <a:pPr>
-              <a:spcBef>
-                <a:spcPts val="200"/>
-              </a:spcBef>
-              <a:spcAft>
-                <a:spcPts val="300"/>
-              </a:spcAft>
-            </a:pPr>
-            <a:r>
-              <a:rPr sz="1100" b="1" i="0">
-                <a:solidFill>
-                  <a:srgbClr val="1A1A1A"/>
-                </a:solidFill>
-                <a:latin typeface="Google Sans Flex Medium"/>
-              </a:rPr>
-              <a:t>How an incident moves through TerraGrid today</a:t>
-            </a:r>
-          </a:p>
-          <a:p>
-            <a:pPr>
-              <a:lnSpc>
-                <a:spcPct val="88000"/>
-              </a:lnSpc>
-              <a:spcBef>
-                <a:spcPts val="100"/>
-              </a:spcBef>
-            </a:pPr>
-            <a:r>
-              <a:rPr sz="680" b="0" i="0">
-                <a:solidFill>
-                  <a:srgbClr val="1A1A1A"/>
-                </a:solidFill>
-                <a:latin typeface="Courier New"/>
-              </a:rPr>
-              <a:t>┌────────────────────────┐   ┌───────────────────────────────┐   ┌──────────────────────────┐
-│ EXTERNAL SOURCES         │─▶│ 1. DATA INGESTION                │─▶│ Incident record (PostgreSQL)│
-│ NASA EONET·USGS·NOAA·    │  │ Async poll + OSM infra lookup    │  └──────────────────────────┘
-│ GDACS·OpenWeatherMap     │  └───────────────────────────────┘
-└────────────────────────┘
-┌───────────────────────────────┐   Risk Escalation Timeline, Preparedness
-│ 2. PREPARE PHASE                 │─▶ Checklist, Agency Alert drafts
-│ 7-day forecast + AI Decision     │
-│ Support (Gemini 2.5 Flash)       │
-└───────────────────────────────┘
-┌───────────────────────────────┐   Dispatch recommendation, evac route
-│ 3. RESPONSE PHASE                 │─▶ (OSRM), WhatsApp / Email alert sent
-│ Live dashboard + evac routing     │
-│ + satellite cross-validation      │
-└───────────────────────────────┘
-┌───────────────────────────────┐   Raw API + Gemini response saved to
-│ 4. AUDIT TRAIL (every step)       │─▶ logs/ as a JSON envelope, folder
-│ data_logger.py cross-check        │   per source
-└───────────────────────────────┘
-</a:t>
-            </a:r>
-          </a:p>
-          <a:p>
-            <a:pPr>
-              <a:spcBef>
-                <a:spcPts val="800"/>
-              </a:spcBef>
-            </a:pPr>
-            <a:r>
-              <a:rPr sz="900" b="0" i="1">
-                <a:solidFill>
-                  <a:srgbClr val="B86E00"/>
-                </a:solidFill>
-                <a:latin typeface="Google Sans Flex"/>
-              </a:rPr>
-              <a:t>PREDICT (6-month early warning) and RECOVER (post-event damage assessment) are the next two phases on the roadmap — not part of this flow yet.</a:t>
-            </a:r>
-          </a:p>
-        </p:txBody>
-      </p:sp>
+      </p:pic>
     </p:spTree>
   </p:cSld>
   <p:clrMapOvr>
@@ -12888,7 +12939,7 @@
         </p:nvSpPr>
         <p:spPr>
           <a:xfrm>
-            <a:off x="265350" y="663825"/>
+            <a:off x="0" y="543420"/>
             <a:ext cx="8943000" cy="561900"/>
           </a:xfrm>
           <a:prstGeom prst="rect">
@@ -12915,7 +12966,7 @@
               <a:buNone/>
             </a:pPr>
             <a:r>
-              <a:rPr lang="en-GB" sz="1600">
+              <a:rPr lang="en-GB" sz="1600" dirty="0">
                 <a:latin typeface="Google Sans Flex Medium"/>
                 <a:ea typeface="Google Sans Flex Medium"/>
                 <a:cs typeface="Google Sans Flex Medium"/>
@@ -12923,7 +12974,7 @@
               </a:rPr>
               <a:t>Architecture diagram of the proposed solution</a:t>
             </a:r>
-            <a:endParaRPr sz="1600">
+            <a:endParaRPr sz="1600" dirty="0">
               <a:latin typeface="Google Sans Flex Medium"/>
               <a:ea typeface="Google Sans Flex Medium"/>
               <a:cs typeface="Google Sans Flex Medium"/>
@@ -12932,98 +12983,36 @@
           </a:p>
         </p:txBody>
       </p:sp>
-      <p:sp>
-        <p:nvSpPr>
-          <p:cNvPr id="112" name="TextBox 111"/>
-          <p:cNvSpPr txBox="1"/>
+      <p:pic>
+        <p:nvPicPr>
+          <p:cNvPr id="3" name="Picture 2">
+            <a:extLst>
+              <a:ext uri="{FF2B5EF4-FFF2-40B4-BE49-F238E27FC236}">
+                <a16:creationId xmlns:a16="http://schemas.microsoft.com/office/drawing/2014/main" id="{EFD26A76-2690-D696-EE09-2A0841D25CDD}"/>
+              </a:ext>
+            </a:extLst>
+          </p:cNvPr>
+          <p:cNvPicPr>
+            <a:picLocks noChangeAspect="1"/>
+          </p:cNvPicPr>
           <p:nvPr/>
-        </p:nvSpPr>
+        </p:nvPicPr>
+        <p:blipFill>
+          <a:blip r:embed="rId5"/>
+          <a:stretch>
+            <a:fillRect/>
+          </a:stretch>
+        </p:blipFill>
         <p:spPr>
           <a:xfrm>
-            <a:off x="265350" y="1180000"/>
-            <a:ext cx="8613300" cy="3860000"/>
+            <a:off x="0" y="1038496"/>
+            <a:ext cx="9144000" cy="3819253"/>
           </a:xfrm>
           <a:prstGeom prst="rect">
             <a:avLst/>
           </a:prstGeom>
-          <a:noFill/>
         </p:spPr>
-        <p:txBody>
-          <a:bodyPr wrap="square">
-            <a:spAutoFit/>
-          </a:bodyPr>
-          <a:lstStyle/>
-          <a:p>
-            <a:pPr>
-              <a:spcBef>
-                <a:spcPts val="200"/>
-              </a:spcBef>
-              <a:spcAft>
-                <a:spcPts val="400"/>
-              </a:spcAft>
-            </a:pPr>
-            <a:r>
-              <a:rPr sz="1100" b="1" i="0">
-                <a:solidFill>
-                  <a:srgbClr val="1A1A1A"/>
-                </a:solidFill>
-                <a:latin typeface="Google Sans Flex Medium"/>
-              </a:rPr>
-              <a:t>System Architecture (verified against the running codebase)</a:t>
-            </a:r>
-          </a:p>
-          <a:p>
-            <a:pPr>
-              <a:lnSpc>
-                <a:spcPct val="92000"/>
-              </a:lnSpc>
-              <a:spcBef>
-                <a:spcPts val="400"/>
-              </a:spcBef>
-            </a:pPr>
-            <a:r>
-              <a:rPr sz="700" b="0" i="0">
-                <a:solidFill>
-                  <a:srgbClr val="1A1A1A"/>
-                </a:solidFill>
-                <a:latin typeface="Courier New"/>
-              </a:rPr>
-              <a:t>┌───────────────────────┐   ┌─────────────────────────────┐   ┌───────────────────────────┐
-│   DATA SOURCES          │   │  BACKEND — FastAPI, Python 3.13 │   │ FRONTEND — Vue 3 + Vite     │
-│   NASA EONET · USGS     │──▶│  PostgreSQL (SQLAlchemy+Alembic)│──▶│ Pinia · Vue Router          │
-│   NOAA · GDACS           │   │  APScheduler background polling │   │ Mapbox GL live map          │
-│   OpenWeatherMap         │   │  WebSocket server (/ws/dashboard)│   │ WebSocket live updates      │
-│   OpenStreetMap/Overpass │   └───────────────┬──────────────────┘   │ i18n · mobile-responsive    │
-│   OSRM routing           │                   ▼                      └───────────────────────────┘
-└───────────────────────┘   ┌─────────────────────────────┐
-                              │  AI LAYER                      │   ┌───────────────────────────┐
-                              │  Vertex AI — Gemini 2.5 Flash  │──▶│  ALERTING                   │
-                              │  Google Earth Engine(Sentinel-1)│   │  WhatsApp (WAHA)            │
-                              │  Decision lineage / audit trail │   │  Email (Resend)              │
-                              └─────────────────────────────┘   └───────────────────────────┘
-TRACEABILITY: every external API call and every Gemini response is written to
-logs/data/&lt;source&gt;/ as a timestamped JSON envelope — a cross-check trail, not just a log line.
-</a:t>
-            </a:r>
-          </a:p>
-          <a:p>
-            <a:pPr>
-              <a:spcBef>
-                <a:spcPts val="600"/>
-              </a:spcBef>
-            </a:pPr>
-            <a:r>
-              <a:rPr sz="900" b="0" i="1">
-                <a:solidFill>
-                  <a:srgbClr val="5F5F5F"/>
-                </a:solidFill>
-                <a:latin typeface="Google Sans Flex"/>
-              </a:rPr>
-              <a:t>Deployment target: Google Cloud Run (backend) with Docker + GitHub Actions CI. Not yet deployed to production at submission time.</a:t>
-            </a:r>
-          </a:p>
-        </p:txBody>
-      </p:sp>
+      </p:pic>
     </p:spTree>
   </p:cSld>
   <p:clrMapOvr>

--- a/docs/PPT/TERRAGRID _ AI Builder Cup.pptx
+++ b/docs/PPT/TERRAGRID _ AI Builder Cup.pptx
@@ -11,7 +11,7 @@
     <p:sldId id="256" r:id="rId2"/>
     <p:sldId id="258" r:id="rId3"/>
     <p:sldId id="259" r:id="rId4"/>
-    <p:sldId id="272" r:id="rId5"/>
+    <p:sldId id="275" r:id="rId5"/>
     <p:sldId id="273" r:id="rId6"/>
     <p:sldId id="260" r:id="rId7"/>
     <p:sldId id="261" r:id="rId8"/>
@@ -857,7 +857,7 @@
   <p:cSld>
     <p:spTree>
       <p:nvGrpSpPr>
-        <p:cNvPr id="1" name="Shape 112"/>
+        <p:cNvPr id="1" name="Shape 120"/>
         <p:cNvGrpSpPr/>
         <p:nvPr/>
       </p:nvGrpSpPr>
@@ -871,7 +871,7 @@
       </p:grpSpPr>
       <p:sp>
         <p:nvSpPr>
-          <p:cNvPr id="113" name="Google Shape;113;g3fb085bff3c_0_36:notes"/>
+          <p:cNvPr id="121" name="Google Shape;121;g3fb085bff3c_0_41:notes"/>
           <p:cNvSpPr>
             <a:spLocks noGrp="1" noRot="1" noChangeAspect="1"/>
           </p:cNvSpPr>
@@ -919,7 +919,7 @@
       </p:sp>
       <p:sp>
         <p:nvSpPr>
-          <p:cNvPr id="114" name="Google Shape;114;g3fb085bff3c_0_36:notes"/>
+          <p:cNvPr id="122" name="Google Shape;122;g3fb085bff3c_0_41:notes"/>
           <p:cNvSpPr txBox="1">
             <a:spLocks noGrp="1"/>
           </p:cNvSpPr>
@@ -964,117 +964,6 @@
 </file>
 
 <file path=ppt/notesSlides/notesSlide11.xml><?xml version="1.0" encoding="utf-8"?>
-<p:notes xmlns:a="http://schemas.openxmlformats.org/drawingml/2006/main" xmlns:r="http://schemas.openxmlformats.org/officeDocument/2006/relationships" xmlns:p="http://schemas.openxmlformats.org/presentationml/2006/main" showMasterSp="0" showMasterPhAnim="0">
-  <p:cSld>
-    <p:spTree>
-      <p:nvGrpSpPr>
-        <p:cNvPr id="1" name="Shape 120"/>
-        <p:cNvGrpSpPr/>
-        <p:nvPr/>
-      </p:nvGrpSpPr>
-      <p:grpSpPr>
-        <a:xfrm>
-          <a:off x="0" y="0"/>
-          <a:ext cx="0" cy="0"/>
-          <a:chOff x="0" y="0"/>
-          <a:chExt cx="0" cy="0"/>
-        </a:xfrm>
-      </p:grpSpPr>
-      <p:sp>
-        <p:nvSpPr>
-          <p:cNvPr id="121" name="Google Shape;121;g3fb085bff3c_0_41:notes"/>
-          <p:cNvSpPr>
-            <a:spLocks noGrp="1" noRot="1" noChangeAspect="1"/>
-          </p:cNvSpPr>
-          <p:nvPr>
-            <p:ph type="sldImg" idx="2"/>
-          </p:nvPr>
-        </p:nvSpPr>
-        <p:spPr>
-          <a:xfrm>
-            <a:off x="381000" y="685800"/>
-            <a:ext cx="6096000" cy="3429000"/>
-          </a:xfrm>
-          <a:custGeom>
-            <a:avLst/>
-            <a:gdLst/>
-            <a:ahLst/>
-            <a:cxnLst/>
-            <a:rect l="l" t="t" r="r" b="b"/>
-            <a:pathLst>
-              <a:path w="120000" h="120000" extrusionOk="0">
-                <a:moveTo>
-                  <a:pt x="0" y="0"/>
-                </a:moveTo>
-                <a:lnTo>
-                  <a:pt x="120000" y="0"/>
-                </a:lnTo>
-                <a:lnTo>
-                  <a:pt x="120000" y="120000"/>
-                </a:lnTo>
-                <a:lnTo>
-                  <a:pt x="0" y="120000"/>
-                </a:lnTo>
-                <a:close/>
-              </a:path>
-            </a:pathLst>
-          </a:custGeom>
-        </p:spPr>
-        <p:txBody>
-          <a:bodyPr/>
-          <a:lstStyle/>
-          <a:p>
-            <a:endParaRPr lang="en-IN"/>
-          </a:p>
-        </p:txBody>
-      </p:sp>
-      <p:sp>
-        <p:nvSpPr>
-          <p:cNvPr id="122" name="Google Shape;122;g3fb085bff3c_0_41:notes"/>
-          <p:cNvSpPr txBox="1">
-            <a:spLocks noGrp="1"/>
-          </p:cNvSpPr>
-          <p:nvPr>
-            <p:ph type="body" idx="1"/>
-          </p:nvPr>
-        </p:nvSpPr>
-        <p:spPr>
-          <a:xfrm>
-            <a:off x="685800" y="4343400"/>
-            <a:ext cx="5486400" cy="4114800"/>
-          </a:xfrm>
-          <a:prstGeom prst="rect">
-            <a:avLst/>
-          </a:prstGeom>
-        </p:spPr>
-        <p:txBody>
-          <a:bodyPr spcFirstLastPara="1" wrap="square" lIns="91425" tIns="91425" rIns="91425" bIns="91425" anchor="t" anchorCtr="0">
-            <a:noAutofit/>
-          </a:bodyPr>
-          <a:lstStyle/>
-          <a:p>
-            <a:pPr marL="0" lvl="0" indent="0" algn="l" rtl="0">
-              <a:spcBef>
-                <a:spcPts val="0"/>
-              </a:spcBef>
-              <a:spcAft>
-                <a:spcPts val="0"/>
-              </a:spcAft>
-              <a:buNone/>
-            </a:pPr>
-            <a:endParaRPr/>
-          </a:p>
-        </p:txBody>
-      </p:sp>
-    </p:spTree>
-  </p:cSld>
-  <p:clrMapOvr>
-    <a:masterClrMapping/>
-  </p:clrMapOvr>
-</p:notes>
-</file>
-
-<file path=ppt/notesSlides/notesSlide12.xml><?xml version="1.0" encoding="utf-8"?>
 <p:notes xmlns:a="http://schemas.openxmlformats.org/drawingml/2006/main" xmlns:r="http://schemas.openxmlformats.org/officeDocument/2006/relationships" xmlns:p="http://schemas.openxmlformats.org/presentationml/2006/main" showMasterSp="0" showMasterPhAnim="0">
   <p:cSld>
     <p:spTree>
@@ -1185,7 +1074,7 @@
 </p:notes>
 </file>
 
-<file path=ppt/notesSlides/notesSlide13.xml><?xml version="1.0" encoding="utf-8"?>
+<file path=ppt/notesSlides/notesSlide12.xml><?xml version="1.0" encoding="utf-8"?>
 <p:notes xmlns:a="http://schemas.openxmlformats.org/drawingml/2006/main" xmlns:r="http://schemas.openxmlformats.org/officeDocument/2006/relationships" xmlns:p="http://schemas.openxmlformats.org/presentationml/2006/main" showMasterSp="0" showMasterPhAnim="0">
   <p:cSld>
     <p:spTree>
@@ -1296,7 +1185,7 @@
 </p:notes>
 </file>
 
-<file path=ppt/notesSlides/notesSlide14.xml><?xml version="1.0" encoding="utf-8"?>
+<file path=ppt/notesSlides/notesSlide13.xml><?xml version="1.0" encoding="utf-8"?>
 <p:notes xmlns:a="http://schemas.openxmlformats.org/drawingml/2006/main" xmlns:r="http://schemas.openxmlformats.org/officeDocument/2006/relationships" xmlns:p="http://schemas.openxmlformats.org/presentationml/2006/main" showMasterSp="0" showMasterPhAnim="0">
   <p:cSld>
     <p:spTree>
@@ -1407,7 +1296,7 @@
 </p:notes>
 </file>
 
-<file path=ppt/notesSlides/notesSlide15.xml><?xml version="1.0" encoding="utf-8"?>
+<file path=ppt/notesSlides/notesSlide14.xml><?xml version="1.0" encoding="utf-8"?>
 <p:notes xmlns:a="http://schemas.openxmlformats.org/drawingml/2006/main" xmlns:r="http://schemas.openxmlformats.org/officeDocument/2006/relationships" xmlns:p="http://schemas.openxmlformats.org/presentationml/2006/main" showMasterSp="0" showMasterPhAnim="0">
   <p:cSld>
     <p:spTree>
@@ -1518,7 +1407,7 @@
 </p:notes>
 </file>
 
-<file path=ppt/notesSlides/notesSlide16.xml><?xml version="1.0" encoding="utf-8"?>
+<file path=ppt/notesSlides/notesSlide15.xml><?xml version="1.0" encoding="utf-8"?>
 <p:notes xmlns:a="http://schemas.openxmlformats.org/drawingml/2006/main" xmlns:r="http://schemas.openxmlformats.org/officeDocument/2006/relationships" xmlns:p="http://schemas.openxmlformats.org/presentationml/2006/main" showMasterSp="0" showMasterPhAnim="0">
   <p:cSld>
     <p:spTree>
@@ -1629,7 +1518,7 @@
 </p:notes>
 </file>
 
-<file path=ppt/notesSlides/notesSlide17.xml><?xml version="1.0" encoding="utf-8"?>
+<file path=ppt/notesSlides/notesSlide16.xml><?xml version="1.0" encoding="utf-8"?>
 <p:notes xmlns:a="http://schemas.openxmlformats.org/drawingml/2006/main" xmlns:r="http://schemas.openxmlformats.org/officeDocument/2006/relationships" xmlns:p="http://schemas.openxmlformats.org/presentationml/2006/main" showMasterSp="0" showMasterPhAnim="0">
   <p:cSld>
     <p:spTree>
@@ -1963,140 +1852,6 @@
 </file>
 
 <file path=ppt/notesSlides/notesSlide4.xml><?xml version="1.0" encoding="utf-8"?>
-<p:notes xmlns:a="http://schemas.openxmlformats.org/drawingml/2006/main" xmlns:r="http://schemas.openxmlformats.org/officeDocument/2006/relationships" xmlns:p="http://schemas.openxmlformats.org/presentationml/2006/main" showMasterSp="0" showMasterPhAnim="0">
-  <p:cSld>
-    <p:spTree>
-      <p:nvGrpSpPr>
-        <p:cNvPr id="1" name="Shape 72">
-          <a:extLst>
-            <a:ext uri="{FF2B5EF4-FFF2-40B4-BE49-F238E27FC236}">
-              <a16:creationId xmlns:a16="http://schemas.microsoft.com/office/drawing/2014/main" id="{A942B96A-A5AD-87B3-2009-00E808C61F96}"/>
-            </a:ext>
-          </a:extLst>
-        </p:cNvPr>
-        <p:cNvGrpSpPr/>
-        <p:nvPr/>
-      </p:nvGrpSpPr>
-      <p:grpSpPr>
-        <a:xfrm>
-          <a:off x="0" y="0"/>
-          <a:ext cx="0" cy="0"/>
-          <a:chOff x="0" y="0"/>
-          <a:chExt cx="0" cy="0"/>
-        </a:xfrm>
-      </p:grpSpPr>
-      <p:sp>
-        <p:nvSpPr>
-          <p:cNvPr id="73" name="Google Shape;73;g3fb085bff3c_0_11:notes">
-            <a:extLst>
-              <a:ext uri="{FF2B5EF4-FFF2-40B4-BE49-F238E27FC236}">
-                <a16:creationId xmlns:a16="http://schemas.microsoft.com/office/drawing/2014/main" id="{994648C7-3EBA-4679-28EE-596E1138F165}"/>
-              </a:ext>
-            </a:extLst>
-          </p:cNvPr>
-          <p:cNvSpPr>
-            <a:spLocks noGrp="1" noRot="1" noChangeAspect="1"/>
-          </p:cNvSpPr>
-          <p:nvPr>
-            <p:ph type="sldImg" idx="2"/>
-          </p:nvPr>
-        </p:nvSpPr>
-        <p:spPr>
-          <a:xfrm>
-            <a:off x="381000" y="685800"/>
-            <a:ext cx="6096000" cy="3429000"/>
-          </a:xfrm>
-          <a:custGeom>
-            <a:avLst/>
-            <a:gdLst/>
-            <a:ahLst/>
-            <a:cxnLst/>
-            <a:rect l="l" t="t" r="r" b="b"/>
-            <a:pathLst>
-              <a:path w="120000" h="120000" extrusionOk="0">
-                <a:moveTo>
-                  <a:pt x="0" y="0"/>
-                </a:moveTo>
-                <a:lnTo>
-                  <a:pt x="120000" y="0"/>
-                </a:lnTo>
-                <a:lnTo>
-                  <a:pt x="120000" y="120000"/>
-                </a:lnTo>
-                <a:lnTo>
-                  <a:pt x="0" y="120000"/>
-                </a:lnTo>
-                <a:close/>
-              </a:path>
-            </a:pathLst>
-          </a:custGeom>
-        </p:spPr>
-        <p:txBody>
-          <a:bodyPr/>
-          <a:lstStyle/>
-          <a:p>
-            <a:endParaRPr lang="en-IN"/>
-          </a:p>
-        </p:txBody>
-      </p:sp>
-      <p:sp>
-        <p:nvSpPr>
-          <p:cNvPr id="74" name="Google Shape;74;g3fb085bff3c_0_11:notes">
-            <a:extLst>
-              <a:ext uri="{FF2B5EF4-FFF2-40B4-BE49-F238E27FC236}">
-                <a16:creationId xmlns:a16="http://schemas.microsoft.com/office/drawing/2014/main" id="{6E57A990-BFB6-3E80-2877-6ABCFBC547BF}"/>
-              </a:ext>
-            </a:extLst>
-          </p:cNvPr>
-          <p:cNvSpPr txBox="1">
-            <a:spLocks noGrp="1"/>
-          </p:cNvSpPr>
-          <p:nvPr>
-            <p:ph type="body" idx="1"/>
-          </p:nvPr>
-        </p:nvSpPr>
-        <p:spPr>
-          <a:xfrm>
-            <a:off x="685800" y="4343400"/>
-            <a:ext cx="5486400" cy="4114800"/>
-          </a:xfrm>
-          <a:prstGeom prst="rect">
-            <a:avLst/>
-          </a:prstGeom>
-        </p:spPr>
-        <p:txBody>
-          <a:bodyPr spcFirstLastPara="1" wrap="square" lIns="91425" tIns="91425" rIns="91425" bIns="91425" anchor="t" anchorCtr="0">
-            <a:noAutofit/>
-          </a:bodyPr>
-          <a:lstStyle/>
-          <a:p>
-            <a:pPr marL="0" lvl="0" indent="0" algn="l" rtl="0">
-              <a:spcBef>
-                <a:spcPts val="0"/>
-              </a:spcBef>
-              <a:spcAft>
-                <a:spcPts val="0"/>
-              </a:spcAft>
-              <a:buNone/>
-            </a:pPr>
-            <a:endParaRPr/>
-          </a:p>
-        </p:txBody>
-      </p:sp>
-    </p:spTree>
-    <p:extLst>
-      <p:ext uri="{BB962C8B-B14F-4D97-AF65-F5344CB8AC3E}">
-        <p14:creationId xmlns:p14="http://schemas.microsoft.com/office/powerpoint/2010/main" val="89022599"/>
-      </p:ext>
-    </p:extLst>
-  </p:cSld>
-  <p:clrMapOvr>
-    <a:masterClrMapping/>
-  </p:clrMapOvr>
-</p:notes>
-</file>
-
-<file path=ppt/notesSlides/notesSlide5.xml><?xml version="1.0" encoding="utf-8"?>
 <p:notes xmlns:a="http://schemas.openxmlformats.org/drawingml/2006/main" xmlns:r="http://schemas.openxmlformats.org/officeDocument/2006/relationships" xmlns:p="http://schemas.openxmlformats.org/presentationml/2006/main" showMasterSp="0" showMasterPhAnim="0">
   <p:cSld>
     <p:spTree>
@@ -2230,7 +1985,7 @@
 </p:notes>
 </file>
 
-<file path=ppt/notesSlides/notesSlide6.xml><?xml version="1.0" encoding="utf-8"?>
+<file path=ppt/notesSlides/notesSlide5.xml><?xml version="1.0" encoding="utf-8"?>
 <p:notes xmlns:a="http://schemas.openxmlformats.org/drawingml/2006/main" xmlns:r="http://schemas.openxmlformats.org/officeDocument/2006/relationships" xmlns:p="http://schemas.openxmlformats.org/presentationml/2006/main" showMasterSp="0" showMasterPhAnim="0">
   <p:cSld>
     <p:spTree>
@@ -2341,7 +2096,7 @@
 </p:notes>
 </file>
 
-<file path=ppt/notesSlides/notesSlide7.xml><?xml version="1.0" encoding="utf-8"?>
+<file path=ppt/notesSlides/notesSlide6.xml><?xml version="1.0" encoding="utf-8"?>
 <p:notes xmlns:a="http://schemas.openxmlformats.org/drawingml/2006/main" xmlns:r="http://schemas.openxmlformats.org/officeDocument/2006/relationships" xmlns:p="http://schemas.openxmlformats.org/presentationml/2006/main" showMasterSp="0" showMasterPhAnim="0">
   <p:cSld>
     <p:spTree>
@@ -2452,7 +2207,7 @@
 </p:notes>
 </file>
 
-<file path=ppt/notesSlides/notesSlide8.xml><?xml version="1.0" encoding="utf-8"?>
+<file path=ppt/notesSlides/notesSlide7.xml><?xml version="1.0" encoding="utf-8"?>
 <p:notes xmlns:a="http://schemas.openxmlformats.org/drawingml/2006/main" xmlns:r="http://schemas.openxmlformats.org/officeDocument/2006/relationships" xmlns:p="http://schemas.openxmlformats.org/presentationml/2006/main" showMasterSp="0" showMasterPhAnim="0">
   <p:cSld>
     <p:spTree>
@@ -2563,7 +2318,7 @@
 </p:notes>
 </file>
 
-<file path=ppt/notesSlides/notesSlide9.xml><?xml version="1.0" encoding="utf-8"?>
+<file path=ppt/notesSlides/notesSlide8.xml><?xml version="1.0" encoding="utf-8"?>
 <p:notes xmlns:a="http://schemas.openxmlformats.org/drawingml/2006/main" xmlns:r="http://schemas.openxmlformats.org/officeDocument/2006/relationships" xmlns:p="http://schemas.openxmlformats.org/presentationml/2006/main" showMasterSp="0" showMasterPhAnim="0">
   <p:cSld>
     <p:spTree>
@@ -2631,6 +2386,117 @@
       <p:sp>
         <p:nvSpPr>
           <p:cNvPr id="106" name="Google Shape;106;g3fb085bff3c_0_31:notes"/>
+          <p:cNvSpPr txBox="1">
+            <a:spLocks noGrp="1"/>
+          </p:cNvSpPr>
+          <p:nvPr>
+            <p:ph type="body" idx="1"/>
+          </p:nvPr>
+        </p:nvSpPr>
+        <p:spPr>
+          <a:xfrm>
+            <a:off x="685800" y="4343400"/>
+            <a:ext cx="5486400" cy="4114800"/>
+          </a:xfrm>
+          <a:prstGeom prst="rect">
+            <a:avLst/>
+          </a:prstGeom>
+        </p:spPr>
+        <p:txBody>
+          <a:bodyPr spcFirstLastPara="1" wrap="square" lIns="91425" tIns="91425" rIns="91425" bIns="91425" anchor="t" anchorCtr="0">
+            <a:noAutofit/>
+          </a:bodyPr>
+          <a:lstStyle/>
+          <a:p>
+            <a:pPr marL="0" lvl="0" indent="0" algn="l" rtl="0">
+              <a:spcBef>
+                <a:spcPts val="0"/>
+              </a:spcBef>
+              <a:spcAft>
+                <a:spcPts val="0"/>
+              </a:spcAft>
+              <a:buNone/>
+            </a:pPr>
+            <a:endParaRPr/>
+          </a:p>
+        </p:txBody>
+      </p:sp>
+    </p:spTree>
+  </p:cSld>
+  <p:clrMapOvr>
+    <a:masterClrMapping/>
+  </p:clrMapOvr>
+</p:notes>
+</file>
+
+<file path=ppt/notesSlides/notesSlide9.xml><?xml version="1.0" encoding="utf-8"?>
+<p:notes xmlns:a="http://schemas.openxmlformats.org/drawingml/2006/main" xmlns:r="http://schemas.openxmlformats.org/officeDocument/2006/relationships" xmlns:p="http://schemas.openxmlformats.org/presentationml/2006/main" showMasterSp="0" showMasterPhAnim="0">
+  <p:cSld>
+    <p:spTree>
+      <p:nvGrpSpPr>
+        <p:cNvPr id="1" name="Shape 112"/>
+        <p:cNvGrpSpPr/>
+        <p:nvPr/>
+      </p:nvGrpSpPr>
+      <p:grpSpPr>
+        <a:xfrm>
+          <a:off x="0" y="0"/>
+          <a:ext cx="0" cy="0"/>
+          <a:chOff x="0" y="0"/>
+          <a:chExt cx="0" cy="0"/>
+        </a:xfrm>
+      </p:grpSpPr>
+      <p:sp>
+        <p:nvSpPr>
+          <p:cNvPr id="113" name="Google Shape;113;g3fb085bff3c_0_36:notes"/>
+          <p:cNvSpPr>
+            <a:spLocks noGrp="1" noRot="1" noChangeAspect="1"/>
+          </p:cNvSpPr>
+          <p:nvPr>
+            <p:ph type="sldImg" idx="2"/>
+          </p:nvPr>
+        </p:nvSpPr>
+        <p:spPr>
+          <a:xfrm>
+            <a:off x="381000" y="685800"/>
+            <a:ext cx="6096000" cy="3429000"/>
+          </a:xfrm>
+          <a:custGeom>
+            <a:avLst/>
+            <a:gdLst/>
+            <a:ahLst/>
+            <a:cxnLst/>
+            <a:rect l="l" t="t" r="r" b="b"/>
+            <a:pathLst>
+              <a:path w="120000" h="120000" extrusionOk="0">
+                <a:moveTo>
+                  <a:pt x="0" y="0"/>
+                </a:moveTo>
+                <a:lnTo>
+                  <a:pt x="120000" y="0"/>
+                </a:lnTo>
+                <a:lnTo>
+                  <a:pt x="120000" y="120000"/>
+                </a:lnTo>
+                <a:lnTo>
+                  <a:pt x="0" y="120000"/>
+                </a:lnTo>
+                <a:close/>
+              </a:path>
+            </a:pathLst>
+          </a:custGeom>
+        </p:spPr>
+        <p:txBody>
+          <a:bodyPr/>
+          <a:lstStyle/>
+          <a:p>
+            <a:endParaRPr lang="en-IN"/>
+          </a:p>
+        </p:txBody>
+      </p:sp>
+      <p:sp>
+        <p:nvSpPr>
+          <p:cNvPr id="114" name="Google Shape;114;g3fb085bff3c_0_36:notes"/>
           <p:cNvSpPr txBox="1">
             <a:spLocks noGrp="1"/>
           </p:cNvSpPr>
@@ -9269,7 +9135,7 @@
         <p:spPr>
           <a:xfrm>
             <a:off x="311875" y="1395965"/>
-            <a:ext cx="7958547" cy="3200876"/>
+            <a:ext cx="7958547" cy="3377848"/>
           </a:xfrm>
           <a:prstGeom prst="rect">
             <a:avLst/>
@@ -9292,7 +9158,7 @@
               <a:buNone/>
             </a:pPr>
             <a:r>
-              <a:rPr sz="1150" b="1" i="0">
+              <a:rPr sz="1050" b="1" i="0" dirty="0">
                 <a:solidFill>
                   <a:srgbClr val="1A1A1A"/>
                 </a:solidFill>
@@ -9300,7 +9166,7 @@
               </a:rPr>
               <a:t>The Problem</a:t>
             </a:r>
-            <a:endParaRPr lang="en-IN" sz="1000" dirty="0"/>
+            <a:endParaRPr lang="en-IN" sz="1050" dirty="0"/>
           </a:p>
           <a:p>
             <a:pPr>
@@ -9312,7 +9178,7 @@
               </a:spcAft>
             </a:pPr>
             <a:r>
-              <a:rPr sz="1000" b="0" i="0">
+              <a:rPr sz="1050" b="0" i="0" dirty="0">
                 <a:solidFill>
                   <a:srgbClr val="1A1A1A"/>
                 </a:solidFill>
@@ -9331,7 +9197,7 @@
               </a:spcAft>
             </a:pPr>
             <a:r>
-              <a:rPr sz="1150" b="1" i="0">
+              <a:rPr sz="1050" b="1" i="0" dirty="0">
                 <a:solidFill>
                   <a:srgbClr val="1A1A1A"/>
                 </a:solidFill>
@@ -9350,7 +9216,7 @@
               </a:spcAft>
             </a:pPr>
             <a:r>
-              <a:rPr sz="1000" b="0" i="0">
+              <a:rPr sz="1050" b="0" i="0" dirty="0">
                 <a:solidFill>
                   <a:srgbClr val="1A1A1A"/>
                 </a:solidFill>
@@ -9369,25 +9235,16 @@
               </a:spcAft>
             </a:pPr>
             <a:r>
-              <a:rPr sz="1000" b="1" i="0">
+              <a:rPr sz="1050" b="1" i="0" dirty="0">
                 <a:solidFill>
                   <a:srgbClr val="1A1A1A"/>
                 </a:solidFill>
                 <a:latin typeface="Google Sans Flex"/>
               </a:rPr>
-              <a:t>1. PREPARE </a:t>
+              <a:t>1. PREPARE</a:t>
             </a:r>
             <a:r>
-              <a:rPr sz="900" b="0" i="1">
-                <a:solidFill>
-                  <a:srgbClr val="1E8E3E"/>
-                </a:solidFill>
-                <a:latin typeface="Google Sans Flex"/>
-              </a:rPr>
-              <a:t>(live in this prototype) </a:t>
-            </a:r>
-            <a:r>
-              <a:rPr sz="1000" b="0" i="0">
+              <a:rPr sz="1050" b="0" i="0" dirty="0">
                 <a:solidFill>
                   <a:srgbClr val="1A1A1A"/>
                 </a:solidFill>
@@ -9406,25 +9263,25 @@
               </a:spcAft>
             </a:pPr>
             <a:r>
-              <a:rPr sz="1000" b="1" i="0">
+              <a:rPr sz="1050" b="1" i="0" dirty="0">
                 <a:solidFill>
                   <a:srgbClr val="1A1A1A"/>
                 </a:solidFill>
                 <a:latin typeface="Google Sans Flex"/>
               </a:rPr>
-              <a:t>2. RESPONSE </a:t>
+              <a:t>2. RESPONSE</a:t>
             </a:r>
             <a:r>
-              <a:rPr sz="900" b="0" i="1">
+              <a:rPr lang="en-IN" sz="1050" b="1" i="0" dirty="0">
                 <a:solidFill>
-                  <a:srgbClr val="1E8E3E"/>
+                  <a:srgbClr val="1A1A1A"/>
                 </a:solidFill>
                 <a:latin typeface="Google Sans Flex"/>
               </a:rPr>
-              <a:t>(live in this prototype) </a:t>
+              <a:t> </a:t>
             </a:r>
             <a:r>
-              <a:rPr sz="1000" b="0" i="0">
+              <a:rPr sz="1050" b="0" i="0" dirty="0">
                 <a:solidFill>
                   <a:srgbClr val="1A1A1A"/>
                 </a:solidFill>
@@ -9443,25 +9300,16 @@
               </a:spcAft>
             </a:pPr>
             <a:r>
-              <a:rPr sz="1000" b="1" i="0">
+              <a:rPr sz="1050" b="1" i="0" dirty="0">
                 <a:solidFill>
                   <a:srgbClr val="1A1A1A"/>
                 </a:solidFill>
                 <a:latin typeface="Google Sans Flex"/>
               </a:rPr>
-              <a:t>3. PREDICT </a:t>
+              <a:t>3. PREDICT</a:t>
             </a:r>
             <a:r>
-              <a:rPr sz="900" b="0" i="1">
-                <a:solidFill>
-                  <a:srgbClr val="B86E00"/>
-                </a:solidFill>
-                <a:latin typeface="Google Sans Flex"/>
-              </a:rPr>
-              <a:t>(roadmap — next sprint) </a:t>
-            </a:r>
-            <a:r>
-              <a:rPr sz="1000" b="0" i="0">
+              <a:rPr sz="1050" b="0" i="0" dirty="0">
                 <a:solidFill>
                   <a:srgbClr val="1A1A1A"/>
                 </a:solidFill>
@@ -9480,25 +9328,25 @@
               </a:spcAft>
             </a:pPr>
             <a:r>
-              <a:rPr sz="1000" b="1" i="0">
+              <a:rPr sz="1050" b="1" i="0" dirty="0">
                 <a:solidFill>
                   <a:srgbClr val="1A1A1A"/>
                 </a:solidFill>
                 <a:latin typeface="Google Sans Flex"/>
               </a:rPr>
-              <a:t>4. RECOVER </a:t>
+              <a:t>4. RECOVER</a:t>
             </a:r>
             <a:r>
-              <a:rPr sz="900" b="0" i="1">
+              <a:rPr lang="en-IN" sz="1050" b="1" i="0" dirty="0">
                 <a:solidFill>
-                  <a:srgbClr val="B86E00"/>
+                  <a:srgbClr val="1A1A1A"/>
                 </a:solidFill>
                 <a:latin typeface="Google Sans Flex"/>
               </a:rPr>
-              <a:t>(roadmap) </a:t>
+              <a:t> </a:t>
             </a:r>
             <a:r>
-              <a:rPr sz="1000" b="0" i="0">
+              <a:rPr sz="1050" b="0" i="0" dirty="0">
                 <a:solidFill>
                   <a:srgbClr val="1A1A1A"/>
                 </a:solidFill>
@@ -9517,7 +9365,7 @@
               </a:spcAft>
             </a:pPr>
             <a:r>
-              <a:rPr sz="1000" b="0" i="0">
+              <a:rPr sz="1050" b="0" i="0" dirty="0">
                 <a:solidFill>
                   <a:srgbClr val="1A1A1A"/>
                 </a:solidFill>
@@ -9656,8 +9504,8 @@
         </p:nvSpPr>
         <p:spPr>
           <a:xfrm>
-            <a:off x="317602" y="578917"/>
-            <a:ext cx="8943000" cy="1385019"/>
+            <a:off x="-131152" y="450988"/>
+            <a:ext cx="8943000" cy="310018"/>
           </a:xfrm>
           <a:prstGeom prst="rect">
             <a:avLst/>
@@ -9699,101 +9547,6 @@
               <a:sym typeface="Google Sans Flex"/>
             </a:endParaRPr>
           </a:p>
-          <a:p>
-            <a:pPr>
-              <a:spcBef>
-                <a:spcPts val="500"/>
-              </a:spcBef>
-              <a:spcAft>
-                <a:spcPts val="100"/>
-              </a:spcAft>
-            </a:pPr>
-            <a:r>
-              <a:rPr sz="1050" b="1" i="0" dirty="0">
-                <a:solidFill>
-                  <a:srgbClr val="1A1A1A"/>
-                </a:solidFill>
-                <a:latin typeface="Google Sans Flex Medium"/>
-              </a:rPr>
-              <a:t>Current Market</a:t>
-            </a:r>
-          </a:p>
-          <a:p>
-            <a:pPr>
-              <a:spcBef>
-                <a:spcPts val="0"/>
-              </a:spcBef>
-              <a:spcAft>
-                <a:spcPts val="0"/>
-              </a:spcAft>
-            </a:pPr>
-            <a:r>
-              <a:rPr sz="900" b="0" i="0" dirty="0">
-                <a:solidFill>
-                  <a:srgbClr val="1A1A1A"/>
-                </a:solidFill>
-                <a:latin typeface="Google Sans Flex"/>
-              </a:rPr>
-              <a:t>•  NASA/USGS dashboards → fire/earthquake detection only, no response coordination</a:t>
-            </a:r>
-          </a:p>
-          <a:p>
-            <a:pPr>
-              <a:spcBef>
-                <a:spcPts val="0"/>
-              </a:spcBef>
-              <a:spcAft>
-                <a:spcPts val="0"/>
-              </a:spcAft>
-            </a:pPr>
-            <a:r>
-              <a:rPr sz="900" b="0" i="0" dirty="0">
-                <a:solidFill>
-                  <a:srgbClr val="1A1A1A"/>
-                </a:solidFill>
-                <a:latin typeface="Google Sans Flex"/>
-              </a:rPr>
-              <a:t>•  Weather forecasting apps → forecast only, no action planning</a:t>
-            </a:r>
-          </a:p>
-          <a:p>
-            <a:pPr>
-              <a:spcBef>
-                <a:spcPts val="0"/>
-              </a:spcBef>
-              <a:spcAft>
-                <a:spcPts val="0"/>
-              </a:spcAft>
-            </a:pPr>
-            <a:r>
-              <a:rPr sz="900" b="0" i="0" dirty="0">
-                <a:solidFill>
-                  <a:srgbClr val="1A1A1A"/>
-                </a:solidFill>
-                <a:latin typeface="Google Sans Flex"/>
-              </a:rPr>
-              <a:t>•  Emergency management platforms → manual, spreadsheet-driven decisions</a:t>
-            </a:r>
-          </a:p>
-          <a:p>
-            <a:pPr>
-              <a:spcBef>
-                <a:spcPts val="0"/>
-              </a:spcBef>
-              <a:spcAft>
-                <a:spcPts val="0"/>
-              </a:spcAft>
-            </a:pPr>
-            <a:r>
-              <a:rPr sz="900" b="0" i="0" dirty="0">
-                <a:solidFill>
-                  <a:srgbClr val="1A1A1A"/>
-                </a:solidFill>
-                <a:latin typeface="Google Sans Flex"/>
-              </a:rPr>
-              <a:t>•  Routing apps (Google Maps) → general navigation, not disaster-aware</a:t>
-            </a:r>
-          </a:p>
         </p:txBody>
       </p:sp>
       <p:graphicFrame>
@@ -9802,10 +9555,16 @@
           <p:cNvGraphicFramePr>
             <a:graphicFrameLocks noGrp="1"/>
           </p:cNvGraphicFramePr>
-          <p:nvPr/>
+          <p:nvPr>
+            <p:extLst>
+              <p:ext uri="{D42A27DB-BD31-4B8C-83A1-F6EECF244321}">
+                <p14:modId xmlns:p14="http://schemas.microsoft.com/office/powerpoint/2010/main" val="1631460710"/>
+              </p:ext>
+            </p:extLst>
+          </p:nvPr>
         </p:nvGraphicFramePr>
         <p:xfrm>
-          <a:off x="317602" y="2750000"/>
+          <a:off x="303052" y="2104565"/>
           <a:ext cx="8508796" cy="2150000"/>
         </p:xfrm>
         <a:graphic>
@@ -9868,7 +9627,7 @@
                     <a:p>
                       <a:pPr algn="l"/>
                       <a:r>
-                        <a:rPr sz="900" b="1">
+                        <a:rPr sz="900" b="1" dirty="0">
                           <a:solidFill>
                             <a:srgbClr val="FFFFFF"/>
                           </a:solidFill>
@@ -9944,7 +9703,7 @@
                     <a:p>
                       <a:pPr algn="l"/>
                       <a:r>
-                        <a:rPr sz="800" b="0">
+                        <a:rPr sz="800" b="0" dirty="0">
                           <a:solidFill>
                             <a:srgbClr val="C03030"/>
                           </a:solidFill>
@@ -10020,7 +9779,7 @@
                     <a:p>
                       <a:pPr algn="l"/>
                       <a:r>
-                        <a:rPr sz="800" b="0">
+                        <a:rPr sz="800" b="0" dirty="0">
                           <a:solidFill>
                             <a:srgbClr val="C03030"/>
                           </a:solidFill>
@@ -10248,7 +10007,7 @@
                     <a:p>
                       <a:pPr algn="l"/>
                       <a:r>
-                        <a:rPr sz="800" b="0">
+                        <a:rPr sz="800" b="0" dirty="0">
                           <a:solidFill>
                             <a:srgbClr val="C03030"/>
                           </a:solidFill>
@@ -10347,7 +10106,7 @@
                     <a:p>
                       <a:pPr algn="l"/>
                       <a:r>
-                        <a:rPr sz="800" b="0">
+                        <a:rPr sz="800" b="0" dirty="0">
                           <a:solidFill>
                             <a:srgbClr val="1E8E3E"/>
                           </a:solidFill>
@@ -10373,6 +10132,142 @@
           </a:graphicData>
         </a:graphic>
       </p:graphicFrame>
+      <p:sp>
+        <p:nvSpPr>
+          <p:cNvPr id="3" name="TextBox 2">
+            <a:extLst>
+              <a:ext uri="{FF2B5EF4-FFF2-40B4-BE49-F238E27FC236}">
+                <a16:creationId xmlns:a16="http://schemas.microsoft.com/office/drawing/2014/main" id="{D8E3444B-B971-D03A-7967-04160BE02004}"/>
+              </a:ext>
+            </a:extLst>
+          </p:cNvPr>
+          <p:cNvSpPr txBox="1"/>
+          <p:nvPr/>
+        </p:nvSpPr>
+        <p:spPr>
+          <a:xfrm>
+            <a:off x="209005" y="782693"/>
+            <a:ext cx="7282544" cy="1076257"/>
+          </a:xfrm>
+          <a:prstGeom prst="rect">
+            <a:avLst/>
+          </a:prstGeom>
+          <a:noFill/>
+        </p:spPr>
+        <p:txBody>
+          <a:bodyPr wrap="square">
+            <a:spAutoFit/>
+          </a:bodyPr>
+          <a:lstStyle/>
+          <a:p>
+            <a:pPr>
+              <a:spcBef>
+                <a:spcPts val="500"/>
+              </a:spcBef>
+              <a:spcAft>
+                <a:spcPts val="100"/>
+              </a:spcAft>
+            </a:pPr>
+            <a:r>
+              <a:rPr lang="en-IN" sz="1050" b="1" i="0" dirty="0">
+                <a:solidFill>
+                  <a:srgbClr val="1A1A1A"/>
+                </a:solidFill>
+                <a:latin typeface="Google Sans Flex Medium"/>
+              </a:rPr>
+              <a:t>Current Market</a:t>
+            </a:r>
+          </a:p>
+          <a:p>
+            <a:pPr>
+              <a:lnSpc>
+                <a:spcPct val="150000"/>
+              </a:lnSpc>
+              <a:spcBef>
+                <a:spcPts val="0"/>
+              </a:spcBef>
+              <a:spcAft>
+                <a:spcPts val="0"/>
+              </a:spcAft>
+            </a:pPr>
+            <a:r>
+              <a:rPr lang="en-IN" sz="900" b="0" i="0" dirty="0">
+                <a:solidFill>
+                  <a:srgbClr val="1A1A1A"/>
+                </a:solidFill>
+                <a:latin typeface="Google Sans Flex"/>
+              </a:rPr>
+              <a:t>•  NASA/USGS dashboards → fire/earthquake detection only, no response coordination</a:t>
+            </a:r>
+          </a:p>
+          <a:p>
+            <a:pPr>
+              <a:lnSpc>
+                <a:spcPct val="150000"/>
+              </a:lnSpc>
+              <a:spcBef>
+                <a:spcPts val="0"/>
+              </a:spcBef>
+              <a:spcAft>
+                <a:spcPts val="0"/>
+              </a:spcAft>
+            </a:pPr>
+            <a:r>
+              <a:rPr lang="en-IN" sz="900" b="0" i="0" dirty="0">
+                <a:solidFill>
+                  <a:srgbClr val="1A1A1A"/>
+                </a:solidFill>
+                <a:latin typeface="Google Sans Flex"/>
+              </a:rPr>
+              <a:t>•  Weather forecasting apps → forecast only, no action planning</a:t>
+            </a:r>
+          </a:p>
+          <a:p>
+            <a:pPr>
+              <a:lnSpc>
+                <a:spcPct val="150000"/>
+              </a:lnSpc>
+              <a:spcBef>
+                <a:spcPts val="0"/>
+              </a:spcBef>
+              <a:spcAft>
+                <a:spcPts val="0"/>
+              </a:spcAft>
+            </a:pPr>
+            <a:r>
+              <a:rPr lang="en-IN" sz="900" b="0" i="0" dirty="0">
+                <a:solidFill>
+                  <a:srgbClr val="1A1A1A"/>
+                </a:solidFill>
+                <a:latin typeface="Google Sans Flex"/>
+              </a:rPr>
+              <a:t>•  Emergency management platforms → manual, spreadsheet-driven decisions</a:t>
+            </a:r>
+          </a:p>
+          <a:p>
+            <a:pPr>
+              <a:lnSpc>
+                <a:spcPct val="150000"/>
+              </a:lnSpc>
+              <a:spcBef>
+                <a:spcPts val="0"/>
+              </a:spcBef>
+              <a:spcAft>
+                <a:spcPts val="0"/>
+              </a:spcAft>
+            </a:pPr>
+            <a:r>
+              <a:rPr lang="en-IN" sz="900" b="0" i="0" dirty="0">
+                <a:solidFill>
+                  <a:srgbClr val="1A1A1A"/>
+                </a:solidFill>
+                <a:latin typeface="Google Sans Flex"/>
+              </a:rPr>
+              <a:t>•  Routing apps (Google Maps) → general navigation, not disaster-aware</a:t>
+            </a:r>
+          </a:p>
+        </p:txBody>
+      </p:sp>
     </p:spTree>
   </p:cSld>
   <p:clrMapOvr>
@@ -10386,13 +10281,7 @@
   <p:cSld>
     <p:spTree>
       <p:nvGrpSpPr>
-        <p:cNvPr id="1" name="Shape 75">
-          <a:extLst>
-            <a:ext uri="{FF2B5EF4-FFF2-40B4-BE49-F238E27FC236}">
-              <a16:creationId xmlns:a16="http://schemas.microsoft.com/office/drawing/2014/main" id="{C762EECC-6483-BF04-C796-A41BB221767F}"/>
-            </a:ext>
-          </a:extLst>
-        </p:cNvPr>
+        <p:cNvPr id="1" name=""/>
         <p:cNvGrpSpPr/>
         <p:nvPr/>
       </p:nvGrpSpPr>
@@ -10404,29 +10293,1988 @@
           <a:chExt cx="0" cy="0"/>
         </a:xfrm>
       </p:grpSpPr>
+      <p:sp>
+        <p:nvSpPr>
+          <p:cNvPr id="2" name="Rounded Rectangle 1"/>
+          <p:cNvSpPr/>
+          <p:nvPr/>
+        </p:nvSpPr>
+        <p:spPr>
+          <a:xfrm>
+            <a:off x="0" y="3889438"/>
+            <a:ext cx="8783807" cy="422150"/>
+          </a:xfrm>
+          <a:prstGeom prst="roundRect">
+            <a:avLst>
+              <a:gd name="adj" fmla="val 16922"/>
+            </a:avLst>
+          </a:prstGeom>
+          <a:solidFill>
+            <a:srgbClr val="1E293B"/>
+          </a:solidFill>
+          <a:ln>
+            <a:noFill/>
+          </a:ln>
+          <a:effectLst/>
+        </p:spPr>
+        <p:style>
+          <a:lnRef idx="1">
+            <a:schemeClr val="accent1"/>
+          </a:lnRef>
+          <a:fillRef idx="3">
+            <a:schemeClr val="accent1"/>
+          </a:fillRef>
+          <a:effectRef idx="2">
+            <a:schemeClr val="accent1"/>
+          </a:effectRef>
+          <a:fontRef idx="minor">
+            <a:schemeClr val="lt1"/>
+          </a:fontRef>
+        </p:style>
+        <p:txBody>
+          <a:bodyPr rtlCol="0" anchor="ctr"/>
+          <a:lstStyle/>
+          <a:p>
+            <a:pPr algn="ctr"/>
+            <a:endParaRPr sz="1050">
+              <a:latin typeface="+mj-lt"/>
+            </a:endParaRPr>
+          </a:p>
+        </p:txBody>
+      </p:sp>
+      <p:sp>
+        <p:nvSpPr>
+          <p:cNvPr id="3" name="Rounded Rectangle 2"/>
+          <p:cNvSpPr/>
+          <p:nvPr/>
+        </p:nvSpPr>
+        <p:spPr>
+          <a:xfrm>
+            <a:off x="468482" y="4025503"/>
+            <a:ext cx="928688" cy="150019"/>
+          </a:xfrm>
+          <a:prstGeom prst="roundRect">
+            <a:avLst>
+              <a:gd name="adj" fmla="val 28571"/>
+            </a:avLst>
+          </a:prstGeom>
+          <a:solidFill>
+            <a:srgbClr val="0895D8"/>
+          </a:solidFill>
+          <a:ln>
+            <a:noFill/>
+          </a:ln>
+          <a:effectLst/>
+        </p:spPr>
+        <p:style>
+          <a:lnRef idx="1">
+            <a:schemeClr val="accent1"/>
+          </a:lnRef>
+          <a:fillRef idx="3">
+            <a:schemeClr val="accent1"/>
+          </a:fillRef>
+          <a:effectRef idx="2">
+            <a:schemeClr val="accent1"/>
+          </a:effectRef>
+          <a:fontRef idx="minor">
+            <a:schemeClr val="lt1"/>
+          </a:fontRef>
+        </p:style>
+        <p:txBody>
+          <a:bodyPr rtlCol="0" anchor="ctr"/>
+          <a:lstStyle/>
+          <a:p>
+            <a:pPr algn="ctr"/>
+            <a:endParaRPr sz="1050">
+              <a:latin typeface="+mj-lt"/>
+            </a:endParaRPr>
+          </a:p>
+        </p:txBody>
+      </p:sp>
+      <p:sp>
+        <p:nvSpPr>
+          <p:cNvPr id="4" name="Rounded Rectangle 3"/>
+          <p:cNvSpPr/>
+          <p:nvPr/>
+        </p:nvSpPr>
+        <p:spPr>
+          <a:xfrm>
+            <a:off x="325607" y="1060513"/>
+            <a:ext cx="3627686" cy="690041"/>
+          </a:xfrm>
+          <a:prstGeom prst="roundRect">
+            <a:avLst>
+              <a:gd name="adj" fmla="val 10352"/>
+            </a:avLst>
+          </a:prstGeom>
+          <a:solidFill>
+            <a:srgbClr val="FEF2F2"/>
+          </a:solidFill>
+          <a:ln>
+            <a:noFill/>
+          </a:ln>
+          <a:effectLst/>
+        </p:spPr>
+        <p:style>
+          <a:lnRef idx="1">
+            <a:schemeClr val="accent1"/>
+          </a:lnRef>
+          <a:fillRef idx="3">
+            <a:schemeClr val="accent1"/>
+          </a:fillRef>
+          <a:effectRef idx="2">
+            <a:schemeClr val="accent1"/>
+          </a:effectRef>
+          <a:fontRef idx="minor">
+            <a:schemeClr val="lt1"/>
+          </a:fontRef>
+        </p:style>
+        <p:txBody>
+          <a:bodyPr rtlCol="0" anchor="ctr"/>
+          <a:lstStyle/>
+          <a:p>
+            <a:pPr algn="ctr"/>
+            <a:endParaRPr sz="1050">
+              <a:latin typeface="+mj-lt"/>
+            </a:endParaRPr>
+          </a:p>
+        </p:txBody>
+      </p:sp>
+      <p:sp>
+        <p:nvSpPr>
+          <p:cNvPr id="5" name="Rounded Rectangle 4"/>
+          <p:cNvSpPr/>
+          <p:nvPr/>
+        </p:nvSpPr>
+        <p:spPr>
+          <a:xfrm>
+            <a:off x="4067593" y="1060513"/>
+            <a:ext cx="4716214" cy="690041"/>
+          </a:xfrm>
+          <a:prstGeom prst="roundRect">
+            <a:avLst>
+              <a:gd name="adj" fmla="val 10352"/>
+            </a:avLst>
+          </a:prstGeom>
+          <a:solidFill>
+            <a:srgbClr val="F0FDF4"/>
+          </a:solidFill>
+          <a:ln>
+            <a:noFill/>
+          </a:ln>
+          <a:effectLst/>
+        </p:spPr>
+        <p:style>
+          <a:lnRef idx="1">
+            <a:schemeClr val="accent1"/>
+          </a:lnRef>
+          <a:fillRef idx="3">
+            <a:schemeClr val="accent1"/>
+          </a:fillRef>
+          <a:effectRef idx="2">
+            <a:schemeClr val="accent1"/>
+          </a:effectRef>
+          <a:fontRef idx="minor">
+            <a:schemeClr val="lt1"/>
+          </a:fontRef>
+        </p:style>
+        <p:txBody>
+          <a:bodyPr rtlCol="0" anchor="ctr"/>
+          <a:lstStyle/>
+          <a:p>
+            <a:pPr algn="ctr"/>
+            <a:endParaRPr sz="1050">
+              <a:latin typeface="+mj-lt"/>
+            </a:endParaRPr>
+          </a:p>
+        </p:txBody>
+      </p:sp>
+      <p:sp>
+        <p:nvSpPr>
+          <p:cNvPr id="6" name="Rounded Rectangle 5"/>
+          <p:cNvSpPr/>
+          <p:nvPr/>
+        </p:nvSpPr>
+        <p:spPr>
+          <a:xfrm>
+            <a:off x="325607" y="2136316"/>
+            <a:ext cx="2762175" cy="634231"/>
+          </a:xfrm>
+          <a:prstGeom prst="roundRect">
+            <a:avLst>
+              <a:gd name="adj" fmla="val 11263"/>
+            </a:avLst>
+          </a:prstGeom>
+          <a:solidFill>
+            <a:srgbClr val="FFFFFF"/>
+          </a:solidFill>
+          <a:ln w="9525">
+            <a:solidFill>
+              <a:srgbClr val="E2E8F0"/>
+            </a:solidFill>
+          </a:ln>
+          <a:effectLst/>
+        </p:spPr>
+        <p:style>
+          <a:lnRef idx="1">
+            <a:schemeClr val="accent1"/>
+          </a:lnRef>
+          <a:fillRef idx="3">
+            <a:schemeClr val="accent1"/>
+          </a:fillRef>
+          <a:effectRef idx="2">
+            <a:schemeClr val="accent1"/>
+          </a:effectRef>
+          <a:fontRef idx="minor">
+            <a:schemeClr val="lt1"/>
+          </a:fontRef>
+        </p:style>
+        <p:txBody>
+          <a:bodyPr rtlCol="0" anchor="ctr"/>
+          <a:lstStyle/>
+          <a:p>
+            <a:pPr algn="ctr"/>
+            <a:endParaRPr sz="1050">
+              <a:latin typeface="+mj-lt"/>
+            </a:endParaRPr>
+          </a:p>
+        </p:txBody>
+      </p:sp>
+      <p:sp>
+        <p:nvSpPr>
+          <p:cNvPr id="7" name="Rounded Rectangle 6"/>
+          <p:cNvSpPr/>
+          <p:nvPr/>
+        </p:nvSpPr>
+        <p:spPr>
+          <a:xfrm>
+            <a:off x="3173507" y="2136316"/>
+            <a:ext cx="2762287" cy="634231"/>
+          </a:xfrm>
+          <a:prstGeom prst="roundRect">
+            <a:avLst>
+              <a:gd name="adj" fmla="val 11263"/>
+            </a:avLst>
+          </a:prstGeom>
+          <a:solidFill>
+            <a:srgbClr val="FFFFFF"/>
+          </a:solidFill>
+          <a:ln w="9525">
+            <a:solidFill>
+              <a:srgbClr val="E2E8F0"/>
+            </a:solidFill>
+          </a:ln>
+          <a:effectLst/>
+        </p:spPr>
+        <p:style>
+          <a:lnRef idx="1">
+            <a:schemeClr val="accent1"/>
+          </a:lnRef>
+          <a:fillRef idx="3">
+            <a:schemeClr val="accent1"/>
+          </a:fillRef>
+          <a:effectRef idx="2">
+            <a:schemeClr val="accent1"/>
+          </a:effectRef>
+          <a:fontRef idx="minor">
+            <a:schemeClr val="lt1"/>
+          </a:fontRef>
+        </p:style>
+        <p:txBody>
+          <a:bodyPr rtlCol="0" anchor="ctr"/>
+          <a:lstStyle/>
+          <a:p>
+            <a:pPr algn="ctr"/>
+            <a:endParaRPr sz="1050">
+              <a:latin typeface="+mj-lt"/>
+            </a:endParaRPr>
+          </a:p>
+        </p:txBody>
+      </p:sp>
+      <p:sp>
+        <p:nvSpPr>
+          <p:cNvPr id="8" name="Rounded Rectangle 7"/>
+          <p:cNvSpPr/>
+          <p:nvPr/>
+        </p:nvSpPr>
+        <p:spPr>
+          <a:xfrm>
+            <a:off x="6021520" y="2136316"/>
+            <a:ext cx="2762175" cy="634231"/>
+          </a:xfrm>
+          <a:prstGeom prst="roundRect">
+            <a:avLst>
+              <a:gd name="adj" fmla="val 11263"/>
+            </a:avLst>
+          </a:prstGeom>
+          <a:solidFill>
+            <a:srgbClr val="FFFFFF"/>
+          </a:solidFill>
+          <a:ln w="9525">
+            <a:solidFill>
+              <a:srgbClr val="E2E8F0"/>
+            </a:solidFill>
+          </a:ln>
+          <a:effectLst/>
+        </p:spPr>
+        <p:style>
+          <a:lnRef idx="1">
+            <a:schemeClr val="accent1"/>
+          </a:lnRef>
+          <a:fillRef idx="3">
+            <a:schemeClr val="accent1"/>
+          </a:fillRef>
+          <a:effectRef idx="2">
+            <a:schemeClr val="accent1"/>
+          </a:effectRef>
+          <a:fontRef idx="minor">
+            <a:schemeClr val="lt1"/>
+          </a:fontRef>
+        </p:style>
+        <p:txBody>
+          <a:bodyPr rtlCol="0" anchor="ctr"/>
+          <a:lstStyle/>
+          <a:p>
+            <a:pPr algn="ctr"/>
+            <a:endParaRPr sz="1050">
+              <a:latin typeface="+mj-lt"/>
+            </a:endParaRPr>
+          </a:p>
+        </p:txBody>
+      </p:sp>
+      <p:sp>
+        <p:nvSpPr>
+          <p:cNvPr id="9" name="Rounded Rectangle 8"/>
+          <p:cNvSpPr/>
+          <p:nvPr/>
+        </p:nvSpPr>
+        <p:spPr>
+          <a:xfrm>
+            <a:off x="325607" y="2856272"/>
+            <a:ext cx="2762175" cy="758465"/>
+          </a:xfrm>
+          <a:prstGeom prst="roundRect">
+            <a:avLst>
+              <a:gd name="adj" fmla="val 9418"/>
+            </a:avLst>
+          </a:prstGeom>
+          <a:solidFill>
+            <a:srgbClr val="FFFFFF"/>
+          </a:solidFill>
+          <a:ln w="9525">
+            <a:solidFill>
+              <a:srgbClr val="E2E8F0"/>
+            </a:solidFill>
+          </a:ln>
+          <a:effectLst/>
+        </p:spPr>
+        <p:style>
+          <a:lnRef idx="1">
+            <a:schemeClr val="accent1"/>
+          </a:lnRef>
+          <a:fillRef idx="3">
+            <a:schemeClr val="accent1"/>
+          </a:fillRef>
+          <a:effectRef idx="2">
+            <a:schemeClr val="accent1"/>
+          </a:effectRef>
+          <a:fontRef idx="minor">
+            <a:schemeClr val="lt1"/>
+          </a:fontRef>
+        </p:style>
+        <p:txBody>
+          <a:bodyPr rtlCol="0" anchor="ctr"/>
+          <a:lstStyle/>
+          <a:p>
+            <a:pPr algn="ctr"/>
+            <a:endParaRPr sz="1050">
+              <a:latin typeface="+mj-lt"/>
+            </a:endParaRPr>
+          </a:p>
+        </p:txBody>
+      </p:sp>
+      <p:sp>
+        <p:nvSpPr>
+          <p:cNvPr id="10" name="Rounded Rectangle 9"/>
+          <p:cNvSpPr/>
+          <p:nvPr/>
+        </p:nvSpPr>
+        <p:spPr>
+          <a:xfrm>
+            <a:off x="3173507" y="2856272"/>
+            <a:ext cx="5610188" cy="758465"/>
+          </a:xfrm>
+          <a:prstGeom prst="roundRect">
+            <a:avLst>
+              <a:gd name="adj" fmla="val 9418"/>
+            </a:avLst>
+          </a:prstGeom>
+          <a:solidFill>
+            <a:srgbClr val="FFFFFF"/>
+          </a:solidFill>
+          <a:ln w="9525">
+            <a:solidFill>
+              <a:srgbClr val="E2E8F0"/>
+            </a:solidFill>
+          </a:ln>
+          <a:effectLst/>
+        </p:spPr>
+        <p:style>
+          <a:lnRef idx="1">
+            <a:schemeClr val="accent1"/>
+          </a:lnRef>
+          <a:fillRef idx="3">
+            <a:schemeClr val="accent1"/>
+          </a:fillRef>
+          <a:effectRef idx="2">
+            <a:schemeClr val="accent1"/>
+          </a:effectRef>
+          <a:fontRef idx="minor">
+            <a:schemeClr val="lt1"/>
+          </a:fontRef>
+        </p:style>
+        <p:txBody>
+          <a:bodyPr rtlCol="0" anchor="ctr"/>
+          <a:lstStyle/>
+          <a:p>
+            <a:pPr algn="ctr"/>
+            <a:endParaRPr sz="1050">
+              <a:latin typeface="+mj-lt"/>
+            </a:endParaRPr>
+          </a:p>
+        </p:txBody>
+      </p:sp>
+      <p:sp>
+        <p:nvSpPr>
+          <p:cNvPr id="11" name="Rectangle 10"/>
+          <p:cNvSpPr/>
+          <p:nvPr/>
+        </p:nvSpPr>
+        <p:spPr>
+          <a:xfrm>
+            <a:off x="325607" y="1743410"/>
+            <a:ext cx="3627686" cy="7144"/>
+          </a:xfrm>
+          <a:prstGeom prst="rect">
+            <a:avLst/>
+          </a:prstGeom>
+          <a:solidFill>
+            <a:srgbClr val="FCA5A5"/>
+          </a:solidFill>
+          <a:ln>
+            <a:noFill/>
+          </a:ln>
+          <a:effectLst/>
+        </p:spPr>
+        <p:style>
+          <a:lnRef idx="1">
+            <a:schemeClr val="accent1"/>
+          </a:lnRef>
+          <a:fillRef idx="3">
+            <a:schemeClr val="accent1"/>
+          </a:fillRef>
+          <a:effectRef idx="2">
+            <a:schemeClr val="accent1"/>
+          </a:effectRef>
+          <a:fontRef idx="minor">
+            <a:schemeClr val="lt1"/>
+          </a:fontRef>
+        </p:style>
+        <p:txBody>
+          <a:bodyPr rtlCol="0" anchor="ctr"/>
+          <a:lstStyle/>
+          <a:p>
+            <a:pPr algn="ctr"/>
+            <a:endParaRPr sz="1050">
+              <a:latin typeface="+mj-lt"/>
+            </a:endParaRPr>
+          </a:p>
+        </p:txBody>
+      </p:sp>
+      <p:sp>
+        <p:nvSpPr>
+          <p:cNvPr id="12" name="Rectangle 11"/>
+          <p:cNvSpPr/>
+          <p:nvPr/>
+        </p:nvSpPr>
+        <p:spPr>
+          <a:xfrm>
+            <a:off x="325607" y="1060512"/>
+            <a:ext cx="3627686" cy="7144"/>
+          </a:xfrm>
+          <a:prstGeom prst="rect">
+            <a:avLst/>
+          </a:prstGeom>
+          <a:solidFill>
+            <a:srgbClr val="FCA5A5"/>
+          </a:solidFill>
+          <a:ln>
+            <a:noFill/>
+          </a:ln>
+          <a:effectLst/>
+        </p:spPr>
+        <p:style>
+          <a:lnRef idx="1">
+            <a:schemeClr val="accent1"/>
+          </a:lnRef>
+          <a:fillRef idx="3">
+            <a:schemeClr val="accent1"/>
+          </a:fillRef>
+          <a:effectRef idx="2">
+            <a:schemeClr val="accent1"/>
+          </a:effectRef>
+          <a:fontRef idx="minor">
+            <a:schemeClr val="lt1"/>
+          </a:fontRef>
+        </p:style>
+        <p:txBody>
+          <a:bodyPr rtlCol="0" anchor="ctr"/>
+          <a:lstStyle/>
+          <a:p>
+            <a:pPr algn="ctr"/>
+            <a:endParaRPr sz="1050">
+              <a:latin typeface="+mj-lt"/>
+            </a:endParaRPr>
+          </a:p>
+        </p:txBody>
+      </p:sp>
+      <p:sp>
+        <p:nvSpPr>
+          <p:cNvPr id="13" name="Rectangle 12"/>
+          <p:cNvSpPr/>
+          <p:nvPr/>
+        </p:nvSpPr>
+        <p:spPr>
+          <a:xfrm>
+            <a:off x="325607" y="1060513"/>
+            <a:ext cx="35719" cy="690041"/>
+          </a:xfrm>
+          <a:prstGeom prst="rect">
+            <a:avLst/>
+          </a:prstGeom>
+          <a:solidFill>
+            <a:srgbClr val="EF4444"/>
+          </a:solidFill>
+          <a:ln>
+            <a:noFill/>
+          </a:ln>
+          <a:effectLst/>
+        </p:spPr>
+        <p:style>
+          <a:lnRef idx="1">
+            <a:schemeClr val="accent1"/>
+          </a:lnRef>
+          <a:fillRef idx="3">
+            <a:schemeClr val="accent1"/>
+          </a:fillRef>
+          <a:effectRef idx="2">
+            <a:schemeClr val="accent1"/>
+          </a:effectRef>
+          <a:fontRef idx="minor">
+            <a:schemeClr val="lt1"/>
+          </a:fontRef>
+        </p:style>
+        <p:txBody>
+          <a:bodyPr rtlCol="0" anchor="ctr"/>
+          <a:lstStyle/>
+          <a:p>
+            <a:pPr algn="ctr"/>
+            <a:endParaRPr sz="1050">
+              <a:latin typeface="+mj-lt"/>
+            </a:endParaRPr>
+          </a:p>
+        </p:txBody>
+      </p:sp>
+      <p:sp>
+        <p:nvSpPr>
+          <p:cNvPr id="14" name="Rectangle 13"/>
+          <p:cNvSpPr/>
+          <p:nvPr/>
+        </p:nvSpPr>
+        <p:spPr>
+          <a:xfrm>
+            <a:off x="3946149" y="1060513"/>
+            <a:ext cx="7144" cy="690041"/>
+          </a:xfrm>
+          <a:prstGeom prst="rect">
+            <a:avLst/>
+          </a:prstGeom>
+          <a:solidFill>
+            <a:srgbClr val="FCA5A5"/>
+          </a:solidFill>
+          <a:ln>
+            <a:noFill/>
+          </a:ln>
+          <a:effectLst/>
+        </p:spPr>
+        <p:style>
+          <a:lnRef idx="1">
+            <a:schemeClr val="accent1"/>
+          </a:lnRef>
+          <a:fillRef idx="3">
+            <a:schemeClr val="accent1"/>
+          </a:fillRef>
+          <a:effectRef idx="2">
+            <a:schemeClr val="accent1"/>
+          </a:effectRef>
+          <a:fontRef idx="minor">
+            <a:schemeClr val="lt1"/>
+          </a:fontRef>
+        </p:style>
+        <p:txBody>
+          <a:bodyPr rtlCol="0" anchor="ctr"/>
+          <a:lstStyle/>
+          <a:p>
+            <a:pPr algn="ctr"/>
+            <a:endParaRPr sz="1050">
+              <a:latin typeface="+mj-lt"/>
+            </a:endParaRPr>
+          </a:p>
+        </p:txBody>
+      </p:sp>
+      <p:sp>
+        <p:nvSpPr>
+          <p:cNvPr id="15" name="Rectangle 14"/>
+          <p:cNvSpPr/>
+          <p:nvPr/>
+        </p:nvSpPr>
+        <p:spPr>
+          <a:xfrm>
+            <a:off x="4067593" y="1743410"/>
+            <a:ext cx="4716214" cy="7144"/>
+          </a:xfrm>
+          <a:prstGeom prst="rect">
+            <a:avLst/>
+          </a:prstGeom>
+          <a:solidFill>
+            <a:srgbClr val="86EFAC"/>
+          </a:solidFill>
+          <a:ln>
+            <a:noFill/>
+          </a:ln>
+          <a:effectLst/>
+        </p:spPr>
+        <p:style>
+          <a:lnRef idx="1">
+            <a:schemeClr val="accent1"/>
+          </a:lnRef>
+          <a:fillRef idx="3">
+            <a:schemeClr val="accent1"/>
+          </a:fillRef>
+          <a:effectRef idx="2">
+            <a:schemeClr val="accent1"/>
+          </a:effectRef>
+          <a:fontRef idx="minor">
+            <a:schemeClr val="lt1"/>
+          </a:fontRef>
+        </p:style>
+        <p:txBody>
+          <a:bodyPr rtlCol="0" anchor="ctr"/>
+          <a:lstStyle/>
+          <a:p>
+            <a:pPr algn="ctr"/>
+            <a:endParaRPr sz="1050">
+              <a:latin typeface="+mj-lt"/>
+            </a:endParaRPr>
+          </a:p>
+        </p:txBody>
+      </p:sp>
+      <p:sp>
+        <p:nvSpPr>
+          <p:cNvPr id="16" name="Rectangle 15"/>
+          <p:cNvSpPr/>
+          <p:nvPr/>
+        </p:nvSpPr>
+        <p:spPr>
+          <a:xfrm>
+            <a:off x="4067593" y="1060512"/>
+            <a:ext cx="4716214" cy="7144"/>
+          </a:xfrm>
+          <a:prstGeom prst="rect">
+            <a:avLst/>
+          </a:prstGeom>
+          <a:solidFill>
+            <a:srgbClr val="86EFAC"/>
+          </a:solidFill>
+          <a:ln>
+            <a:noFill/>
+          </a:ln>
+          <a:effectLst/>
+        </p:spPr>
+        <p:style>
+          <a:lnRef idx="1">
+            <a:schemeClr val="accent1"/>
+          </a:lnRef>
+          <a:fillRef idx="3">
+            <a:schemeClr val="accent1"/>
+          </a:fillRef>
+          <a:effectRef idx="2">
+            <a:schemeClr val="accent1"/>
+          </a:effectRef>
+          <a:fontRef idx="minor">
+            <a:schemeClr val="lt1"/>
+          </a:fontRef>
+        </p:style>
+        <p:txBody>
+          <a:bodyPr rtlCol="0" anchor="ctr"/>
+          <a:lstStyle/>
+          <a:p>
+            <a:pPr algn="ctr"/>
+            <a:endParaRPr sz="1050">
+              <a:latin typeface="+mj-lt"/>
+            </a:endParaRPr>
+          </a:p>
+        </p:txBody>
+      </p:sp>
+      <p:sp>
+        <p:nvSpPr>
+          <p:cNvPr id="17" name="Rectangle 16"/>
+          <p:cNvSpPr/>
+          <p:nvPr/>
+        </p:nvSpPr>
+        <p:spPr>
+          <a:xfrm>
+            <a:off x="4067593" y="1060513"/>
+            <a:ext cx="35719" cy="690041"/>
+          </a:xfrm>
+          <a:prstGeom prst="rect">
+            <a:avLst/>
+          </a:prstGeom>
+          <a:solidFill>
+            <a:srgbClr val="10B981"/>
+          </a:solidFill>
+          <a:ln>
+            <a:noFill/>
+          </a:ln>
+          <a:effectLst/>
+        </p:spPr>
+        <p:style>
+          <a:lnRef idx="1">
+            <a:schemeClr val="accent1"/>
+          </a:lnRef>
+          <a:fillRef idx="3">
+            <a:schemeClr val="accent1"/>
+          </a:fillRef>
+          <a:effectRef idx="2">
+            <a:schemeClr val="accent1"/>
+          </a:effectRef>
+          <a:fontRef idx="minor">
+            <a:schemeClr val="lt1"/>
+          </a:fontRef>
+        </p:style>
+        <p:txBody>
+          <a:bodyPr rtlCol="0" anchor="ctr"/>
+          <a:lstStyle/>
+          <a:p>
+            <a:pPr algn="ctr"/>
+            <a:endParaRPr sz="1050">
+              <a:latin typeface="+mj-lt"/>
+            </a:endParaRPr>
+          </a:p>
+        </p:txBody>
+      </p:sp>
+      <p:sp>
+        <p:nvSpPr>
+          <p:cNvPr id="18" name="Rectangle 17"/>
+          <p:cNvSpPr/>
+          <p:nvPr/>
+        </p:nvSpPr>
+        <p:spPr>
+          <a:xfrm>
+            <a:off x="8776664" y="1060513"/>
+            <a:ext cx="7144" cy="690041"/>
+          </a:xfrm>
+          <a:prstGeom prst="rect">
+            <a:avLst/>
+          </a:prstGeom>
+          <a:solidFill>
+            <a:srgbClr val="86EFAC"/>
+          </a:solidFill>
+          <a:ln>
+            <a:noFill/>
+          </a:ln>
+          <a:effectLst/>
+        </p:spPr>
+        <p:style>
+          <a:lnRef idx="1">
+            <a:schemeClr val="accent1"/>
+          </a:lnRef>
+          <a:fillRef idx="3">
+            <a:schemeClr val="accent1"/>
+          </a:fillRef>
+          <a:effectRef idx="2">
+            <a:schemeClr val="accent1"/>
+          </a:effectRef>
+          <a:fontRef idx="minor">
+            <a:schemeClr val="lt1"/>
+          </a:fontRef>
+        </p:style>
+        <p:txBody>
+          <a:bodyPr rtlCol="0" anchor="ctr"/>
+          <a:lstStyle/>
+          <a:p>
+            <a:pPr algn="ctr"/>
+            <a:endParaRPr sz="1050">
+              <a:latin typeface="+mj-lt"/>
+            </a:endParaRPr>
+          </a:p>
+        </p:txBody>
+      </p:sp>
+      <p:sp>
+        <p:nvSpPr>
+          <p:cNvPr id="19" name="Rounded Rectangle 18"/>
+          <p:cNvSpPr/>
+          <p:nvPr/>
+        </p:nvSpPr>
+        <p:spPr>
+          <a:xfrm>
+            <a:off x="4246187" y="1335546"/>
+            <a:ext cx="450056" cy="121444"/>
+          </a:xfrm>
+          <a:prstGeom prst="roundRect">
+            <a:avLst>
+              <a:gd name="adj" fmla="val 23529"/>
+            </a:avLst>
+          </a:prstGeom>
+          <a:solidFill>
+            <a:srgbClr val="10B981"/>
+          </a:solidFill>
+          <a:ln>
+            <a:noFill/>
+          </a:ln>
+          <a:effectLst/>
+        </p:spPr>
+        <p:style>
+          <a:lnRef idx="1">
+            <a:schemeClr val="accent1"/>
+          </a:lnRef>
+          <a:fillRef idx="3">
+            <a:schemeClr val="accent1"/>
+          </a:fillRef>
+          <a:effectRef idx="2">
+            <a:schemeClr val="accent1"/>
+          </a:effectRef>
+          <a:fontRef idx="minor">
+            <a:schemeClr val="lt1"/>
+          </a:fontRef>
+        </p:style>
+        <p:txBody>
+          <a:bodyPr rtlCol="0" anchor="ctr"/>
+          <a:lstStyle/>
+          <a:p>
+            <a:pPr algn="ctr"/>
+            <a:endParaRPr sz="1050">
+              <a:latin typeface="+mj-lt"/>
+            </a:endParaRPr>
+          </a:p>
+        </p:txBody>
+      </p:sp>
+      <p:sp>
+        <p:nvSpPr>
+          <p:cNvPr id="20" name="Rounded Rectangle 19"/>
+          <p:cNvSpPr/>
+          <p:nvPr/>
+        </p:nvSpPr>
+        <p:spPr>
+          <a:xfrm>
+            <a:off x="6432174" y="1335546"/>
+            <a:ext cx="528638" cy="121444"/>
+          </a:xfrm>
+          <a:prstGeom prst="roundRect">
+            <a:avLst>
+              <a:gd name="adj" fmla="val 23529"/>
+            </a:avLst>
+          </a:prstGeom>
+          <a:solidFill>
+            <a:srgbClr val="F97316"/>
+          </a:solidFill>
+          <a:ln>
+            <a:noFill/>
+          </a:ln>
+          <a:effectLst/>
+        </p:spPr>
+        <p:style>
+          <a:lnRef idx="1">
+            <a:schemeClr val="accent1"/>
+          </a:lnRef>
+          <a:fillRef idx="3">
+            <a:schemeClr val="accent1"/>
+          </a:fillRef>
+          <a:effectRef idx="2">
+            <a:schemeClr val="accent1"/>
+          </a:effectRef>
+          <a:fontRef idx="minor">
+            <a:schemeClr val="lt1"/>
+          </a:fontRef>
+        </p:style>
+        <p:txBody>
+          <a:bodyPr rtlCol="0" anchor="ctr"/>
+          <a:lstStyle/>
+          <a:p>
+            <a:pPr algn="ctr"/>
+            <a:endParaRPr sz="1050">
+              <a:latin typeface="+mj-lt"/>
+            </a:endParaRPr>
+          </a:p>
+        </p:txBody>
+      </p:sp>
       <p:pic>
         <p:nvPicPr>
-          <p:cNvPr id="76" name="Google Shape;76;p16" title="Frame 144.png">
+          <p:cNvPr id="23" name="Picture 22" descr="image.png"/>
+          <p:cNvPicPr>
+            <a:picLocks noChangeAspect="1"/>
+          </p:cNvPicPr>
+          <p:nvPr/>
+        </p:nvPicPr>
+        <p:blipFill>
+          <a:blip r:embed="rId2"/>
+          <a:stretch>
+            <a:fillRect/>
+          </a:stretch>
+        </p:blipFill>
+        <p:spPr>
+          <a:xfrm>
+            <a:off x="414337" y="1003362"/>
+            <a:ext cx="128588" cy="128588"/>
+          </a:xfrm>
+          <a:prstGeom prst="rect">
+            <a:avLst/>
+          </a:prstGeom>
+        </p:spPr>
+      </p:pic>
+      <p:pic>
+        <p:nvPicPr>
+          <p:cNvPr id="24" name="Picture 23" descr="image.png"/>
+          <p:cNvPicPr>
+            <a:picLocks noChangeAspect="1"/>
+          </p:cNvPicPr>
+          <p:nvPr/>
+        </p:nvPicPr>
+        <p:blipFill>
+          <a:blip r:embed="rId3"/>
+          <a:stretch>
+            <a:fillRect/>
+          </a:stretch>
+        </p:blipFill>
+        <p:spPr>
+          <a:xfrm>
+            <a:off x="504201" y="1192671"/>
+            <a:ext cx="91529" cy="85725"/>
+          </a:xfrm>
+          <a:prstGeom prst="rect">
+            <a:avLst/>
+          </a:prstGeom>
+        </p:spPr>
+      </p:pic>
+      <p:pic>
+        <p:nvPicPr>
+          <p:cNvPr id="25" name="Picture 24" descr="image.png"/>
+          <p:cNvPicPr>
+            <a:picLocks noChangeAspect="1"/>
+          </p:cNvPicPr>
+          <p:nvPr/>
+        </p:nvPicPr>
+        <p:blipFill>
+          <a:blip r:embed="rId4"/>
+          <a:stretch>
+            <a:fillRect/>
+          </a:stretch>
+        </p:blipFill>
+        <p:spPr>
+          <a:xfrm>
+            <a:off x="4246187" y="1192671"/>
+            <a:ext cx="91529" cy="85725"/>
+          </a:xfrm>
+          <a:prstGeom prst="rect">
+            <a:avLst/>
+          </a:prstGeom>
+        </p:spPr>
+      </p:pic>
+      <p:pic>
+        <p:nvPicPr>
+          <p:cNvPr id="26" name="Picture 25" descr="image.png"/>
+          <p:cNvPicPr>
+            <a:picLocks noChangeAspect="1"/>
+          </p:cNvPicPr>
+          <p:nvPr/>
+        </p:nvPicPr>
+        <p:blipFill>
+          <a:blip r:embed="rId5"/>
+          <a:stretch>
+            <a:fillRect/>
+          </a:stretch>
+        </p:blipFill>
+        <p:spPr>
+          <a:xfrm>
+            <a:off x="6303586" y="1356978"/>
+            <a:ext cx="71438" cy="78581"/>
+          </a:xfrm>
+          <a:prstGeom prst="rect">
+            <a:avLst/>
+          </a:prstGeom>
+        </p:spPr>
+      </p:pic>
+      <p:pic>
+        <p:nvPicPr>
+          <p:cNvPr id="27" name="Picture 26" descr="image.png"/>
+          <p:cNvPicPr>
+            <a:picLocks noChangeAspect="1"/>
+          </p:cNvPicPr>
+          <p:nvPr/>
+        </p:nvPicPr>
+        <p:blipFill>
+          <a:blip r:embed="rId6"/>
+          <a:stretch>
+            <a:fillRect/>
+          </a:stretch>
+        </p:blipFill>
+        <p:spPr>
+          <a:xfrm>
+            <a:off x="4246186" y="1514140"/>
+            <a:ext cx="85725" cy="85725"/>
+          </a:xfrm>
+          <a:prstGeom prst="rect">
+            <a:avLst/>
+          </a:prstGeom>
+        </p:spPr>
+      </p:pic>
+      <p:pic>
+        <p:nvPicPr>
+          <p:cNvPr id="28" name="Picture 27" descr="image.png"/>
+          <p:cNvPicPr>
+            <a:picLocks noChangeAspect="1"/>
+          </p:cNvPicPr>
+          <p:nvPr/>
+        </p:nvPicPr>
+        <p:blipFill>
+          <a:blip r:embed="rId7"/>
+          <a:stretch>
+            <a:fillRect/>
+          </a:stretch>
+        </p:blipFill>
+        <p:spPr>
+          <a:xfrm>
+            <a:off x="447051" y="2257759"/>
+            <a:ext cx="100013" cy="100013"/>
+          </a:xfrm>
+          <a:prstGeom prst="rect">
+            <a:avLst/>
+          </a:prstGeom>
+        </p:spPr>
+      </p:pic>
+      <p:pic>
+        <p:nvPicPr>
+          <p:cNvPr id="29" name="Picture 28" descr="image.png"/>
+          <p:cNvPicPr>
+            <a:picLocks noChangeAspect="1"/>
+          </p:cNvPicPr>
+          <p:nvPr/>
+        </p:nvPicPr>
+        <p:blipFill>
+          <a:blip r:embed="rId8"/>
+          <a:stretch>
+            <a:fillRect/>
+          </a:stretch>
+        </p:blipFill>
+        <p:spPr>
+          <a:xfrm>
+            <a:off x="3294951" y="2257759"/>
+            <a:ext cx="100013" cy="100013"/>
+          </a:xfrm>
+          <a:prstGeom prst="rect">
+            <a:avLst/>
+          </a:prstGeom>
+        </p:spPr>
+      </p:pic>
+      <p:pic>
+        <p:nvPicPr>
+          <p:cNvPr id="30" name="Picture 29" descr="image.png"/>
+          <p:cNvPicPr>
+            <a:picLocks noChangeAspect="1"/>
+          </p:cNvPicPr>
+          <p:nvPr/>
+        </p:nvPicPr>
+        <p:blipFill>
+          <a:blip r:embed="rId9"/>
+          <a:stretch>
+            <a:fillRect/>
+          </a:stretch>
+        </p:blipFill>
+        <p:spPr>
+          <a:xfrm>
+            <a:off x="6142963" y="2257759"/>
+            <a:ext cx="100013" cy="100013"/>
+          </a:xfrm>
+          <a:prstGeom prst="rect">
+            <a:avLst/>
+          </a:prstGeom>
+        </p:spPr>
+      </p:pic>
+      <p:pic>
+        <p:nvPicPr>
+          <p:cNvPr id="31" name="Picture 30" descr="image.png"/>
+          <p:cNvPicPr>
+            <a:picLocks noChangeAspect="1"/>
+          </p:cNvPicPr>
+          <p:nvPr/>
+        </p:nvPicPr>
+        <p:blipFill>
+          <a:blip r:embed="rId7"/>
+          <a:stretch>
+            <a:fillRect/>
+          </a:stretch>
+        </p:blipFill>
+        <p:spPr>
+          <a:xfrm>
+            <a:off x="447051" y="2977715"/>
+            <a:ext cx="100013" cy="100013"/>
+          </a:xfrm>
+          <a:prstGeom prst="rect">
+            <a:avLst/>
+          </a:prstGeom>
+        </p:spPr>
+      </p:pic>
+      <p:pic>
+        <p:nvPicPr>
+          <p:cNvPr id="32" name="Picture 31" descr="image.png"/>
+          <p:cNvPicPr>
+            <a:picLocks noChangeAspect="1"/>
+          </p:cNvPicPr>
+          <p:nvPr/>
+        </p:nvPicPr>
+        <p:blipFill>
+          <a:blip r:embed="rId10"/>
+          <a:stretch>
+            <a:fillRect/>
+          </a:stretch>
+        </p:blipFill>
+        <p:spPr>
+          <a:xfrm>
+            <a:off x="3294951" y="2977715"/>
+            <a:ext cx="100013" cy="100013"/>
+          </a:xfrm>
+          <a:prstGeom prst="rect">
+            <a:avLst/>
+          </a:prstGeom>
+        </p:spPr>
+      </p:pic>
+      <p:sp>
+        <p:nvSpPr>
+          <p:cNvPr id="34" name="TextBox 33"/>
+          <p:cNvSpPr txBox="1"/>
+          <p:nvPr/>
+        </p:nvSpPr>
+        <p:spPr>
+          <a:xfrm>
+            <a:off x="325608" y="1893428"/>
+            <a:ext cx="2468625" cy="121252"/>
+          </a:xfrm>
+          <a:prstGeom prst="rect">
+            <a:avLst/>
+          </a:prstGeom>
+          <a:noFill/>
+        </p:spPr>
+        <p:txBody>
+          <a:bodyPr wrap="none" lIns="0" tIns="0" rIns="0" bIns="0" anchor="t">
+            <a:spAutoFit/>
+          </a:bodyPr>
+          <a:lstStyle/>
+          <a:p>
+            <a:pPr algn="l"/>
+            <a:r>
+              <a:rPr sz="788" b="1">
+                <a:solidFill>
+                  <a:srgbClr val="334155"/>
+                </a:solidFill>
+                <a:latin typeface="+mj-lt"/>
+              </a:rPr>
+              <a:t>KEY TECHNICAL MECHANISMS (LIVE PLATFORM)</a:t>
+            </a:r>
+          </a:p>
+        </p:txBody>
+      </p:sp>
+      <p:sp>
+        <p:nvSpPr>
+          <p:cNvPr id="35" name="TextBox 34"/>
+          <p:cNvSpPr txBox="1"/>
+          <p:nvPr/>
+        </p:nvSpPr>
+        <p:spPr>
+          <a:xfrm>
+            <a:off x="539920" y="4054078"/>
+            <a:ext cx="857250" cy="95282"/>
+          </a:xfrm>
+          <a:prstGeom prst="rect">
+            <a:avLst/>
+          </a:prstGeom>
+          <a:noFill/>
+        </p:spPr>
+        <p:txBody>
+          <a:bodyPr wrap="square" lIns="0" tIns="0" rIns="0" bIns="0" anchor="t">
+            <a:spAutoFit/>
+          </a:bodyPr>
+          <a:lstStyle/>
+          <a:p>
+            <a:pPr algn="l"/>
+            <a:r>
+              <a:rPr sz="619" b="1">
+                <a:solidFill>
+                  <a:srgbClr val="FFFFFF"/>
+                </a:solidFill>
+                <a:latin typeface="+mj-lt"/>
+              </a:rPr>
+              <a:t>EXPECTED IMPACT</a:t>
+            </a:r>
+          </a:p>
+        </p:txBody>
+      </p:sp>
+      <p:sp>
+        <p:nvSpPr>
+          <p:cNvPr id="36" name="TextBox 35"/>
+          <p:cNvSpPr txBox="1"/>
+          <p:nvPr/>
+        </p:nvSpPr>
+        <p:spPr>
+          <a:xfrm>
+            <a:off x="1497182" y="3975163"/>
+            <a:ext cx="7215188" cy="120931"/>
+          </a:xfrm>
+          <a:prstGeom prst="rect">
+            <a:avLst/>
+          </a:prstGeom>
+          <a:noFill/>
+        </p:spPr>
+        <p:txBody>
+          <a:bodyPr wrap="square" lIns="0" tIns="0" rIns="0" bIns="0" anchor="t">
+            <a:spAutoFit/>
+          </a:bodyPr>
+          <a:lstStyle/>
+          <a:p>
+            <a:pPr>
+              <a:lnSpc>
+                <a:spcPts val="987"/>
+              </a:lnSpc>
+            </a:pPr>
+            <a:r>
+              <a:rPr sz="731" dirty="0">
+                <a:solidFill>
+                  <a:srgbClr val="E2E8F0"/>
+                </a:solidFill>
+                <a:latin typeface="+mj-lt"/>
+              </a:rPr>
+              <a:t>TerraGrid automates the data-gathering and recommendation pipeline, </a:t>
+            </a:r>
+            <a:r>
+              <a:rPr sz="731" b="1" dirty="0">
+                <a:solidFill>
+                  <a:srgbClr val="38BDF8"/>
+                </a:solidFill>
+                <a:latin typeface="+mj-lt"/>
+              </a:rPr>
+              <a:t>compressing hours of manual analysis into seconds</a:t>
+            </a:r>
+            <a:r>
+              <a:rPr sz="731" dirty="0">
+                <a:solidFill>
+                  <a:srgbClr val="E2E8F0"/>
+                </a:solidFill>
+                <a:latin typeface="+mj-lt"/>
+              </a:rPr>
+              <a:t> to accelerate critical emergency responses.</a:t>
+            </a:r>
+          </a:p>
+        </p:txBody>
+      </p:sp>
+      <p:sp>
+        <p:nvSpPr>
+          <p:cNvPr id="38" name="TextBox 37"/>
+          <p:cNvSpPr txBox="1"/>
+          <p:nvPr/>
+        </p:nvSpPr>
+        <p:spPr>
+          <a:xfrm>
+            <a:off x="638593" y="1183597"/>
+            <a:ext cx="904094" cy="103875"/>
+          </a:xfrm>
+          <a:prstGeom prst="rect">
+            <a:avLst/>
+          </a:prstGeom>
+          <a:noFill/>
+        </p:spPr>
+        <p:txBody>
+          <a:bodyPr wrap="none" lIns="0" tIns="0" rIns="0" bIns="0" anchor="ctr">
+            <a:spAutoFit/>
+          </a:bodyPr>
+          <a:lstStyle/>
+          <a:p>
+            <a:pPr algn="l"/>
+            <a:r>
+              <a:rPr sz="675" b="1" dirty="0">
+                <a:solidFill>
+                  <a:srgbClr val="DC2626"/>
+                </a:solidFill>
+                <a:latin typeface="+mj-lt"/>
+              </a:rPr>
+              <a:t>THE CORE PROBLEM</a:t>
+            </a:r>
+          </a:p>
+        </p:txBody>
+      </p:sp>
+      <p:sp>
+        <p:nvSpPr>
+          <p:cNvPr id="39" name="TextBox 38"/>
+          <p:cNvSpPr txBox="1"/>
+          <p:nvPr/>
+        </p:nvSpPr>
+        <p:spPr>
+          <a:xfrm>
+            <a:off x="504201" y="1331974"/>
+            <a:ext cx="3370511" cy="299762"/>
+          </a:xfrm>
+          <a:prstGeom prst="rect">
+            <a:avLst/>
+          </a:prstGeom>
+          <a:noFill/>
+        </p:spPr>
+        <p:txBody>
+          <a:bodyPr wrap="square" lIns="0" tIns="0" rIns="0" bIns="0" anchor="t">
+            <a:spAutoFit/>
+          </a:bodyPr>
+          <a:lstStyle/>
+          <a:p>
+            <a:pPr>
+              <a:lnSpc>
+                <a:spcPts val="1170"/>
+              </a:lnSpc>
+            </a:pPr>
+            <a:r>
+              <a:rPr sz="900" b="1" dirty="0">
+                <a:solidFill>
+                  <a:srgbClr val="7F1D1D"/>
+                </a:solidFill>
+                <a:latin typeface="+mj-lt"/>
+              </a:rPr>
+              <a:t>Decision-to-action takes hours today. Preventable lives are lost due to delayed information.</a:t>
+            </a:r>
+          </a:p>
+        </p:txBody>
+      </p:sp>
+      <p:sp>
+        <p:nvSpPr>
+          <p:cNvPr id="40" name="TextBox 39"/>
+          <p:cNvSpPr txBox="1"/>
+          <p:nvPr/>
+        </p:nvSpPr>
+        <p:spPr>
+          <a:xfrm>
+            <a:off x="4380578" y="1183597"/>
+            <a:ext cx="1245534" cy="103875"/>
+          </a:xfrm>
+          <a:prstGeom prst="rect">
+            <a:avLst/>
+          </a:prstGeom>
+          <a:noFill/>
+        </p:spPr>
+        <p:txBody>
+          <a:bodyPr wrap="none" lIns="0" tIns="0" rIns="0" bIns="0" anchor="ctr">
+            <a:spAutoFit/>
+          </a:bodyPr>
+          <a:lstStyle/>
+          <a:p>
+            <a:pPr algn="l"/>
+            <a:r>
+              <a:rPr sz="675" b="1">
+                <a:solidFill>
+                  <a:srgbClr val="059669"/>
+                </a:solidFill>
+                <a:latin typeface="+mj-lt"/>
+              </a:rPr>
+              <a:t>TERRAGRID SOLUTION PATH</a:t>
+            </a:r>
+          </a:p>
+        </p:txBody>
+      </p:sp>
+      <p:sp>
+        <p:nvSpPr>
+          <p:cNvPr id="41" name="TextBox 40"/>
+          <p:cNvSpPr txBox="1"/>
+          <p:nvPr/>
+        </p:nvSpPr>
+        <p:spPr>
+          <a:xfrm>
+            <a:off x="604213" y="2247140"/>
+            <a:ext cx="1207062" cy="121252"/>
+          </a:xfrm>
+          <a:prstGeom prst="rect">
+            <a:avLst/>
+          </a:prstGeom>
+          <a:noFill/>
+        </p:spPr>
+        <p:txBody>
+          <a:bodyPr wrap="none" lIns="0" tIns="0" rIns="0" bIns="0" anchor="ctr">
+            <a:spAutoFit/>
+          </a:bodyPr>
+          <a:lstStyle/>
+          <a:p>
+            <a:pPr algn="l"/>
+            <a:r>
+              <a:rPr sz="788" b="1">
+                <a:solidFill>
+                  <a:srgbClr val="0F172A"/>
+                </a:solidFill>
+                <a:latin typeface="+mj-lt"/>
+              </a:rPr>
+              <a:t>Multi-Source Intelligence</a:t>
+            </a:r>
+          </a:p>
+        </p:txBody>
+      </p:sp>
+      <p:sp>
+        <p:nvSpPr>
+          <p:cNvPr id="42" name="TextBox 41"/>
+          <p:cNvSpPr txBox="1"/>
+          <p:nvPr/>
+        </p:nvSpPr>
+        <p:spPr>
+          <a:xfrm>
+            <a:off x="447051" y="2414922"/>
+            <a:ext cx="2590725" cy="247312"/>
+          </a:xfrm>
+          <a:prstGeom prst="rect">
+            <a:avLst/>
+          </a:prstGeom>
+          <a:noFill/>
+        </p:spPr>
+        <p:txBody>
+          <a:bodyPr wrap="square" lIns="0" tIns="0" rIns="0" bIns="0" anchor="t">
+            <a:spAutoFit/>
+          </a:bodyPr>
+          <a:lstStyle/>
+          <a:p>
+            <a:pPr>
+              <a:lnSpc>
+                <a:spcPts val="979"/>
+              </a:lnSpc>
+            </a:pPr>
+            <a:r>
+              <a:rPr sz="675">
+                <a:solidFill>
+                  <a:srgbClr val="475569"/>
+                </a:solidFill>
+                <a:latin typeface="+mj-lt"/>
+              </a:rPr>
+              <a:t>Auto-ingests </a:t>
+            </a:r>
+            <a:r>
+              <a:rPr sz="675" b="1">
+                <a:solidFill>
+                  <a:srgbClr val="475569"/>
+                </a:solidFill>
+                <a:latin typeface="+mj-lt"/>
+              </a:rPr>
+              <a:t>7 live APIs</a:t>
+            </a:r>
+            <a:r>
+              <a:rPr sz="675">
+                <a:solidFill>
+                  <a:srgbClr val="475569"/>
+                </a:solidFill>
+                <a:latin typeface="+mj-lt"/>
+              </a:rPr>
+              <a:t> (NASA EONET, USGS, NOAA, GDACS, OpenWeather, OSM, OSRM) with zero manual data gathering.</a:t>
+            </a:r>
+          </a:p>
+        </p:txBody>
+      </p:sp>
+      <p:sp>
+        <p:nvSpPr>
+          <p:cNvPr id="43" name="TextBox 42"/>
+          <p:cNvSpPr txBox="1"/>
+          <p:nvPr/>
+        </p:nvSpPr>
+        <p:spPr>
+          <a:xfrm>
+            <a:off x="3452113" y="2247140"/>
+            <a:ext cx="976229" cy="121252"/>
+          </a:xfrm>
+          <a:prstGeom prst="rect">
+            <a:avLst/>
+          </a:prstGeom>
+          <a:noFill/>
+        </p:spPr>
+        <p:txBody>
+          <a:bodyPr wrap="none" lIns="0" tIns="0" rIns="0" bIns="0" anchor="ctr">
+            <a:spAutoFit/>
+          </a:bodyPr>
+          <a:lstStyle/>
+          <a:p>
+            <a:pPr algn="l"/>
+            <a:r>
+              <a:rPr sz="788" b="1">
+                <a:solidFill>
+                  <a:srgbClr val="0F172A"/>
+                </a:solidFill>
+                <a:latin typeface="+mj-lt"/>
+              </a:rPr>
+              <a:t>AI Decision Support</a:t>
+            </a:r>
+          </a:p>
+        </p:txBody>
+      </p:sp>
+      <p:sp>
+        <p:nvSpPr>
+          <p:cNvPr id="44" name="TextBox 43"/>
+          <p:cNvSpPr txBox="1"/>
+          <p:nvPr/>
+        </p:nvSpPr>
+        <p:spPr>
+          <a:xfrm>
+            <a:off x="3294951" y="2414922"/>
+            <a:ext cx="2590837" cy="247312"/>
+          </a:xfrm>
+          <a:prstGeom prst="rect">
+            <a:avLst/>
+          </a:prstGeom>
+          <a:noFill/>
+        </p:spPr>
+        <p:txBody>
+          <a:bodyPr wrap="square" lIns="0" tIns="0" rIns="0" bIns="0" anchor="t">
+            <a:spAutoFit/>
+          </a:bodyPr>
+          <a:lstStyle/>
+          <a:p>
+            <a:pPr>
+              <a:lnSpc>
+                <a:spcPts val="979"/>
+              </a:lnSpc>
+            </a:pPr>
+            <a:r>
+              <a:rPr sz="675" b="1">
+                <a:solidFill>
+                  <a:srgbClr val="475569"/>
+                </a:solidFill>
+                <a:latin typeface="+mj-lt"/>
+              </a:rPr>
+              <a:t>Gemini 2.5 Flash</a:t>
+            </a:r>
+            <a:r>
+              <a:rPr sz="675">
+                <a:solidFill>
+                  <a:srgbClr val="475569"/>
+                </a:solidFill>
+                <a:latin typeface="+mj-lt"/>
+              </a:rPr>
+              <a:t> generates action timelines, preparedness checklists, and agency alert drafts with confidence scoring.</a:t>
+            </a:r>
+          </a:p>
+        </p:txBody>
+      </p:sp>
+      <p:sp>
+        <p:nvSpPr>
+          <p:cNvPr id="45" name="TextBox 44"/>
+          <p:cNvSpPr txBox="1"/>
+          <p:nvPr/>
+        </p:nvSpPr>
+        <p:spPr>
+          <a:xfrm>
+            <a:off x="6300126" y="2247140"/>
+            <a:ext cx="1300036" cy="121252"/>
+          </a:xfrm>
+          <a:prstGeom prst="rect">
+            <a:avLst/>
+          </a:prstGeom>
+          <a:noFill/>
+        </p:spPr>
+        <p:txBody>
+          <a:bodyPr wrap="none" lIns="0" tIns="0" rIns="0" bIns="0" anchor="ctr">
+            <a:spAutoFit/>
+          </a:bodyPr>
+          <a:lstStyle/>
+          <a:p>
+            <a:pPr algn="l"/>
+            <a:r>
+              <a:rPr sz="788" b="1">
+                <a:solidFill>
+                  <a:srgbClr val="0F172A"/>
+                </a:solidFill>
+                <a:latin typeface="+mj-lt"/>
+              </a:rPr>
+              <a:t>Evacuation Route Pre-Calc</a:t>
+            </a:r>
+          </a:p>
+        </p:txBody>
+      </p:sp>
+      <p:sp>
+        <p:nvSpPr>
+          <p:cNvPr id="46" name="TextBox 45"/>
+          <p:cNvSpPr txBox="1"/>
+          <p:nvPr/>
+        </p:nvSpPr>
+        <p:spPr>
+          <a:xfrm>
+            <a:off x="6142963" y="2414922"/>
+            <a:ext cx="2590725" cy="247312"/>
+          </a:xfrm>
+          <a:prstGeom prst="rect">
+            <a:avLst/>
+          </a:prstGeom>
+          <a:noFill/>
+        </p:spPr>
+        <p:txBody>
+          <a:bodyPr wrap="square" lIns="0" tIns="0" rIns="0" bIns="0" anchor="t">
+            <a:spAutoFit/>
+          </a:bodyPr>
+          <a:lstStyle/>
+          <a:p>
+            <a:pPr>
+              <a:lnSpc>
+                <a:spcPts val="979"/>
+              </a:lnSpc>
+            </a:pPr>
+            <a:r>
+              <a:rPr sz="675" b="1">
+                <a:solidFill>
+                  <a:srgbClr val="475569"/>
+                </a:solidFill>
+                <a:latin typeface="+mj-lt"/>
+              </a:rPr>
+              <a:t>OSRM road-network routing</a:t>
+            </a:r>
+            <a:r>
+              <a:rPr sz="675">
+                <a:solidFill>
+                  <a:srgbClr val="475569"/>
+                </a:solidFill>
+                <a:latin typeface="+mj-lt"/>
+              </a:rPr>
+              <a:t> with automatic geodesic fallback algorithms if primary routing services fail.</a:t>
+            </a:r>
+          </a:p>
+        </p:txBody>
+      </p:sp>
+      <p:sp>
+        <p:nvSpPr>
+          <p:cNvPr id="47" name="TextBox 46"/>
+          <p:cNvSpPr txBox="1"/>
+          <p:nvPr/>
+        </p:nvSpPr>
+        <p:spPr>
+          <a:xfrm>
+            <a:off x="604214" y="2967096"/>
+            <a:ext cx="992259" cy="121252"/>
+          </a:xfrm>
+          <a:prstGeom prst="rect">
+            <a:avLst/>
+          </a:prstGeom>
+          <a:noFill/>
+        </p:spPr>
+        <p:txBody>
+          <a:bodyPr wrap="none" lIns="0" tIns="0" rIns="0" bIns="0" anchor="ctr">
+            <a:spAutoFit/>
+          </a:bodyPr>
+          <a:lstStyle/>
+          <a:p>
+            <a:pPr algn="l"/>
+            <a:r>
+              <a:rPr sz="788" b="1">
+                <a:solidFill>
+                  <a:srgbClr val="0F172A"/>
+                </a:solidFill>
+                <a:latin typeface="+mj-lt"/>
+              </a:rPr>
+              <a:t>Multi-Channel Alerts</a:t>
+            </a:r>
+          </a:p>
+        </p:txBody>
+      </p:sp>
+      <p:sp>
+        <p:nvSpPr>
+          <p:cNvPr id="48" name="TextBox 47"/>
+          <p:cNvSpPr txBox="1"/>
+          <p:nvPr/>
+        </p:nvSpPr>
+        <p:spPr>
+          <a:xfrm>
+            <a:off x="447051" y="3134878"/>
+            <a:ext cx="2590725" cy="372346"/>
+          </a:xfrm>
+          <a:prstGeom prst="rect">
+            <a:avLst/>
+          </a:prstGeom>
+          <a:noFill/>
+        </p:spPr>
+        <p:txBody>
+          <a:bodyPr wrap="square" lIns="0" tIns="0" rIns="0" bIns="0" anchor="t">
+            <a:spAutoFit/>
+          </a:bodyPr>
+          <a:lstStyle/>
+          <a:p>
+            <a:pPr>
+              <a:lnSpc>
+                <a:spcPts val="979"/>
+              </a:lnSpc>
+            </a:pPr>
+            <a:r>
+              <a:rPr sz="675">
+                <a:solidFill>
+                  <a:srgbClr val="475569"/>
+                </a:solidFill>
+                <a:latin typeface="+mj-lt"/>
+              </a:rPr>
+              <a:t>Delivers adapted messaging via </a:t>
+            </a:r>
+            <a:r>
+              <a:rPr sz="675" b="1">
+                <a:solidFill>
+                  <a:srgbClr val="475569"/>
+                </a:solidFill>
+                <a:latin typeface="+mj-lt"/>
+              </a:rPr>
+              <a:t>WhatsApp (WAHA)</a:t>
+            </a:r>
+            <a:r>
+              <a:rPr sz="675">
+                <a:solidFill>
+                  <a:srgbClr val="475569"/>
+                </a:solidFill>
+                <a:latin typeface="+mj-lt"/>
+              </a:rPr>
+              <a:t> and </a:t>
+            </a:r>
+            <a:r>
+              <a:rPr sz="675" b="1">
+                <a:solidFill>
+                  <a:srgbClr val="475569"/>
+                </a:solidFill>
+                <a:latin typeface="+mj-lt"/>
+              </a:rPr>
+              <a:t>Email (Resend)</a:t>
+            </a:r>
+            <a:r>
+              <a:rPr sz="675">
+                <a:solidFill>
+                  <a:srgbClr val="475569"/>
+                </a:solidFill>
+                <a:latin typeface="+mj-lt"/>
+              </a:rPr>
+              <a:t> tailored for farmers, hospitals, NGOs, and municipal corps.</a:t>
+            </a:r>
+          </a:p>
+        </p:txBody>
+      </p:sp>
+      <p:sp>
+        <p:nvSpPr>
+          <p:cNvPr id="49" name="TextBox 48"/>
+          <p:cNvSpPr txBox="1"/>
+          <p:nvPr/>
+        </p:nvSpPr>
+        <p:spPr>
+          <a:xfrm>
+            <a:off x="3452113" y="2967096"/>
+            <a:ext cx="1676741" cy="121252"/>
+          </a:xfrm>
+          <a:prstGeom prst="rect">
+            <a:avLst/>
+          </a:prstGeom>
+          <a:noFill/>
+        </p:spPr>
+        <p:txBody>
+          <a:bodyPr wrap="none" lIns="0" tIns="0" rIns="0" bIns="0" anchor="ctr">
+            <a:spAutoFit/>
+          </a:bodyPr>
+          <a:lstStyle/>
+          <a:p>
+            <a:pPr algn="l"/>
+            <a:r>
+              <a:rPr sz="788" b="1">
+                <a:solidFill>
+                  <a:srgbClr val="0F172A"/>
+                </a:solidFill>
+                <a:latin typeface="+mj-lt"/>
+              </a:rPr>
+              <a:t>Transparent Cross-Check Logging</a:t>
+            </a:r>
+          </a:p>
+        </p:txBody>
+      </p:sp>
+      <p:sp>
+        <p:nvSpPr>
+          <p:cNvPr id="50" name="TextBox 49"/>
+          <p:cNvSpPr txBox="1"/>
+          <p:nvPr/>
+        </p:nvSpPr>
+        <p:spPr>
+          <a:xfrm>
+            <a:off x="3294951" y="3134878"/>
+            <a:ext cx="5438738" cy="244106"/>
+          </a:xfrm>
+          <a:prstGeom prst="rect">
+            <a:avLst/>
+          </a:prstGeom>
+          <a:noFill/>
+        </p:spPr>
+        <p:txBody>
+          <a:bodyPr wrap="square" lIns="0" tIns="0" rIns="0" bIns="0" anchor="t">
+            <a:spAutoFit/>
+          </a:bodyPr>
+          <a:lstStyle/>
+          <a:p>
+            <a:pPr>
+              <a:lnSpc>
+                <a:spcPts val="979"/>
+              </a:lnSpc>
+            </a:pPr>
+            <a:r>
+              <a:rPr sz="675">
+                <a:solidFill>
+                  <a:srgbClr val="475569"/>
+                </a:solidFill>
+                <a:latin typeface="+mj-lt"/>
+              </a:rPr>
+              <a:t>Every external API payload and Gemini AI response is saved to disk as a timestamped </a:t>
+            </a:r>
+            <a:r>
+              <a:rPr sz="675" b="1">
+                <a:solidFill>
+                  <a:srgbClr val="475569"/>
+                </a:solidFill>
+                <a:latin typeface="+mj-lt"/>
+              </a:rPr>
+              <a:t>JSON envelope</a:t>
+            </a:r>
+            <a:r>
+              <a:rPr sz="675">
+                <a:solidFill>
+                  <a:srgbClr val="475569"/>
+                </a:solidFill>
+                <a:latin typeface="+mj-lt"/>
+              </a:rPr>
+              <a:t> — fully auditable, non-blackbox architecture.</a:t>
+            </a:r>
+          </a:p>
+        </p:txBody>
+      </p:sp>
+      <p:sp>
+        <p:nvSpPr>
+          <p:cNvPr id="51" name="TextBox 50"/>
+          <p:cNvSpPr txBox="1"/>
+          <p:nvPr/>
+        </p:nvSpPr>
+        <p:spPr>
+          <a:xfrm>
+            <a:off x="4303337" y="1349833"/>
+            <a:ext cx="407194" cy="95282"/>
+          </a:xfrm>
+          <a:prstGeom prst="rect">
+            <a:avLst/>
+          </a:prstGeom>
+          <a:noFill/>
+        </p:spPr>
+        <p:txBody>
+          <a:bodyPr wrap="square" lIns="0" tIns="0" rIns="0" bIns="0" anchor="t">
+            <a:spAutoFit/>
+          </a:bodyPr>
+          <a:lstStyle/>
+          <a:p>
+            <a:pPr algn="l"/>
+            <a:r>
+              <a:rPr sz="619" b="1" dirty="0">
+                <a:solidFill>
+                  <a:srgbClr val="F8FAFC"/>
+                </a:solidFill>
+                <a:latin typeface="+mj-lt"/>
+              </a:rPr>
+              <a:t>PREPARE</a:t>
+            </a:r>
+          </a:p>
+        </p:txBody>
+      </p:sp>
+      <p:sp>
+        <p:nvSpPr>
+          <p:cNvPr id="52" name="TextBox 51"/>
+          <p:cNvSpPr txBox="1"/>
+          <p:nvPr/>
+        </p:nvSpPr>
+        <p:spPr>
+          <a:xfrm>
+            <a:off x="6489324" y="1349833"/>
+            <a:ext cx="485775" cy="95282"/>
+          </a:xfrm>
+          <a:prstGeom prst="rect">
+            <a:avLst/>
+          </a:prstGeom>
+          <a:noFill/>
+        </p:spPr>
+        <p:txBody>
+          <a:bodyPr wrap="square" lIns="0" tIns="0" rIns="0" bIns="0" anchor="t">
+            <a:spAutoFit/>
+          </a:bodyPr>
+          <a:lstStyle/>
+          <a:p>
+            <a:pPr algn="l"/>
+            <a:r>
+              <a:rPr sz="619" b="1">
+                <a:solidFill>
+                  <a:srgbClr val="F8FAFC"/>
+                </a:solidFill>
+                <a:latin typeface="+mj-lt"/>
+              </a:rPr>
+              <a:t>RESPONSE</a:t>
+            </a:r>
+          </a:p>
+        </p:txBody>
+      </p:sp>
+      <p:sp>
+        <p:nvSpPr>
+          <p:cNvPr id="53" name="TextBox 52"/>
+          <p:cNvSpPr txBox="1"/>
+          <p:nvPr/>
+        </p:nvSpPr>
+        <p:spPr>
+          <a:xfrm>
+            <a:off x="4374774" y="1503425"/>
+            <a:ext cx="423193" cy="103875"/>
+          </a:xfrm>
+          <a:prstGeom prst="rect">
+            <a:avLst/>
+          </a:prstGeom>
+          <a:noFill/>
+        </p:spPr>
+        <p:txBody>
+          <a:bodyPr wrap="none" lIns="0" tIns="0" rIns="0" bIns="0" anchor="t">
+            <a:spAutoFit/>
+          </a:bodyPr>
+          <a:lstStyle/>
+          <a:p>
+            <a:pPr algn="l"/>
+            <a:r>
+              <a:rPr sz="675" b="1" i="1">
+                <a:solidFill>
+                  <a:srgbClr val="D97706"/>
+                </a:solidFill>
+                <a:latin typeface="+mj-lt"/>
+              </a:rPr>
+              <a:t>Roadmap:</a:t>
+            </a:r>
+          </a:p>
+        </p:txBody>
+      </p:sp>
+      <p:sp>
+        <p:nvSpPr>
+          <p:cNvPr id="55" name="Google Shape;79;p16">
             <a:extLst>
               <a:ext uri="{FF2B5EF4-FFF2-40B4-BE49-F238E27FC236}">
-                <a16:creationId xmlns:a16="http://schemas.microsoft.com/office/drawing/2014/main" id="{B94EE4CA-01AC-9D55-9E0A-88F0895128E7}"/>
+                <a16:creationId xmlns:a16="http://schemas.microsoft.com/office/drawing/2014/main" id="{719E0781-9593-FC75-1A23-1069CCF2DE6E}"/>
               </a:ext>
             </a:extLst>
           </p:cNvPr>
-          <p:cNvPicPr preferRelativeResize="0"/>
+          <p:cNvSpPr txBox="1"/>
           <p:nvPr/>
-        </p:nvPicPr>
-        <p:blipFill rotWithShape="1">
-          <a:blip r:embed="rId3">
-            <a:alphaModFix/>
-          </a:blip>
-          <a:srcRect b="98001"/>
-          <a:stretch/>
-        </p:blipFill>
-        <p:spPr>
-          <a:xfrm>
-            <a:off x="0" y="5093562"/>
-            <a:ext cx="9144000" cy="54275"/>
+        </p:nvSpPr>
+        <p:spPr>
+          <a:xfrm>
+            <a:off x="-159192" y="487767"/>
+            <a:ext cx="8943000" cy="344534"/>
           </a:xfrm>
           <a:prstGeom prst="rect">
             <a:avLst/>
@@ -10436,13 +12284,41 @@
             <a:noFill/>
           </a:ln>
         </p:spPr>
-      </p:pic>
+        <p:txBody>
+          <a:bodyPr spcFirstLastPara="1" wrap="square" lIns="91425" tIns="91425" rIns="91425" bIns="91425" anchor="t" anchorCtr="0">
+            <a:noAutofit/>
+          </a:bodyPr>
+          <a:lstStyle/>
+          <a:p>
+            <a:pPr marL="457200" lvl="0" indent="-311150">
+              <a:spcBef>
+                <a:spcPts val="0"/>
+              </a:spcBef>
+              <a:spcAft>
+                <a:spcPts val="400"/>
+              </a:spcAft>
+              <a:buSzPts val="1300"/>
+              <a:buFont typeface="Google Sans Flex"/>
+              <a:buNone/>
+            </a:pPr>
+            <a:r>
+              <a:rPr sz="1300" b="0" i="0" dirty="0">
+                <a:solidFill>
+                  <a:srgbClr val="1A1A1A"/>
+                </a:solidFill>
+                <a:latin typeface="+mj-lt"/>
+              </a:rPr>
+              <a:t>How will it be able to solve the problem?</a:t>
+            </a:r>
+          </a:p>
+        </p:txBody>
+      </p:sp>
       <p:pic>
         <p:nvPicPr>
-          <p:cNvPr id="77" name="Google Shape;77;p16" title="Group 427319979.png">
+          <p:cNvPr id="57" name="Google Shape;77;p16" title="Group 427319979.png">
             <a:extLst>
               <a:ext uri="{FF2B5EF4-FFF2-40B4-BE49-F238E27FC236}">
-                <a16:creationId xmlns:a16="http://schemas.microsoft.com/office/drawing/2014/main" id="{B8E24146-7543-98BD-9587-15EEAC9B5F23}"/>
+                <a16:creationId xmlns:a16="http://schemas.microsoft.com/office/drawing/2014/main" id="{633E3B41-1A3E-FC89-1929-36F9BFD5750B}"/>
               </a:ext>
             </a:extLst>
           </p:cNvPr>
@@ -10450,7 +12326,7 @@
           <p:nvPr/>
         </p:nvPicPr>
         <p:blipFill>
-          <a:blip r:embed="rId4">
+          <a:blip r:embed="rId11">
             <a:alphaModFix/>
           </a:blip>
           <a:stretch>
@@ -10471,410 +12347,7 @@
           </a:ln>
         </p:spPr>
       </p:pic>
-      <p:sp>
-        <p:nvSpPr>
-          <p:cNvPr id="78" name="Google Shape;78;p16">
-            <a:extLst>
-              <a:ext uri="{FF2B5EF4-FFF2-40B4-BE49-F238E27FC236}">
-                <a16:creationId xmlns:a16="http://schemas.microsoft.com/office/drawing/2014/main" id="{49C01654-834B-ABBD-BD46-71D16624A432}"/>
-              </a:ext>
-            </a:extLst>
-          </p:cNvPr>
-          <p:cNvSpPr/>
-          <p:nvPr/>
-        </p:nvSpPr>
-        <p:spPr>
-          <a:xfrm>
-            <a:off x="-29250" y="5071875"/>
-            <a:ext cx="9173400" cy="97800"/>
-          </a:xfrm>
-          <a:prstGeom prst="rect">
-            <a:avLst/>
-          </a:prstGeom>
-          <a:solidFill>
-            <a:schemeClr val="dk1"/>
-          </a:solidFill>
-          <a:ln>
-            <a:noFill/>
-          </a:ln>
-        </p:spPr>
-        <p:txBody>
-          <a:bodyPr spcFirstLastPara="1" wrap="square" lIns="91425" tIns="91425" rIns="91425" bIns="91425" anchor="ctr" anchorCtr="0">
-            <a:noAutofit/>
-          </a:bodyPr>
-          <a:lstStyle/>
-          <a:p>
-            <a:pPr marL="0" lvl="0" indent="0" algn="ctr" rtl="0">
-              <a:spcBef>
-                <a:spcPts val="0"/>
-              </a:spcBef>
-              <a:spcAft>
-                <a:spcPts val="0"/>
-              </a:spcAft>
-              <a:buNone/>
-            </a:pPr>
-            <a:endParaRPr/>
-          </a:p>
-        </p:txBody>
-      </p:sp>
-      <p:sp>
-        <p:nvSpPr>
-          <p:cNvPr id="79" name="Google Shape;79;p16">
-            <a:extLst>
-              <a:ext uri="{FF2B5EF4-FFF2-40B4-BE49-F238E27FC236}">
-                <a16:creationId xmlns:a16="http://schemas.microsoft.com/office/drawing/2014/main" id="{BB05B7D0-2989-16DB-A915-735B6423FE94}"/>
-              </a:ext>
-            </a:extLst>
-          </p:cNvPr>
-          <p:cNvSpPr txBox="1"/>
-          <p:nvPr/>
-        </p:nvSpPr>
-        <p:spPr>
-          <a:xfrm>
-            <a:off x="317602" y="578917"/>
-            <a:ext cx="8943000" cy="4300000"/>
-          </a:xfrm>
-          <a:prstGeom prst="rect">
-            <a:avLst/>
-          </a:prstGeom>
-          <a:noFill/>
-          <a:ln>
-            <a:noFill/>
-          </a:ln>
-        </p:spPr>
-        <p:txBody>
-          <a:bodyPr spcFirstLastPara="1" wrap="square" lIns="91425" tIns="91425" rIns="91425" bIns="91425" anchor="t" anchorCtr="0">
-            <a:noAutofit/>
-          </a:bodyPr>
-          <a:lstStyle/>
-          <a:p>
-            <a:pPr marL="457200" lvl="0" indent="-311150">
-              <a:spcBef>
-                <a:spcPts val="0"/>
-              </a:spcBef>
-              <a:spcAft>
-                <a:spcPts val="400"/>
-              </a:spcAft>
-              <a:buSzPts val="1300"/>
-              <a:buFont typeface="Google Sans Flex"/>
-              <a:buNone/>
-            </a:pPr>
-            <a:r>
-              <a:rPr sz="1300" b="0" i="0">
-                <a:solidFill>
-                  <a:srgbClr val="1A1A1A"/>
-                </a:solidFill>
-                <a:latin typeface="Google Sans Flex Medium"/>
-              </a:rPr>
-              <a:t>How will it be able to solve the problem?</a:t>
-            </a:r>
-          </a:p>
-          <a:p>
-            <a:pPr>
-              <a:spcBef>
-                <a:spcPts val="200"/>
-              </a:spcBef>
-              <a:spcAft>
-                <a:spcPts val="200"/>
-              </a:spcAft>
-            </a:pPr>
-            <a:r>
-              <a:rPr sz="950" b="1" i="0">
-                <a:solidFill>
-                  <a:srgbClr val="1A1A1A"/>
-                </a:solidFill>
-                <a:latin typeface="Google Sans Flex"/>
-              </a:rPr>
-              <a:t>The Problem: Decision-to-action takes hours today. Preventable lives are lost.</a:t>
-            </a:r>
-          </a:p>
-          <a:p>
-            <a:pPr>
-              <a:spcBef>
-                <a:spcPts val="200"/>
-              </a:spcBef>
-              <a:spcAft>
-                <a:spcPts val="100"/>
-              </a:spcAft>
-            </a:pPr>
-            <a:r>
-              <a:rPr sz="950" b="1" i="0">
-                <a:solidFill>
-                  <a:srgbClr val="1E8E3E"/>
-                </a:solidFill>
-                <a:latin typeface="Google Sans Flex"/>
-              </a:rPr>
-              <a:t>TerraGrid's Solution Path (live today): </a:t>
-            </a:r>
-            <a:r>
-              <a:rPr sz="950" b="0" i="0">
-                <a:solidFill>
-                  <a:srgbClr val="1A1A1A"/>
-                </a:solidFill>
-                <a:latin typeface="Google Sans Flex"/>
-              </a:rPr>
-              <a:t>PREPARE (AI impact analysis + checklists) → RESPONSE (live dashboard + AI-recommended actions + multi-channel alerts)</a:t>
-            </a:r>
-          </a:p>
-          <a:p>
-            <a:pPr>
-              <a:spcBef>
-                <a:spcPts val="200"/>
-              </a:spcBef>
-              <a:spcAft>
-                <a:spcPts val="400"/>
-              </a:spcAft>
-            </a:pPr>
-            <a:r>
-              <a:rPr sz="850" b="0" i="1">
-                <a:solidFill>
-                  <a:srgbClr val="B86E00"/>
-                </a:solidFill>
-                <a:latin typeface="Google Sans Flex"/>
-              </a:rPr>
-              <a:t>PREDICT and RECOVER — early warning and post-event learning — are the next two phases on the roadmap, not yet built.</a:t>
-            </a:r>
-          </a:p>
-          <a:p>
-            <a:pPr>
-              <a:spcBef>
-                <a:spcPts val="200"/>
-              </a:spcBef>
-              <a:spcAft>
-                <a:spcPts val="200"/>
-              </a:spcAft>
-            </a:pPr>
-            <a:r>
-              <a:rPr sz="1000" b="1" i="0">
-                <a:solidFill>
-                  <a:srgbClr val="1A1A1A"/>
-                </a:solidFill>
-                <a:latin typeface="Google Sans Flex Medium"/>
-              </a:rPr>
-              <a:t>Key Mechanisms (what's actually running):</a:t>
-            </a:r>
-          </a:p>
-          <a:p>
-            <a:pPr>
-              <a:spcBef>
-                <a:spcPts val="100"/>
-              </a:spcBef>
-              <a:spcAft>
-                <a:spcPts val="100"/>
-              </a:spcAft>
-            </a:pPr>
-            <a:r>
-              <a:rPr sz="950" b="1" i="0">
-                <a:solidFill>
-                  <a:srgbClr val="1E8E3E"/>
-                </a:solidFill>
-                <a:latin typeface="Google Sans Flex"/>
-              </a:rPr>
-              <a:t>✓  </a:t>
-            </a:r>
-            <a:r>
-              <a:rPr sz="950" b="1" i="0">
-                <a:solidFill>
-                  <a:srgbClr val="1A1A1A"/>
-                </a:solidFill>
-                <a:latin typeface="Google Sans Flex"/>
-              </a:rPr>
-              <a:t>Real-time Multi-Source Intelligence:</a:t>
-            </a:r>
-            <a:r>
-              <a:rPr sz="950" b="0" i="0">
-                <a:solidFill>
-                  <a:srgbClr val="1A1A1A"/>
-                </a:solidFill>
-                <a:latin typeface="Google Sans Flex"/>
-              </a:rPr>
-              <a:t> 7 APIs auto-ingested (NASA EONET, USGS, NOAA, GDACS, OpenWeatherMap, OSM, OSRM) — no manual data gathering</a:t>
-            </a:r>
-          </a:p>
-          <a:p>
-            <a:pPr>
-              <a:spcBef>
-                <a:spcPts val="100"/>
-              </a:spcBef>
-              <a:spcAft>
-                <a:spcPts val="100"/>
-              </a:spcAft>
-            </a:pPr>
-            <a:r>
-              <a:rPr sz="950" b="1" i="0">
-                <a:solidFill>
-                  <a:srgbClr val="1E8E3E"/>
-                </a:solidFill>
-                <a:latin typeface="Google Sans Flex"/>
-              </a:rPr>
-              <a:t>✓  </a:t>
-            </a:r>
-            <a:r>
-              <a:rPr sz="950" b="1" i="0">
-                <a:solidFill>
-                  <a:srgbClr val="1A1A1A"/>
-                </a:solidFill>
-                <a:latin typeface="Google Sans Flex"/>
-              </a:rPr>
-              <a:t>AI Decision Support:</a:t>
-            </a:r>
-            <a:r>
-              <a:rPr sz="950" b="0" i="0">
-                <a:solidFill>
-                  <a:srgbClr val="1A1A1A"/>
-                </a:solidFill>
-                <a:latin typeface="Google Sans Flex"/>
-              </a:rPr>
-              <a:t> Gemini 2.5 Flash generates response plans, preparedness actions, and agency alert drafts, each with a confidence score</a:t>
-            </a:r>
-          </a:p>
-          <a:p>
-            <a:pPr>
-              <a:spcBef>
-                <a:spcPts val="100"/>
-              </a:spcBef>
-              <a:spcAft>
-                <a:spcPts val="100"/>
-              </a:spcAft>
-            </a:pPr>
-            <a:r>
-              <a:rPr sz="950" b="1" i="0">
-                <a:solidFill>
-                  <a:srgbClr val="1E8E3E"/>
-                </a:solidFill>
-                <a:latin typeface="Google Sans Flex"/>
-              </a:rPr>
-              <a:t>✓  </a:t>
-            </a:r>
-            <a:r>
-              <a:rPr sz="950" b="1" i="0">
-                <a:solidFill>
-                  <a:srgbClr val="1A1A1A"/>
-                </a:solidFill>
-                <a:latin typeface="Google Sans Flex"/>
-              </a:rPr>
-              <a:t>Evacuation Route Pre-Calculation:</a:t>
-            </a:r>
-            <a:r>
-              <a:rPr sz="950" b="0" i="0">
-                <a:solidFill>
-                  <a:srgbClr val="1A1A1A"/>
-                </a:solidFill>
-                <a:latin typeface="Google Sans Flex"/>
-              </a:rPr>
-              <a:t> OSRM road-network routing with automatic geodesic fallback if the routing service fails</a:t>
-            </a:r>
-          </a:p>
-          <a:p>
-            <a:pPr>
-              <a:spcBef>
-                <a:spcPts val="100"/>
-              </a:spcBef>
-              <a:spcAft>
-                <a:spcPts val="100"/>
-              </a:spcAft>
-            </a:pPr>
-            <a:r>
-              <a:rPr sz="950" b="1" i="0">
-                <a:solidFill>
-                  <a:srgbClr val="1E8E3E"/>
-                </a:solidFill>
-                <a:latin typeface="Google Sans Flex"/>
-              </a:rPr>
-              <a:t>✓  </a:t>
-            </a:r>
-            <a:r>
-              <a:rPr sz="950" b="1" i="0">
-                <a:solidFill>
-                  <a:srgbClr val="1A1A1A"/>
-                </a:solidFill>
-                <a:latin typeface="Google Sans Flex"/>
-              </a:rPr>
-              <a:t>Multi-Channel Alerts:</a:t>
-            </a:r>
-            <a:r>
-              <a:rPr sz="950" b="0" i="0">
-                <a:solidFill>
-                  <a:srgbClr val="1A1A1A"/>
-                </a:solidFill>
-                <a:latin typeface="Google Sans Flex"/>
-              </a:rPr>
-              <a:t> WhatsApp (WAHA) + Email (Resend), tone adapted per audience (farmers, hospitals, NGOs, municipal corps)</a:t>
-            </a:r>
-          </a:p>
-          <a:p>
-            <a:pPr>
-              <a:spcBef>
-                <a:spcPts val="100"/>
-              </a:spcBef>
-              <a:spcAft>
-                <a:spcPts val="100"/>
-              </a:spcAft>
-            </a:pPr>
-            <a:r>
-              <a:rPr sz="950" b="1" i="0">
-                <a:solidFill>
-                  <a:srgbClr val="1E8E3E"/>
-                </a:solidFill>
-                <a:latin typeface="Google Sans Flex"/>
-              </a:rPr>
-              <a:t>✓  </a:t>
-            </a:r>
-            <a:r>
-              <a:rPr sz="950" b="1" i="0">
-                <a:solidFill>
-                  <a:srgbClr val="1A1A1A"/>
-                </a:solidFill>
-                <a:latin typeface="Google Sans Flex"/>
-              </a:rPr>
-              <a:t>Cross-Check Logging:</a:t>
-            </a:r>
-            <a:r>
-              <a:rPr sz="950" b="0" i="0">
-                <a:solidFill>
-                  <a:srgbClr val="1A1A1A"/>
-                </a:solidFill>
-                <a:latin typeface="Google Sans Flex"/>
-              </a:rPr>
-              <a:t> every external API call and every Gemini response is saved to disk as a JSON envelope — auditable, not a black box</a:t>
-            </a:r>
-          </a:p>
-          <a:p>
-            <a:pPr>
-              <a:spcBef>
-                <a:spcPts val="500"/>
-              </a:spcBef>
-              <a:spcAft>
-                <a:spcPts val="0"/>
-              </a:spcAft>
-            </a:pPr>
-            <a:r>
-              <a:rPr sz="950" b="1" i="0">
-                <a:solidFill>
-                  <a:srgbClr val="1A1A1A"/>
-                </a:solidFill>
-                <a:latin typeface="Google Sans Flex"/>
-              </a:rPr>
-              <a:t>Result: </a:t>
-            </a:r>
-            <a:r>
-              <a:rPr sz="950" b="0" i="1">
-                <a:solidFill>
-                  <a:srgbClr val="5F5F5F"/>
-                </a:solidFill>
-                <a:latin typeface="Google Sans Flex"/>
-              </a:rPr>
-              <a:t>TerraGrid automates the data-gathering and first-draft-recommendation steps, compressing the manual analysis chain. Exact time savings have not been formally benchmarked yet.</a:t>
-            </a:r>
-          </a:p>
-        </p:txBody>
-      </p:sp>
     </p:spTree>
-    <p:extLst>
-      <p:ext uri="{BB962C8B-B14F-4D97-AF65-F5344CB8AC3E}">
-        <p14:creationId xmlns:p14="http://schemas.microsoft.com/office/powerpoint/2010/main" val="2390917446"/>
-      </p:ext>
-    </p:extLst>
   </p:cSld>
   <p:clrMapOvr>
     <a:masterClrMapping/>
@@ -12565,8 +14038,8 @@
         </p:nvSpPr>
         <p:spPr>
           <a:xfrm>
-            <a:off x="265350" y="663825"/>
-            <a:ext cx="8943000" cy="561900"/>
+            <a:off x="-29250" y="432729"/>
+            <a:ext cx="8943000" cy="74632"/>
           </a:xfrm>
           <a:prstGeom prst="rect">
             <a:avLst/>
@@ -12591,16 +14064,7 @@
               </a:spcAft>
               <a:buNone/>
             </a:pPr>
-            <a:r>
-              <a:rPr lang="en-GB" sz="1600">
-                <a:latin typeface="Google Sans Flex Medium"/>
-                <a:ea typeface="Google Sans Flex Medium"/>
-                <a:cs typeface="Google Sans Flex Medium"/>
-                <a:sym typeface="Google Sans Flex Medium"/>
-              </a:rPr>
-              <a:t>Process flow diagram or Use-case diagram</a:t>
-            </a:r>
-            <a:endParaRPr sz="1600">
+            <a:endParaRPr sz="1600" dirty="0">
               <a:latin typeface="Google Sans Flex Medium"/>
               <a:ea typeface="Google Sans Flex Medium"/>
               <a:cs typeface="Google Sans Flex Medium"/>
@@ -12611,10 +14075,10 @@
       </p:sp>
       <p:pic>
         <p:nvPicPr>
-          <p:cNvPr id="3" name="Picture 2">
+          <p:cNvPr id="4" name="Picture 3">
             <a:extLst>
               <a:ext uri="{FF2B5EF4-FFF2-40B4-BE49-F238E27FC236}">
-                <a16:creationId xmlns:a16="http://schemas.microsoft.com/office/drawing/2014/main" id="{6DEE5C0A-4F6A-2008-2DA9-A7FB65808716}"/>
+                <a16:creationId xmlns:a16="http://schemas.microsoft.com/office/drawing/2014/main" id="{6352CB4D-585F-04CE-868C-C5D43CEC9147}"/>
               </a:ext>
             </a:extLst>
           </p:cNvPr>
@@ -12631,8 +14095,8 @@
         </p:blipFill>
         <p:spPr>
           <a:xfrm>
-            <a:off x="404950" y="217868"/>
-            <a:ext cx="7922622" cy="5143500"/>
+            <a:off x="0" y="529047"/>
+            <a:ext cx="9144000" cy="4434839"/>
           </a:xfrm>
           <a:prstGeom prst="rect">
             <a:avLst/>
